--- a/output/wordlabs-persuade-3day.pptx
+++ b/output/wordlabs-persuade-3day.pptx
@@ -4240,7 +4240,7 @@
                 <a:ea typeface="Calibri" pitchFamily="34" charset="-122"/>
                 <a:cs typeface="Calibri" pitchFamily="34" charset="-120"/>
               </a:rPr>
-              <a:t>"to urge or convince someone"</a:t>
+              <a:t>"to convince or urge someone"</a:t>
             </a:r>
             <a:endParaRPr lang="en-US" sz="2200" dirty="0"/>
           </a:p>
@@ -5288,7 +5288,7 @@
                 <a:ea typeface="Calibri" pitchFamily="34" charset="-122"/>
                 <a:cs typeface="Calibri" pitchFamily="34" charset="-120"/>
               </a:rPr>
-              <a:t>Word Labs  •  wordlabs.app  •  Root: 'persuade' = to urge or convince someone</a:t>
+              <a:t>Word Labs  •  wordlabs.app  •  Root: 'persuade' = to convince or urge someone</a:t>
             </a:r>
             <a:endParaRPr lang="en-US" sz="800" dirty="0"/>
           </a:p>
@@ -5928,7 +5928,7 @@
                 <a:ea typeface="Calibri" pitchFamily="34" charset="-122"/>
                 <a:cs typeface="Calibri" pitchFamily="34" charset="-120"/>
               </a:rPr>
-              <a:t>Word Labs  •  wordlabs.app  •  Root: 'persuade' = to urge or convince someone</a:t>
+              <a:t>Word Labs  •  wordlabs.app  •  Root: 'persuade' = to convince or urge someone</a:t>
             </a:r>
             <a:endParaRPr lang="en-US" sz="800" dirty="0"/>
           </a:p>
@@ -6040,7 +6040,7 @@
                 <a:ea typeface="Calibri" pitchFamily="34" charset="-122"/>
                 <a:cs typeface="Calibri" pitchFamily="34" charset="-120"/>
               </a:rPr>
-              <a:t>Tom wrote a </a:t>
+              <a:t>The student's </a:t>
             </a:r>
             <a:pPr algn="l" indent="0" marL="0">
               <a:buNone/>
@@ -6071,7 +6071,7 @@
                 <a:ea typeface="Calibri" pitchFamily="34" charset="-122"/>
                 <a:cs typeface="Calibri" pitchFamily="34" charset="-120"/>
               </a:rPr>
-              <a:t> letter, and his </a:t>
+              <a:t> argument finally left the principal </a:t>
             </a:r>
             <a:pPr algn="l" indent="0" marL="0">
               <a:buNone/>
@@ -6088,7 +6088,7 @@
                 <a:ea typeface="Calibri" pitchFamily="34" charset="-122"/>
                 <a:cs typeface="Calibri" pitchFamily="34" charset="-120"/>
               </a:rPr>
-              <a:t>persuasion</a:t>
+              <a:t>unpersuaded</a:t>
             </a:r>
             <a:pPr algn="l" indent="0" marL="0">
               <a:buNone/>
@@ -6102,7 +6102,7 @@
                 <a:ea typeface="Calibri" pitchFamily="34" charset="-122"/>
                 <a:cs typeface="Calibri" pitchFamily="34" charset="-120"/>
               </a:rPr>
-              <a:t> finally convinced the principal to extend lunch breaks.</a:t>
+              <a:t>, so they tried again.</a:t>
             </a:r>
             <a:endParaRPr lang="en-US" sz="1800" dirty="0"/>
           </a:p>
@@ -6385,7 +6385,7 @@
                 <a:ea typeface="Trebuchet MS" pitchFamily="34" charset="-122"/>
                 <a:cs typeface="Trebuchet MS" pitchFamily="34" charset="-120"/>
               </a:rPr>
-              <a:t>persuasion</a:t>
+              <a:t>unpersuaded</a:t>
             </a:r>
             <a:endParaRPr lang="en-US" sz="1400" dirty="0"/>
           </a:p>
@@ -6716,7 +6716,7 @@
                 <a:ea typeface="Calibri" pitchFamily="34" charset="-122"/>
                 <a:cs typeface="Calibri" pitchFamily="34" charset="-120"/>
               </a:rPr>
-              <a:t>Word Labs  •  wordlabs.app  •  Root: 'persuade' = to urge or convince someone</a:t>
+              <a:t>Word Labs  •  wordlabs.app  •  Root: 'persuade' = to convince or urge someone</a:t>
             </a:r>
             <a:endParaRPr lang="en-US" sz="800" dirty="0"/>
           </a:p>
@@ -7543,7 +7543,7 @@
                 <a:ea typeface="Calibri" pitchFamily="34" charset="-122"/>
                 <a:cs typeface="Calibri" pitchFamily="34" charset="-120"/>
               </a:rPr>
-              <a:t>Word Labs  •  wordlabs.app  •  Root: 'persuade' = to urge or convince someone</a:t>
+              <a:t>Word Labs  •  wordlabs.app  •  Root: 'persuade' = to convince or urge someone</a:t>
             </a:r>
             <a:endParaRPr lang="en-US" sz="800" dirty="0"/>
           </a:p>
@@ -7860,7 +7860,7 @@
                 <a:ea typeface="Calibri" pitchFamily="34" charset="-122"/>
                 <a:cs typeface="Calibri" pitchFamily="34" charset="-120"/>
               </a:rPr>
-              <a:t>to urge or convince</a:t>
+              <a:t>to convince or urge</a:t>
             </a:r>
             <a:endParaRPr lang="en-US" sz="850" dirty="0"/>
           </a:p>
@@ -7899,7 +7899,7 @@
                 <a:ea typeface="Calibri" pitchFamily="34" charset="-122"/>
                 <a:cs typeface="Calibri" pitchFamily="34" charset="-120"/>
               </a:rPr>
-              <a:t>'suade' becomes 'suas' before suffix</a:t>
+              <a:t>'suade' becomes 'suas' before vowel suffix</a:t>
             </a:r>
             <a:endParaRPr lang="en-US" sz="700" dirty="0"/>
           </a:p>
@@ -8567,7 +8567,7 @@
                 <a:ea typeface="Calibri" pitchFamily="34" charset="-122"/>
                 <a:cs typeface="Calibri" pitchFamily="34" charset="-120"/>
               </a:rPr>
-              <a:t>Word Labs  •  wordlabs.app  •  Root: 'persuade' = to urge or convince someone</a:t>
+              <a:t>Word Labs  •  wordlabs.app  •  Root: 'persuade' = to convince or urge someone</a:t>
             </a:r>
             <a:endParaRPr lang="en-US" sz="800" dirty="0"/>
           </a:p>
@@ -8884,7 +8884,7 @@
                 <a:ea typeface="Calibri" pitchFamily="34" charset="-122"/>
                 <a:cs typeface="Calibri" pitchFamily="34" charset="-120"/>
               </a:rPr>
-              <a:t>to urge or convince</a:t>
+              <a:t>to convince or urge</a:t>
             </a:r>
             <a:endParaRPr lang="en-US" sz="850" dirty="0"/>
           </a:p>
@@ -8923,7 +8923,7 @@
                 <a:ea typeface="Calibri" pitchFamily="34" charset="-122"/>
                 <a:cs typeface="Calibri" pitchFamily="34" charset="-120"/>
               </a:rPr>
-              <a:t>'suade' becomes 'suas' before suffix</a:t>
+              <a:t>'suade' becomes 'suas' before vowel suffix</a:t>
             </a:r>
             <a:endParaRPr lang="en-US" sz="700" dirty="0"/>
           </a:p>
@@ -9828,7 +9828,7 @@
                 <a:ea typeface="Calibri" pitchFamily="34" charset="-122"/>
                 <a:cs typeface="Calibri" pitchFamily="34" charset="-120"/>
               </a:rPr>
-              <a:t>Word Labs  •  wordlabs.app  •  Root: 'persuade' = to urge or convince someone</a:t>
+              <a:t>Word Labs  •  wordlabs.app  •  Root: 'persuade' = to convince or urge someone</a:t>
             </a:r>
             <a:endParaRPr lang="en-US" sz="800" dirty="0"/>
           </a:p>
@@ -10145,7 +10145,7 @@
                 <a:ea typeface="Calibri" pitchFamily="34" charset="-122"/>
                 <a:cs typeface="Calibri" pitchFamily="34" charset="-120"/>
               </a:rPr>
-              <a:t>to urge or convince</a:t>
+              <a:t>to convince or urge</a:t>
             </a:r>
             <a:endParaRPr lang="en-US" sz="850" dirty="0"/>
           </a:p>
@@ -10184,7 +10184,7 @@
                 <a:ea typeface="Calibri" pitchFamily="34" charset="-122"/>
                 <a:cs typeface="Calibri" pitchFamily="34" charset="-120"/>
               </a:rPr>
-              <a:t>'suade' becomes 'suas' before suffix</a:t>
+              <a:t>'suade' becomes 'suas' before vowel suffix</a:t>
             </a:r>
             <a:endParaRPr lang="en-US" sz="700" dirty="0"/>
           </a:p>
@@ -11196,6 +11196,45 @@
               <a:t>ive</a:t>
             </a:r>
             <a:endParaRPr lang="en-US" sz="900" dirty="0"/>
+          </a:p>
+        </p:txBody>
+      </p:sp>
+      <p:sp>
+        <p:nvSpPr>
+          <p:cNvPr id="50" name="Text 48"/>
+          <p:cNvSpPr/>
+          <p:nvPr/>
+        </p:nvSpPr>
+        <p:spPr>
+          <a:xfrm>
+            <a:off x="7447135" y="4572000"/>
+            <a:ext cx="685800" cy="219456"/>
+          </a:xfrm>
+          <a:prstGeom prst="rect">
+            <a:avLst/>
+          </a:prstGeom>
+          <a:noFill/>
+          <a:ln/>
+        </p:spPr>
+        <p:txBody>
+          <a:bodyPr wrap="square" lIns="0" tIns="0" rIns="0" bIns="0" rtlCol="0" anchor="t"/>
+          <a:lstStyle/>
+          <a:p>
+            <a:pPr algn="ctr" indent="0" marL="0">
+              <a:buNone/>
+            </a:pPr>
+            <a:r>
+              <a:rPr lang="en-US" sz="750" i="1" dirty="0">
+                <a:solidFill>
+                  <a:srgbClr val="94A3B8"/>
+                </a:solidFill>
+                <a:latin typeface="Calibri" pitchFamily="34" charset="0"/>
+                <a:ea typeface="Calibri" pitchFamily="34" charset="-122"/>
+                <a:cs typeface="Calibri" pitchFamily="34" charset="-120"/>
+              </a:rPr>
+              <a:t>/iv/</a:t>
+            </a:r>
+            <a:endParaRPr lang="en-US" sz="750" dirty="0"/>
           </a:p>
         </p:txBody>
       </p:sp>
@@ -11485,7 +11524,7 @@
                 <a:ea typeface="Calibri" pitchFamily="34" charset="-122"/>
                 <a:cs typeface="Calibri" pitchFamily="34" charset="-120"/>
               </a:rPr>
-              <a:t>Word Labs  •  wordlabs.app  •  Root: 'persuade' = to urge or convince someone</a:t>
+              <a:t>Word Labs  •  wordlabs.app  •  Root: 'persuade' = to convince or urge someone</a:t>
             </a:r>
             <a:endParaRPr lang="en-US" sz="800" dirty="0"/>
           </a:p>
@@ -11624,7 +11663,7 @@
                 <a:ea typeface="Trebuchet MS" pitchFamily="34" charset="-122"/>
                 <a:cs typeface="Trebuchet MS" pitchFamily="34" charset="-120"/>
               </a:rPr>
-              <a:t>persuasion</a:t>
+              <a:t>unpersuaded</a:t>
             </a:r>
             <a:endParaRPr lang="en-US" sz="2800" dirty="0"/>
           </a:p>
@@ -12312,7 +12351,7 @@
                 <a:ea typeface="Calibri" pitchFamily="34" charset="-122"/>
                 <a:cs typeface="Calibri" pitchFamily="34" charset="-120"/>
               </a:rPr>
-              <a:t>Word Labs  •  wordlabs.app  •  Root: 'persuade' = to urge or convince someone</a:t>
+              <a:t>Word Labs  •  wordlabs.app  •  Root: 'persuade' = to convince or urge someone</a:t>
             </a:r>
             <a:endParaRPr lang="en-US" sz="800" dirty="0"/>
           </a:p>
@@ -12451,7 +12490,7 @@
                 <a:ea typeface="Trebuchet MS" pitchFamily="34" charset="-122"/>
                 <a:cs typeface="Trebuchet MS" pitchFamily="34" charset="-120"/>
               </a:rPr>
-              <a:t>persuasion</a:t>
+              <a:t>unpersuaded</a:t>
             </a:r>
             <a:endParaRPr lang="en-US" sz="2800" dirty="0"/>
           </a:p>
@@ -12531,7 +12570,7 @@
         </p:nvSpPr>
         <p:spPr>
           <a:xfrm>
-            <a:off x="2938272" y="2258568"/>
+            <a:off x="2221992" y="2258568"/>
             <a:ext cx="1828800" cy="292608"/>
           </a:xfrm>
           <a:prstGeom prst="rect">
@@ -12540,11 +12579,11 @@
             </a:avLst>
           </a:prstGeom>
           <a:solidFill>
-            <a:srgbClr val="CCFBF1"/>
+            <a:srgbClr val="DDD6FE"/>
           </a:solidFill>
           <a:ln w="19050">
             <a:solidFill>
-              <a:srgbClr val="0D9488"/>
+              <a:srgbClr val="7C3AED"/>
             </a:solidFill>
             <a:prstDash val="solid"/>
           </a:ln>
@@ -12565,7 +12604,7 @@
         </p:nvSpPr>
         <p:spPr>
           <a:xfrm>
-            <a:off x="2938272" y="2258568"/>
+            <a:off x="2221992" y="2258568"/>
             <a:ext cx="1828800" cy="292608"/>
           </a:xfrm>
           <a:prstGeom prst="rect">
@@ -12584,13 +12623,13 @@
             <a:r>
               <a:rPr lang="en-US" sz="1300" b="1" dirty="0">
                 <a:solidFill>
-                  <a:srgbClr val="0F766E"/>
+                  <a:srgbClr val="4C1D95"/>
                 </a:solidFill>
                 <a:latin typeface="Trebuchet MS" pitchFamily="34" charset="0"/>
                 <a:ea typeface="Trebuchet MS" pitchFamily="34" charset="-122"/>
                 <a:cs typeface="Trebuchet MS" pitchFamily="34" charset="-120"/>
               </a:rPr>
-              <a:t>persuade</a:t>
+              <a:t>un</a:t>
             </a:r>
             <a:endParaRPr lang="en-US" sz="1300" dirty="0"/>
           </a:p>
@@ -12604,7 +12643,7 @@
         </p:nvSpPr>
         <p:spPr>
           <a:xfrm>
-            <a:off x="2938272" y="2569464"/>
+            <a:off x="2221992" y="2569464"/>
             <a:ext cx="1828800" cy="201168"/>
           </a:xfrm>
           <a:prstGeom prst="rect">
@@ -12629,7 +12668,7 @@
                 <a:ea typeface="Calibri" pitchFamily="34" charset="-122"/>
                 <a:cs typeface="Calibri" pitchFamily="34" charset="-120"/>
               </a:rPr>
-              <a:t>to urge or convince</a:t>
+              <a:t>not</a:t>
             </a:r>
             <a:endParaRPr lang="en-US" sz="850" dirty="0"/>
           </a:p>
@@ -12637,52 +12676,13 @@
       </p:sp>
       <p:sp>
         <p:nvSpPr>
-          <p:cNvPr id="19" name="Text 17"/>
-          <p:cNvSpPr/>
-          <p:nvPr/>
-        </p:nvSpPr>
-        <p:spPr>
-          <a:xfrm>
-            <a:off x="2938272" y="2752344"/>
-            <a:ext cx="1828800" cy="182880"/>
-          </a:xfrm>
-          <a:prstGeom prst="rect">
-            <a:avLst/>
-          </a:prstGeom>
-          <a:noFill/>
-          <a:ln/>
-        </p:spPr>
-        <p:txBody>
-          <a:bodyPr wrap="square" lIns="0" tIns="0" rIns="0" bIns="0" rtlCol="0" anchor="t"/>
-          <a:lstStyle/>
-          <a:p>
-            <a:pPr algn="ctr" indent="0" marL="0">
-              <a:buNone/>
-            </a:pPr>
-            <a:r>
-              <a:rPr lang="en-US" sz="700" i="1" dirty="0">
-                <a:solidFill>
-                  <a:srgbClr val="94A3B8"/>
-                </a:solidFill>
-                <a:latin typeface="Calibri" pitchFamily="34" charset="0"/>
-                <a:ea typeface="Calibri" pitchFamily="34" charset="-122"/>
-                <a:cs typeface="Calibri" pitchFamily="34" charset="-120"/>
-              </a:rPr>
-              <a:t>'suade' becomes 'suas' before suffix</a:t>
-            </a:r>
-            <a:endParaRPr lang="en-US" sz="700" dirty="0"/>
-          </a:p>
-        </p:txBody>
-      </p:sp>
-      <p:sp>
-        <p:nvSpPr>
-          <p:cNvPr id="20" name="Shape 18"/>
-          <p:cNvSpPr/>
-          <p:nvPr/>
-        </p:nvSpPr>
-        <p:spPr>
-          <a:xfrm>
-            <a:off x="5803392" y="2258568"/>
+          <p:cNvPr id="19" name="Shape 17"/>
+          <p:cNvSpPr/>
+          <p:nvPr/>
+        </p:nvSpPr>
+        <p:spPr>
+          <a:xfrm>
+            <a:off x="4370832" y="2258568"/>
             <a:ext cx="1828800" cy="292608"/>
           </a:xfrm>
           <a:prstGeom prst="rect">
@@ -12691,11 +12691,11 @@
             </a:avLst>
           </a:prstGeom>
           <a:solidFill>
-            <a:srgbClr val="FCE7F3"/>
+            <a:srgbClr val="CCFBF1"/>
           </a:solidFill>
           <a:ln w="19050">
             <a:solidFill>
-              <a:srgbClr val="DB2777"/>
+              <a:srgbClr val="0D9488"/>
             </a:solidFill>
             <a:prstDash val="solid"/>
           </a:ln>
@@ -12710,13 +12710,13 @@
       </p:sp>
       <p:sp>
         <p:nvSpPr>
-          <p:cNvPr id="21" name="Text 19"/>
-          <p:cNvSpPr/>
-          <p:nvPr/>
-        </p:nvSpPr>
-        <p:spPr>
-          <a:xfrm>
-            <a:off x="5803392" y="2258568"/>
+          <p:cNvPr id="20" name="Text 18"/>
+          <p:cNvSpPr/>
+          <p:nvPr/>
+        </p:nvSpPr>
+        <p:spPr>
+          <a:xfrm>
+            <a:off x="4370832" y="2258568"/>
             <a:ext cx="1828800" cy="292608"/>
           </a:xfrm>
           <a:prstGeom prst="rect">
@@ -12735,13 +12735,13 @@
             <a:r>
               <a:rPr lang="en-US" sz="1300" b="1" dirty="0">
                 <a:solidFill>
-                  <a:srgbClr val="9D174D"/>
+                  <a:srgbClr val="0F766E"/>
                 </a:solidFill>
                 <a:latin typeface="Trebuchet MS" pitchFamily="34" charset="0"/>
                 <a:ea typeface="Trebuchet MS" pitchFamily="34" charset="-122"/>
                 <a:cs typeface="Trebuchet MS" pitchFamily="34" charset="-120"/>
               </a:rPr>
-              <a:t>ion</a:t>
+              <a:t>persuade</a:t>
             </a:r>
             <a:endParaRPr lang="en-US" sz="1300" dirty="0"/>
           </a:p>
@@ -12749,13 +12749,13 @@
       </p:sp>
       <p:sp>
         <p:nvSpPr>
-          <p:cNvPr id="22" name="Text 20"/>
-          <p:cNvSpPr/>
-          <p:nvPr/>
-        </p:nvSpPr>
-        <p:spPr>
-          <a:xfrm>
-            <a:off x="5803392" y="2569464"/>
+          <p:cNvPr id="21" name="Text 19"/>
+          <p:cNvSpPr/>
+          <p:nvPr/>
+        </p:nvSpPr>
+        <p:spPr>
+          <a:xfrm>
+            <a:off x="4370832" y="2569464"/>
             <a:ext cx="1828800" cy="201168"/>
           </a:xfrm>
           <a:prstGeom prst="rect">
@@ -12780,7 +12780,7 @@
                 <a:ea typeface="Calibri" pitchFamily="34" charset="-122"/>
                 <a:cs typeface="Calibri" pitchFamily="34" charset="-120"/>
               </a:rPr>
-              <a:t>act or result of</a:t>
+              <a:t>to convince or urge</a:t>
             </a:r>
             <a:endParaRPr lang="en-US" sz="850" dirty="0"/>
           </a:p>
@@ -12788,13 +12788,13 @@
       </p:sp>
       <p:sp>
         <p:nvSpPr>
-          <p:cNvPr id="23" name="Text 21"/>
-          <p:cNvSpPr/>
-          <p:nvPr/>
-        </p:nvSpPr>
-        <p:spPr>
-          <a:xfrm>
-            <a:off x="5803392" y="2752344"/>
+          <p:cNvPr id="22" name="Text 20"/>
+          <p:cNvSpPr/>
+          <p:nvPr/>
+        </p:nvSpPr>
+        <p:spPr>
+          <a:xfrm>
+            <a:off x="4370832" y="2752344"/>
             <a:ext cx="1828800" cy="182880"/>
           </a:xfrm>
           <a:prstGeom prst="rect">
@@ -12819,7 +12819,7 @@
                 <a:ea typeface="Calibri" pitchFamily="34" charset="-122"/>
                 <a:cs typeface="Calibri" pitchFamily="34" charset="-120"/>
               </a:rPr>
-              <a:t>'sion' makes /zhun/ sound</a:t>
+              <a:t>'e' dropped before vowel suffix</a:t>
             </a:r>
             <a:endParaRPr lang="en-US" sz="700" dirty="0"/>
           </a:p>
@@ -12827,7 +12827,119 @@
       </p:sp>
       <p:sp>
         <p:nvSpPr>
-          <p:cNvPr id="24" name="Shape 22"/>
+          <p:cNvPr id="23" name="Shape 21"/>
+          <p:cNvSpPr/>
+          <p:nvPr/>
+        </p:nvSpPr>
+        <p:spPr>
+          <a:xfrm>
+            <a:off x="6519672" y="2258568"/>
+            <a:ext cx="1828800" cy="292608"/>
+          </a:xfrm>
+          <a:prstGeom prst="rect">
+            <a:avLst>
+              <a:gd name="adj" fmla="val 25000"/>
+            </a:avLst>
+          </a:prstGeom>
+          <a:solidFill>
+            <a:srgbClr val="FCE7F3"/>
+          </a:solidFill>
+          <a:ln w="19050">
+            <a:solidFill>
+              <a:srgbClr val="DB2777"/>
+            </a:solidFill>
+            <a:prstDash val="solid"/>
+          </a:ln>
+          <a:effectLst>
+            <a:outerShdw sx="100000" sy="100000" kx="0" ky="0" algn="bl" rotWithShape="0" blurRad="101600" dist="38100" dir="8100000">
+              <a:srgbClr val="000000">
+                <a:alpha val="12000"/>
+              </a:srgbClr>
+            </a:outerShdw>
+          </a:effectLst>
+        </p:spPr>
+      </p:sp>
+      <p:sp>
+        <p:nvSpPr>
+          <p:cNvPr id="24" name="Text 22"/>
+          <p:cNvSpPr/>
+          <p:nvPr/>
+        </p:nvSpPr>
+        <p:spPr>
+          <a:xfrm>
+            <a:off x="6519672" y="2258568"/>
+            <a:ext cx="1828800" cy="292608"/>
+          </a:xfrm>
+          <a:prstGeom prst="rect">
+            <a:avLst/>
+          </a:prstGeom>
+          <a:noFill/>
+          <a:ln/>
+        </p:spPr>
+        <p:txBody>
+          <a:bodyPr wrap="square" lIns="0" tIns="0" rIns="0" bIns="0" rtlCol="0" anchor="ctr"/>
+          <a:lstStyle/>
+          <a:p>
+            <a:pPr algn="ctr" indent="0" marL="0">
+              <a:buNone/>
+            </a:pPr>
+            <a:r>
+              <a:rPr lang="en-US" sz="1300" b="1" dirty="0">
+                <a:solidFill>
+                  <a:srgbClr val="9D174D"/>
+                </a:solidFill>
+                <a:latin typeface="Trebuchet MS" pitchFamily="34" charset="0"/>
+                <a:ea typeface="Trebuchet MS" pitchFamily="34" charset="-122"/>
+                <a:cs typeface="Trebuchet MS" pitchFamily="34" charset="-120"/>
+              </a:rPr>
+              <a:t>ed</a:t>
+            </a:r>
+            <a:endParaRPr lang="en-US" sz="1300" dirty="0"/>
+          </a:p>
+        </p:txBody>
+      </p:sp>
+      <p:sp>
+        <p:nvSpPr>
+          <p:cNvPr id="25" name="Text 23"/>
+          <p:cNvSpPr/>
+          <p:nvPr/>
+        </p:nvSpPr>
+        <p:spPr>
+          <a:xfrm>
+            <a:off x="6519672" y="2569464"/>
+            <a:ext cx="1828800" cy="201168"/>
+          </a:xfrm>
+          <a:prstGeom prst="rect">
+            <a:avLst/>
+          </a:prstGeom>
+          <a:noFill/>
+          <a:ln/>
+        </p:spPr>
+        <p:txBody>
+          <a:bodyPr wrap="square" lIns="0" tIns="0" rIns="0" bIns="0" rtlCol="0" anchor="t"/>
+          <a:lstStyle/>
+          <a:p>
+            <a:pPr algn="ctr" indent="0" marL="0">
+              <a:buNone/>
+            </a:pPr>
+            <a:r>
+              <a:rPr lang="en-US" sz="850" dirty="0">
+                <a:solidFill>
+                  <a:srgbClr val="475569"/>
+                </a:solidFill>
+                <a:latin typeface="Calibri" pitchFamily="34" charset="0"/>
+                <a:ea typeface="Calibri" pitchFamily="34" charset="-122"/>
+                <a:cs typeface="Calibri" pitchFamily="34" charset="-120"/>
+              </a:rPr>
+              <a:t>past tense</a:t>
+            </a:r>
+            <a:endParaRPr lang="en-US" sz="850" dirty="0"/>
+          </a:p>
+        </p:txBody>
+      </p:sp>
+      <p:sp>
+        <p:nvSpPr>
+          <p:cNvPr id="26" name="Shape 24"/>
           <p:cNvSpPr/>
           <p:nvPr/>
         </p:nvSpPr>
@@ -12854,7 +12966,7 @@
       </p:sp>
       <p:sp>
         <p:nvSpPr>
-          <p:cNvPr id="25" name="Text 23"/>
+          <p:cNvPr id="27" name="Text 25"/>
           <p:cNvSpPr/>
           <p:nvPr/>
         </p:nvSpPr>
@@ -12893,7 +13005,7 @@
       </p:sp>
       <p:sp>
         <p:nvSpPr>
-          <p:cNvPr id="26" name="Shape 24"/>
+          <p:cNvPr id="28" name="Shape 26"/>
           <p:cNvSpPr/>
           <p:nvPr/>
         </p:nvSpPr>
@@ -12920,7 +13032,7 @@
       </p:sp>
       <p:sp>
         <p:nvSpPr>
-          <p:cNvPr id="27" name="Text 25"/>
+          <p:cNvPr id="29" name="Text 27"/>
           <p:cNvSpPr/>
           <p:nvPr/>
         </p:nvSpPr>
@@ -12959,7 +13071,7 @@
       </p:sp>
       <p:sp>
         <p:nvSpPr>
-          <p:cNvPr id="28" name="Shape 26"/>
+          <p:cNvPr id="30" name="Shape 28"/>
           <p:cNvSpPr/>
           <p:nvPr/>
         </p:nvSpPr>
@@ -12986,7 +13098,7 @@
       </p:sp>
       <p:sp>
         <p:nvSpPr>
-          <p:cNvPr id="29" name="Text 27"/>
+          <p:cNvPr id="31" name="Text 29"/>
           <p:cNvSpPr/>
           <p:nvPr/>
         </p:nvSpPr>
@@ -13025,7 +13137,7 @@
       </p:sp>
       <p:sp>
         <p:nvSpPr>
-          <p:cNvPr id="30" name="Shape 28"/>
+          <p:cNvPr id="32" name="Shape 30"/>
           <p:cNvSpPr/>
           <p:nvPr/>
         </p:nvSpPr>
@@ -13052,7 +13164,7 @@
       </p:sp>
       <p:sp>
         <p:nvSpPr>
-          <p:cNvPr id="31" name="Text 29"/>
+          <p:cNvPr id="33" name="Text 31"/>
           <p:cNvSpPr/>
           <p:nvPr/>
         </p:nvSpPr>
@@ -13375,7 +13487,7 @@
                 <a:ea typeface="Calibri" pitchFamily="34" charset="-122"/>
                 <a:cs typeface="Calibri" pitchFamily="34" charset="-120"/>
               </a:rPr>
-              <a:t>Word Labs  •  wordlabs.app  •  Root: 'persuade' = to urge or convince someone</a:t>
+              <a:t>Word Labs  •  wordlabs.app  •  Root: 'persuade' = to convince or urge someone</a:t>
             </a:r>
             <a:endParaRPr lang="en-US" sz="800" dirty="0"/>
           </a:p>
@@ -13514,7 +13626,7 @@
                 <a:ea typeface="Trebuchet MS" pitchFamily="34" charset="-122"/>
                 <a:cs typeface="Trebuchet MS" pitchFamily="34" charset="-120"/>
               </a:rPr>
-              <a:t>persuasion</a:t>
+              <a:t>unpersuaded</a:t>
             </a:r>
             <a:endParaRPr lang="en-US" sz="2800" dirty="0"/>
           </a:p>
@@ -13594,7 +13706,7 @@
         </p:nvSpPr>
         <p:spPr>
           <a:xfrm>
-            <a:off x="2938272" y="2258568"/>
+            <a:off x="2221992" y="2258568"/>
             <a:ext cx="1828800" cy="292608"/>
           </a:xfrm>
           <a:prstGeom prst="rect">
@@ -13603,11 +13715,11 @@
             </a:avLst>
           </a:prstGeom>
           <a:solidFill>
-            <a:srgbClr val="CCFBF1"/>
+            <a:srgbClr val="DDD6FE"/>
           </a:solidFill>
           <a:ln w="19050">
             <a:solidFill>
-              <a:srgbClr val="0D9488"/>
+              <a:srgbClr val="7C3AED"/>
             </a:solidFill>
             <a:prstDash val="solid"/>
           </a:ln>
@@ -13628,7 +13740,7 @@
         </p:nvSpPr>
         <p:spPr>
           <a:xfrm>
-            <a:off x="2938272" y="2258568"/>
+            <a:off x="2221992" y="2258568"/>
             <a:ext cx="1828800" cy="292608"/>
           </a:xfrm>
           <a:prstGeom prst="rect">
@@ -13647,13 +13759,13 @@
             <a:r>
               <a:rPr lang="en-US" sz="1300" b="1" dirty="0">
                 <a:solidFill>
-                  <a:srgbClr val="0F766E"/>
+                  <a:srgbClr val="4C1D95"/>
                 </a:solidFill>
                 <a:latin typeface="Trebuchet MS" pitchFamily="34" charset="0"/>
                 <a:ea typeface="Trebuchet MS" pitchFamily="34" charset="-122"/>
                 <a:cs typeface="Trebuchet MS" pitchFamily="34" charset="-120"/>
               </a:rPr>
-              <a:t>persuade</a:t>
+              <a:t>un</a:t>
             </a:r>
             <a:endParaRPr lang="en-US" sz="1300" dirty="0"/>
           </a:p>
@@ -13667,7 +13779,7 @@
         </p:nvSpPr>
         <p:spPr>
           <a:xfrm>
-            <a:off x="2938272" y="2569464"/>
+            <a:off x="2221992" y="2569464"/>
             <a:ext cx="1828800" cy="201168"/>
           </a:xfrm>
           <a:prstGeom prst="rect">
@@ -13692,7 +13804,7 @@
                 <a:ea typeface="Calibri" pitchFamily="34" charset="-122"/>
                 <a:cs typeface="Calibri" pitchFamily="34" charset="-120"/>
               </a:rPr>
-              <a:t>to urge or convince</a:t>
+              <a:t>not</a:t>
             </a:r>
             <a:endParaRPr lang="en-US" sz="850" dirty="0"/>
           </a:p>
@@ -13700,52 +13812,13 @@
       </p:sp>
       <p:sp>
         <p:nvSpPr>
-          <p:cNvPr id="19" name="Text 17"/>
-          <p:cNvSpPr/>
-          <p:nvPr/>
-        </p:nvSpPr>
-        <p:spPr>
-          <a:xfrm>
-            <a:off x="2938272" y="2752344"/>
-            <a:ext cx="1828800" cy="182880"/>
-          </a:xfrm>
-          <a:prstGeom prst="rect">
-            <a:avLst/>
-          </a:prstGeom>
-          <a:noFill/>
-          <a:ln/>
-        </p:spPr>
-        <p:txBody>
-          <a:bodyPr wrap="square" lIns="0" tIns="0" rIns="0" bIns="0" rtlCol="0" anchor="t"/>
-          <a:lstStyle/>
-          <a:p>
-            <a:pPr algn="ctr" indent="0" marL="0">
-              <a:buNone/>
-            </a:pPr>
-            <a:r>
-              <a:rPr lang="en-US" sz="700" i="1" dirty="0">
-                <a:solidFill>
-                  <a:srgbClr val="94A3B8"/>
-                </a:solidFill>
-                <a:latin typeface="Calibri" pitchFamily="34" charset="0"/>
-                <a:ea typeface="Calibri" pitchFamily="34" charset="-122"/>
-                <a:cs typeface="Calibri" pitchFamily="34" charset="-120"/>
-              </a:rPr>
-              <a:t>'suade' becomes 'suas' before suffix</a:t>
-            </a:r>
-            <a:endParaRPr lang="en-US" sz="700" dirty="0"/>
-          </a:p>
-        </p:txBody>
-      </p:sp>
-      <p:sp>
-        <p:nvSpPr>
-          <p:cNvPr id="20" name="Shape 18"/>
-          <p:cNvSpPr/>
-          <p:nvPr/>
-        </p:nvSpPr>
-        <p:spPr>
-          <a:xfrm>
-            <a:off x="5803392" y="2258568"/>
+          <p:cNvPr id="19" name="Shape 17"/>
+          <p:cNvSpPr/>
+          <p:nvPr/>
+        </p:nvSpPr>
+        <p:spPr>
+          <a:xfrm>
+            <a:off x="4370832" y="2258568"/>
             <a:ext cx="1828800" cy="292608"/>
           </a:xfrm>
           <a:prstGeom prst="rect">
@@ -13754,11 +13827,11 @@
             </a:avLst>
           </a:prstGeom>
           <a:solidFill>
-            <a:srgbClr val="FCE7F3"/>
+            <a:srgbClr val="CCFBF1"/>
           </a:solidFill>
           <a:ln w="19050">
             <a:solidFill>
-              <a:srgbClr val="DB2777"/>
+              <a:srgbClr val="0D9488"/>
             </a:solidFill>
             <a:prstDash val="solid"/>
           </a:ln>
@@ -13773,13 +13846,13 @@
       </p:sp>
       <p:sp>
         <p:nvSpPr>
-          <p:cNvPr id="21" name="Text 19"/>
-          <p:cNvSpPr/>
-          <p:nvPr/>
-        </p:nvSpPr>
-        <p:spPr>
-          <a:xfrm>
-            <a:off x="5803392" y="2258568"/>
+          <p:cNvPr id="20" name="Text 18"/>
+          <p:cNvSpPr/>
+          <p:nvPr/>
+        </p:nvSpPr>
+        <p:spPr>
+          <a:xfrm>
+            <a:off x="4370832" y="2258568"/>
             <a:ext cx="1828800" cy="292608"/>
           </a:xfrm>
           <a:prstGeom prst="rect">
@@ -13798,13 +13871,13 @@
             <a:r>
               <a:rPr lang="en-US" sz="1300" b="1" dirty="0">
                 <a:solidFill>
-                  <a:srgbClr val="9D174D"/>
+                  <a:srgbClr val="0F766E"/>
                 </a:solidFill>
                 <a:latin typeface="Trebuchet MS" pitchFamily="34" charset="0"/>
                 <a:ea typeface="Trebuchet MS" pitchFamily="34" charset="-122"/>
                 <a:cs typeface="Trebuchet MS" pitchFamily="34" charset="-120"/>
               </a:rPr>
-              <a:t>ion</a:t>
+              <a:t>persuade</a:t>
             </a:r>
             <a:endParaRPr lang="en-US" sz="1300" dirty="0"/>
           </a:p>
@@ -13812,13 +13885,13 @@
       </p:sp>
       <p:sp>
         <p:nvSpPr>
-          <p:cNvPr id="22" name="Text 20"/>
-          <p:cNvSpPr/>
-          <p:nvPr/>
-        </p:nvSpPr>
-        <p:spPr>
-          <a:xfrm>
-            <a:off x="5803392" y="2569464"/>
+          <p:cNvPr id="21" name="Text 19"/>
+          <p:cNvSpPr/>
+          <p:nvPr/>
+        </p:nvSpPr>
+        <p:spPr>
+          <a:xfrm>
+            <a:off x="4370832" y="2569464"/>
             <a:ext cx="1828800" cy="201168"/>
           </a:xfrm>
           <a:prstGeom prst="rect">
@@ -13843,7 +13916,7 @@
                 <a:ea typeface="Calibri" pitchFamily="34" charset="-122"/>
                 <a:cs typeface="Calibri" pitchFamily="34" charset="-120"/>
               </a:rPr>
-              <a:t>act or result of</a:t>
+              <a:t>to convince or urge</a:t>
             </a:r>
             <a:endParaRPr lang="en-US" sz="850" dirty="0"/>
           </a:p>
@@ -13851,13 +13924,13 @@
       </p:sp>
       <p:sp>
         <p:nvSpPr>
-          <p:cNvPr id="23" name="Text 21"/>
-          <p:cNvSpPr/>
-          <p:nvPr/>
-        </p:nvSpPr>
-        <p:spPr>
-          <a:xfrm>
-            <a:off x="5803392" y="2752344"/>
+          <p:cNvPr id="22" name="Text 20"/>
+          <p:cNvSpPr/>
+          <p:nvPr/>
+        </p:nvSpPr>
+        <p:spPr>
+          <a:xfrm>
+            <a:off x="4370832" y="2752344"/>
             <a:ext cx="1828800" cy="182880"/>
           </a:xfrm>
           <a:prstGeom prst="rect">
@@ -13882,7 +13955,7 @@
                 <a:ea typeface="Calibri" pitchFamily="34" charset="-122"/>
                 <a:cs typeface="Calibri" pitchFamily="34" charset="-120"/>
               </a:rPr>
-              <a:t>'sion' makes /zhun/ sound</a:t>
+              <a:t>'e' dropped before vowel suffix</a:t>
             </a:r>
             <a:endParaRPr lang="en-US" sz="700" dirty="0"/>
           </a:p>
@@ -13890,7 +13963,119 @@
       </p:sp>
       <p:sp>
         <p:nvSpPr>
-          <p:cNvPr id="24" name="Shape 22"/>
+          <p:cNvPr id="23" name="Shape 21"/>
+          <p:cNvSpPr/>
+          <p:nvPr/>
+        </p:nvSpPr>
+        <p:spPr>
+          <a:xfrm>
+            <a:off x="6519672" y="2258568"/>
+            <a:ext cx="1828800" cy="292608"/>
+          </a:xfrm>
+          <a:prstGeom prst="rect">
+            <a:avLst>
+              <a:gd name="adj" fmla="val 25000"/>
+            </a:avLst>
+          </a:prstGeom>
+          <a:solidFill>
+            <a:srgbClr val="FCE7F3"/>
+          </a:solidFill>
+          <a:ln w="19050">
+            <a:solidFill>
+              <a:srgbClr val="DB2777"/>
+            </a:solidFill>
+            <a:prstDash val="solid"/>
+          </a:ln>
+          <a:effectLst>
+            <a:outerShdw sx="100000" sy="100000" kx="0" ky="0" algn="bl" rotWithShape="0" blurRad="101600" dist="38100" dir="8100000">
+              <a:srgbClr val="000000">
+                <a:alpha val="12000"/>
+              </a:srgbClr>
+            </a:outerShdw>
+          </a:effectLst>
+        </p:spPr>
+      </p:sp>
+      <p:sp>
+        <p:nvSpPr>
+          <p:cNvPr id="24" name="Text 22"/>
+          <p:cNvSpPr/>
+          <p:nvPr/>
+        </p:nvSpPr>
+        <p:spPr>
+          <a:xfrm>
+            <a:off x="6519672" y="2258568"/>
+            <a:ext cx="1828800" cy="292608"/>
+          </a:xfrm>
+          <a:prstGeom prst="rect">
+            <a:avLst/>
+          </a:prstGeom>
+          <a:noFill/>
+          <a:ln/>
+        </p:spPr>
+        <p:txBody>
+          <a:bodyPr wrap="square" lIns="0" tIns="0" rIns="0" bIns="0" rtlCol="0" anchor="ctr"/>
+          <a:lstStyle/>
+          <a:p>
+            <a:pPr algn="ctr" indent="0" marL="0">
+              <a:buNone/>
+            </a:pPr>
+            <a:r>
+              <a:rPr lang="en-US" sz="1300" b="1" dirty="0">
+                <a:solidFill>
+                  <a:srgbClr val="9D174D"/>
+                </a:solidFill>
+                <a:latin typeface="Trebuchet MS" pitchFamily="34" charset="0"/>
+                <a:ea typeface="Trebuchet MS" pitchFamily="34" charset="-122"/>
+                <a:cs typeface="Trebuchet MS" pitchFamily="34" charset="-120"/>
+              </a:rPr>
+              <a:t>ed</a:t>
+            </a:r>
+            <a:endParaRPr lang="en-US" sz="1300" dirty="0"/>
+          </a:p>
+        </p:txBody>
+      </p:sp>
+      <p:sp>
+        <p:nvSpPr>
+          <p:cNvPr id="25" name="Text 23"/>
+          <p:cNvSpPr/>
+          <p:nvPr/>
+        </p:nvSpPr>
+        <p:spPr>
+          <a:xfrm>
+            <a:off x="6519672" y="2569464"/>
+            <a:ext cx="1828800" cy="201168"/>
+          </a:xfrm>
+          <a:prstGeom prst="rect">
+            <a:avLst/>
+          </a:prstGeom>
+          <a:noFill/>
+          <a:ln/>
+        </p:spPr>
+        <p:txBody>
+          <a:bodyPr wrap="square" lIns="0" tIns="0" rIns="0" bIns="0" rtlCol="0" anchor="t"/>
+          <a:lstStyle/>
+          <a:p>
+            <a:pPr algn="ctr" indent="0" marL="0">
+              <a:buNone/>
+            </a:pPr>
+            <a:r>
+              <a:rPr lang="en-US" sz="850" dirty="0">
+                <a:solidFill>
+                  <a:srgbClr val="475569"/>
+                </a:solidFill>
+                <a:latin typeface="Calibri" pitchFamily="34" charset="0"/>
+                <a:ea typeface="Calibri" pitchFamily="34" charset="-122"/>
+                <a:cs typeface="Calibri" pitchFamily="34" charset="-120"/>
+              </a:rPr>
+              <a:t>past tense</a:t>
+            </a:r>
+            <a:endParaRPr lang="en-US" sz="850" dirty="0"/>
+          </a:p>
+        </p:txBody>
+      </p:sp>
+      <p:sp>
+        <p:nvSpPr>
+          <p:cNvPr id="26" name="Shape 24"/>
           <p:cNvSpPr/>
           <p:nvPr/>
         </p:nvSpPr>
@@ -13917,7 +14102,7 @@
       </p:sp>
       <p:sp>
         <p:nvSpPr>
-          <p:cNvPr id="25" name="Text 23"/>
+          <p:cNvPr id="27" name="Text 25"/>
           <p:cNvSpPr/>
           <p:nvPr/>
         </p:nvSpPr>
@@ -13956,7 +14141,7 @@
       </p:sp>
       <p:sp>
         <p:nvSpPr>
-          <p:cNvPr id="26" name="Shape 24"/>
+          <p:cNvPr id="28" name="Shape 26"/>
           <p:cNvSpPr/>
           <p:nvPr/>
         </p:nvSpPr>
@@ -13983,14 +14168,14 @@
       </p:sp>
       <p:sp>
         <p:nvSpPr>
-          <p:cNvPr id="27" name="Shape 25"/>
-          <p:cNvSpPr/>
-          <p:nvPr/>
-        </p:nvSpPr>
-        <p:spPr>
-          <a:xfrm>
-            <a:off x="2313432" y="3364992"/>
-            <a:ext cx="1645920" cy="475488"/>
+          <p:cNvPr id="29" name="Shape 27"/>
+          <p:cNvSpPr/>
+          <p:nvPr/>
+        </p:nvSpPr>
+        <p:spPr>
+          <a:xfrm>
+            <a:off x="1975104" y="3364992"/>
+            <a:ext cx="1554480" cy="475488"/>
           </a:xfrm>
           <a:prstGeom prst="rect">
             <a:avLst>
@@ -14010,14 +14195,14 @@
       </p:sp>
       <p:sp>
         <p:nvSpPr>
-          <p:cNvPr id="28" name="Text 26"/>
-          <p:cNvSpPr/>
-          <p:nvPr/>
-        </p:nvSpPr>
-        <p:spPr>
-          <a:xfrm>
-            <a:off x="2313432" y="3364992"/>
-            <a:ext cx="1645920" cy="475488"/>
+          <p:cNvPr id="30" name="Text 28"/>
+          <p:cNvSpPr/>
+          <p:nvPr/>
+        </p:nvSpPr>
+        <p:spPr>
+          <a:xfrm>
+            <a:off x="1975104" y="3364992"/>
+            <a:ext cx="1554480" cy="475488"/>
           </a:xfrm>
           <a:prstGeom prst="rect">
             <a:avLst/>
@@ -14041,7 +14226,7 @@
                 <a:ea typeface="Trebuchet MS" pitchFamily="34" charset="-122"/>
                 <a:cs typeface="Trebuchet MS" pitchFamily="34" charset="-120"/>
               </a:rPr>
-              <a:t>per</a:t>
+              <a:t>un</a:t>
             </a:r>
             <a:endParaRPr lang="en-US" sz="1400" dirty="0"/>
           </a:p>
@@ -14049,14 +14234,14 @@
       </p:sp>
       <p:sp>
         <p:nvSpPr>
-          <p:cNvPr id="29" name="Text 27"/>
-          <p:cNvSpPr/>
-          <p:nvPr/>
-        </p:nvSpPr>
-        <p:spPr>
-          <a:xfrm>
-            <a:off x="3959352" y="3364992"/>
-            <a:ext cx="411480" cy="475488"/>
+          <p:cNvPr id="31" name="Text 29"/>
+          <p:cNvSpPr/>
+          <p:nvPr/>
+        </p:nvSpPr>
+        <p:spPr>
+          <a:xfrm>
+            <a:off x="3529584" y="3364992"/>
+            <a:ext cx="73152" cy="475488"/>
           </a:xfrm>
           <a:prstGeom prst="rect">
             <a:avLst/>
@@ -14088,14 +14273,14 @@
       </p:sp>
       <p:sp>
         <p:nvSpPr>
-          <p:cNvPr id="30" name="Shape 28"/>
-          <p:cNvSpPr/>
-          <p:nvPr/>
-        </p:nvSpPr>
-        <p:spPr>
-          <a:xfrm>
-            <a:off x="4370832" y="3364992"/>
-            <a:ext cx="1645920" cy="475488"/>
+          <p:cNvPr id="32" name="Shape 30"/>
+          <p:cNvSpPr/>
+          <p:nvPr/>
+        </p:nvSpPr>
+        <p:spPr>
+          <a:xfrm>
+            <a:off x="3602736" y="3364992"/>
+            <a:ext cx="1554480" cy="475488"/>
           </a:xfrm>
           <a:prstGeom prst="rect">
             <a:avLst>
@@ -14115,14 +14300,14 @@
       </p:sp>
       <p:sp>
         <p:nvSpPr>
-          <p:cNvPr id="31" name="Text 29"/>
-          <p:cNvSpPr/>
-          <p:nvPr/>
-        </p:nvSpPr>
-        <p:spPr>
-          <a:xfrm>
-            <a:off x="4370832" y="3364992"/>
-            <a:ext cx="1645920" cy="475488"/>
+          <p:cNvPr id="33" name="Text 31"/>
+          <p:cNvSpPr/>
+          <p:nvPr/>
+        </p:nvSpPr>
+        <p:spPr>
+          <a:xfrm>
+            <a:off x="3602736" y="3364992"/>
+            <a:ext cx="1554480" cy="475488"/>
           </a:xfrm>
           <a:prstGeom prst="rect">
             <a:avLst/>
@@ -14146,7 +14331,7 @@
                 <a:ea typeface="Trebuchet MS" pitchFamily="34" charset="-122"/>
                 <a:cs typeface="Trebuchet MS" pitchFamily="34" charset="-120"/>
               </a:rPr>
-              <a:t>sua</a:t>
+              <a:t>per</a:t>
             </a:r>
             <a:endParaRPr lang="en-US" sz="1400" dirty="0"/>
           </a:p>
@@ -14154,14 +14339,14 @@
       </p:sp>
       <p:sp>
         <p:nvSpPr>
-          <p:cNvPr id="32" name="Text 30"/>
-          <p:cNvSpPr/>
-          <p:nvPr/>
-        </p:nvSpPr>
-        <p:spPr>
-          <a:xfrm>
-            <a:off x="6016752" y="3364992"/>
-            <a:ext cx="411480" cy="475488"/>
+          <p:cNvPr id="34" name="Text 32"/>
+          <p:cNvSpPr/>
+          <p:nvPr/>
+        </p:nvSpPr>
+        <p:spPr>
+          <a:xfrm>
+            <a:off x="5157216" y="3364992"/>
+            <a:ext cx="73152" cy="475488"/>
           </a:xfrm>
           <a:prstGeom prst="rect">
             <a:avLst/>
@@ -14193,14 +14378,14 @@
       </p:sp>
       <p:sp>
         <p:nvSpPr>
-          <p:cNvPr id="33" name="Shape 31"/>
-          <p:cNvSpPr/>
-          <p:nvPr/>
-        </p:nvSpPr>
-        <p:spPr>
-          <a:xfrm>
-            <a:off x="6428232" y="3364992"/>
-            <a:ext cx="1645920" cy="475488"/>
+          <p:cNvPr id="35" name="Shape 33"/>
+          <p:cNvSpPr/>
+          <p:nvPr/>
+        </p:nvSpPr>
+        <p:spPr>
+          <a:xfrm>
+            <a:off x="5230368" y="3364992"/>
+            <a:ext cx="1554480" cy="475488"/>
           </a:xfrm>
           <a:prstGeom prst="rect">
             <a:avLst>
@@ -14220,14 +14405,14 @@
       </p:sp>
       <p:sp>
         <p:nvSpPr>
-          <p:cNvPr id="34" name="Text 32"/>
-          <p:cNvSpPr/>
-          <p:nvPr/>
-        </p:nvSpPr>
-        <p:spPr>
-          <a:xfrm>
-            <a:off x="6428232" y="3364992"/>
-            <a:ext cx="1645920" cy="475488"/>
+          <p:cNvPr id="36" name="Text 34"/>
+          <p:cNvSpPr/>
+          <p:nvPr/>
+        </p:nvSpPr>
+        <p:spPr>
+          <a:xfrm>
+            <a:off x="5230368" y="3364992"/>
+            <a:ext cx="1554480" cy="475488"/>
           </a:xfrm>
           <a:prstGeom prst="rect">
             <a:avLst/>
@@ -14251,7 +14436,7 @@
                 <a:ea typeface="Trebuchet MS" pitchFamily="34" charset="-122"/>
                 <a:cs typeface="Trebuchet MS" pitchFamily="34" charset="-120"/>
               </a:rPr>
-              <a:t>sion</a:t>
+              <a:t>sua</a:t>
             </a:r>
             <a:endParaRPr lang="en-US" sz="1400" dirty="0"/>
           </a:p>
@@ -14259,7 +14444,112 @@
       </p:sp>
       <p:sp>
         <p:nvSpPr>
-          <p:cNvPr id="35" name="Shape 33"/>
+          <p:cNvPr id="37" name="Text 35"/>
+          <p:cNvSpPr/>
+          <p:nvPr/>
+        </p:nvSpPr>
+        <p:spPr>
+          <a:xfrm>
+            <a:off x="6784848" y="3364992"/>
+            <a:ext cx="73152" cy="475488"/>
+          </a:xfrm>
+          <a:prstGeom prst="rect">
+            <a:avLst/>
+          </a:prstGeom>
+          <a:noFill/>
+          <a:ln/>
+        </p:spPr>
+        <p:txBody>
+          <a:bodyPr wrap="square" lIns="0" tIns="0" rIns="0" bIns="0" rtlCol="0" anchor="ctr"/>
+          <a:lstStyle/>
+          <a:p>
+            <a:pPr algn="ctr" indent="0" marL="0">
+              <a:buNone/>
+            </a:pPr>
+            <a:r>
+              <a:rPr lang="en-US" sz="1600" b="1" dirty="0">
+                <a:solidFill>
+                  <a:srgbClr val="0D9488"/>
+                </a:solidFill>
+                <a:latin typeface="Trebuchet MS" pitchFamily="34" charset="0"/>
+                <a:ea typeface="Trebuchet MS" pitchFamily="34" charset="-122"/>
+                <a:cs typeface="Trebuchet MS" pitchFamily="34" charset="-120"/>
+              </a:rPr>
+              <a:t>·</a:t>
+            </a:r>
+            <a:endParaRPr lang="en-US" sz="1600" dirty="0"/>
+          </a:p>
+        </p:txBody>
+      </p:sp>
+      <p:sp>
+        <p:nvSpPr>
+          <p:cNvPr id="38" name="Shape 36"/>
+          <p:cNvSpPr/>
+          <p:nvPr/>
+        </p:nvSpPr>
+        <p:spPr>
+          <a:xfrm>
+            <a:off x="6858000" y="3364992"/>
+            <a:ext cx="1554480" cy="475488"/>
+          </a:xfrm>
+          <a:prstGeom prst="rect">
+            <a:avLst>
+              <a:gd name="adj" fmla="val 9615"/>
+            </a:avLst>
+          </a:prstGeom>
+          <a:solidFill>
+            <a:srgbClr val="FFFFFF"/>
+          </a:solidFill>
+          <a:ln w="12700">
+            <a:solidFill>
+              <a:srgbClr val="0D9488"/>
+            </a:solidFill>
+            <a:prstDash val="solid"/>
+          </a:ln>
+        </p:spPr>
+      </p:sp>
+      <p:sp>
+        <p:nvSpPr>
+          <p:cNvPr id="39" name="Text 37"/>
+          <p:cNvSpPr/>
+          <p:nvPr/>
+        </p:nvSpPr>
+        <p:spPr>
+          <a:xfrm>
+            <a:off x="6858000" y="3364992"/>
+            <a:ext cx="1554480" cy="475488"/>
+          </a:xfrm>
+          <a:prstGeom prst="rect">
+            <a:avLst/>
+          </a:prstGeom>
+          <a:noFill/>
+          <a:ln/>
+        </p:spPr>
+        <p:txBody>
+          <a:bodyPr wrap="square" lIns="0" tIns="0" rIns="0" bIns="0" rtlCol="0" anchor="ctr"/>
+          <a:lstStyle/>
+          <a:p>
+            <a:pPr algn="ctr" indent="0" marL="0">
+              <a:buNone/>
+            </a:pPr>
+            <a:r>
+              <a:rPr lang="en-US" sz="1400" b="1" dirty="0">
+                <a:solidFill>
+                  <a:srgbClr val="0D9488"/>
+                </a:solidFill>
+                <a:latin typeface="Trebuchet MS" pitchFamily="34" charset="0"/>
+                <a:ea typeface="Trebuchet MS" pitchFamily="34" charset="-122"/>
+                <a:cs typeface="Trebuchet MS" pitchFamily="34" charset="-120"/>
+              </a:rPr>
+              <a:t>ded</a:t>
+            </a:r>
+            <a:endParaRPr lang="en-US" sz="1400" dirty="0"/>
+          </a:p>
+        </p:txBody>
+      </p:sp>
+      <p:sp>
+        <p:nvSpPr>
+          <p:cNvPr id="40" name="Shape 38"/>
           <p:cNvSpPr/>
           <p:nvPr/>
         </p:nvSpPr>
@@ -14286,7 +14576,7 @@
       </p:sp>
       <p:sp>
         <p:nvSpPr>
-          <p:cNvPr id="36" name="Text 34"/>
+          <p:cNvPr id="41" name="Text 39"/>
           <p:cNvSpPr/>
           <p:nvPr/>
         </p:nvSpPr>
@@ -14325,7 +14615,7 @@
       </p:sp>
       <p:sp>
         <p:nvSpPr>
-          <p:cNvPr id="37" name="Shape 35"/>
+          <p:cNvPr id="42" name="Shape 40"/>
           <p:cNvSpPr/>
           <p:nvPr/>
         </p:nvSpPr>
@@ -14352,7 +14642,7 @@
       </p:sp>
       <p:sp>
         <p:nvSpPr>
-          <p:cNvPr id="38" name="Text 36"/>
+          <p:cNvPr id="43" name="Text 41"/>
           <p:cNvSpPr/>
           <p:nvPr/>
         </p:nvSpPr>
@@ -14584,7 +14874,7 @@
                 <a:ea typeface="Calibri" pitchFamily="34" charset="-122"/>
                 <a:cs typeface="Calibri" pitchFamily="34" charset="-120"/>
               </a:rPr>
-              <a:t>Root 'persuade' — to urge or convince someone</a:t>
+              <a:t>Root 'persuade' — to convince or urge someone</a:t>
             </a:r>
             <a:endParaRPr lang="en-US" sz="1600" dirty="0"/>
           </a:p>
@@ -14940,7 +15230,7 @@
                 <a:ea typeface="Calibri" pitchFamily="34" charset="-122"/>
                 <a:cs typeface="Calibri" pitchFamily="34" charset="-120"/>
               </a:rPr>
-              <a:t>Word Labs  •  wordlabs.app  •  Root: 'persuade' = to urge or convince someone</a:t>
+              <a:t>Word Labs  •  wordlabs.app  •  Root: 'persuade' = to convince or urge someone</a:t>
             </a:r>
             <a:endParaRPr lang="en-US" sz="800" dirty="0"/>
           </a:p>
@@ -15079,7 +15369,7 @@
                 <a:ea typeface="Trebuchet MS" pitchFamily="34" charset="-122"/>
                 <a:cs typeface="Trebuchet MS" pitchFamily="34" charset="-120"/>
               </a:rPr>
-              <a:t>persuasion</a:t>
+              <a:t>unpersuaded</a:t>
             </a:r>
             <a:endParaRPr lang="en-US" sz="2800" dirty="0"/>
           </a:p>
@@ -15159,7 +15449,7 @@
         </p:nvSpPr>
         <p:spPr>
           <a:xfrm>
-            <a:off x="2938272" y="2258568"/>
+            <a:off x="2221992" y="2258568"/>
             <a:ext cx="1828800" cy="292608"/>
           </a:xfrm>
           <a:prstGeom prst="rect">
@@ -15168,11 +15458,11 @@
             </a:avLst>
           </a:prstGeom>
           <a:solidFill>
-            <a:srgbClr val="CCFBF1"/>
+            <a:srgbClr val="DDD6FE"/>
           </a:solidFill>
           <a:ln w="19050">
             <a:solidFill>
-              <a:srgbClr val="0D9488"/>
+              <a:srgbClr val="7C3AED"/>
             </a:solidFill>
             <a:prstDash val="solid"/>
           </a:ln>
@@ -15193,7 +15483,7 @@
         </p:nvSpPr>
         <p:spPr>
           <a:xfrm>
-            <a:off x="2938272" y="2258568"/>
+            <a:off x="2221992" y="2258568"/>
             <a:ext cx="1828800" cy="292608"/>
           </a:xfrm>
           <a:prstGeom prst="rect">
@@ -15212,13 +15502,13 @@
             <a:r>
               <a:rPr lang="en-US" sz="1300" b="1" dirty="0">
                 <a:solidFill>
-                  <a:srgbClr val="0F766E"/>
+                  <a:srgbClr val="4C1D95"/>
                 </a:solidFill>
                 <a:latin typeface="Trebuchet MS" pitchFamily="34" charset="0"/>
                 <a:ea typeface="Trebuchet MS" pitchFamily="34" charset="-122"/>
                 <a:cs typeface="Trebuchet MS" pitchFamily="34" charset="-120"/>
               </a:rPr>
-              <a:t>persuade</a:t>
+              <a:t>un</a:t>
             </a:r>
             <a:endParaRPr lang="en-US" sz="1300" dirty="0"/>
           </a:p>
@@ -15232,7 +15522,7 @@
         </p:nvSpPr>
         <p:spPr>
           <a:xfrm>
-            <a:off x="2938272" y="2569464"/>
+            <a:off x="2221992" y="2569464"/>
             <a:ext cx="1828800" cy="201168"/>
           </a:xfrm>
           <a:prstGeom prst="rect">
@@ -15257,7 +15547,7 @@
                 <a:ea typeface="Calibri" pitchFamily="34" charset="-122"/>
                 <a:cs typeface="Calibri" pitchFamily="34" charset="-120"/>
               </a:rPr>
-              <a:t>to urge or convince</a:t>
+              <a:t>not</a:t>
             </a:r>
             <a:endParaRPr lang="en-US" sz="850" dirty="0"/>
           </a:p>
@@ -15265,52 +15555,13 @@
       </p:sp>
       <p:sp>
         <p:nvSpPr>
-          <p:cNvPr id="19" name="Text 17"/>
-          <p:cNvSpPr/>
-          <p:nvPr/>
-        </p:nvSpPr>
-        <p:spPr>
-          <a:xfrm>
-            <a:off x="2938272" y="2752344"/>
-            <a:ext cx="1828800" cy="182880"/>
-          </a:xfrm>
-          <a:prstGeom prst="rect">
-            <a:avLst/>
-          </a:prstGeom>
-          <a:noFill/>
-          <a:ln/>
-        </p:spPr>
-        <p:txBody>
-          <a:bodyPr wrap="square" lIns="0" tIns="0" rIns="0" bIns="0" rtlCol="0" anchor="t"/>
-          <a:lstStyle/>
-          <a:p>
-            <a:pPr algn="ctr" indent="0" marL="0">
-              <a:buNone/>
-            </a:pPr>
-            <a:r>
-              <a:rPr lang="en-US" sz="700" i="1" dirty="0">
-                <a:solidFill>
-                  <a:srgbClr val="94A3B8"/>
-                </a:solidFill>
-                <a:latin typeface="Calibri" pitchFamily="34" charset="0"/>
-                <a:ea typeface="Calibri" pitchFamily="34" charset="-122"/>
-                <a:cs typeface="Calibri" pitchFamily="34" charset="-120"/>
-              </a:rPr>
-              <a:t>'suade' becomes 'suas' before suffix</a:t>
-            </a:r>
-            <a:endParaRPr lang="en-US" sz="700" dirty="0"/>
-          </a:p>
-        </p:txBody>
-      </p:sp>
-      <p:sp>
-        <p:nvSpPr>
-          <p:cNvPr id="20" name="Shape 18"/>
-          <p:cNvSpPr/>
-          <p:nvPr/>
-        </p:nvSpPr>
-        <p:spPr>
-          <a:xfrm>
-            <a:off x="5803392" y="2258568"/>
+          <p:cNvPr id="19" name="Shape 17"/>
+          <p:cNvSpPr/>
+          <p:nvPr/>
+        </p:nvSpPr>
+        <p:spPr>
+          <a:xfrm>
+            <a:off x="4370832" y="2258568"/>
             <a:ext cx="1828800" cy="292608"/>
           </a:xfrm>
           <a:prstGeom prst="rect">
@@ -15319,11 +15570,11 @@
             </a:avLst>
           </a:prstGeom>
           <a:solidFill>
-            <a:srgbClr val="FCE7F3"/>
+            <a:srgbClr val="CCFBF1"/>
           </a:solidFill>
           <a:ln w="19050">
             <a:solidFill>
-              <a:srgbClr val="DB2777"/>
+              <a:srgbClr val="0D9488"/>
             </a:solidFill>
             <a:prstDash val="solid"/>
           </a:ln>
@@ -15338,13 +15589,13 @@
       </p:sp>
       <p:sp>
         <p:nvSpPr>
-          <p:cNvPr id="21" name="Text 19"/>
-          <p:cNvSpPr/>
-          <p:nvPr/>
-        </p:nvSpPr>
-        <p:spPr>
-          <a:xfrm>
-            <a:off x="5803392" y="2258568"/>
+          <p:cNvPr id="20" name="Text 18"/>
+          <p:cNvSpPr/>
+          <p:nvPr/>
+        </p:nvSpPr>
+        <p:spPr>
+          <a:xfrm>
+            <a:off x="4370832" y="2258568"/>
             <a:ext cx="1828800" cy="292608"/>
           </a:xfrm>
           <a:prstGeom prst="rect">
@@ -15363,13 +15614,13 @@
             <a:r>
               <a:rPr lang="en-US" sz="1300" b="1" dirty="0">
                 <a:solidFill>
-                  <a:srgbClr val="9D174D"/>
+                  <a:srgbClr val="0F766E"/>
                 </a:solidFill>
                 <a:latin typeface="Trebuchet MS" pitchFamily="34" charset="0"/>
                 <a:ea typeface="Trebuchet MS" pitchFamily="34" charset="-122"/>
                 <a:cs typeface="Trebuchet MS" pitchFamily="34" charset="-120"/>
               </a:rPr>
-              <a:t>ion</a:t>
+              <a:t>persuade</a:t>
             </a:r>
             <a:endParaRPr lang="en-US" sz="1300" dirty="0"/>
           </a:p>
@@ -15377,13 +15628,13 @@
       </p:sp>
       <p:sp>
         <p:nvSpPr>
-          <p:cNvPr id="22" name="Text 20"/>
-          <p:cNvSpPr/>
-          <p:nvPr/>
-        </p:nvSpPr>
-        <p:spPr>
-          <a:xfrm>
-            <a:off x="5803392" y="2569464"/>
+          <p:cNvPr id="21" name="Text 19"/>
+          <p:cNvSpPr/>
+          <p:nvPr/>
+        </p:nvSpPr>
+        <p:spPr>
+          <a:xfrm>
+            <a:off x="4370832" y="2569464"/>
             <a:ext cx="1828800" cy="201168"/>
           </a:xfrm>
           <a:prstGeom prst="rect">
@@ -15408,7 +15659,7 @@
                 <a:ea typeface="Calibri" pitchFamily="34" charset="-122"/>
                 <a:cs typeface="Calibri" pitchFamily="34" charset="-120"/>
               </a:rPr>
-              <a:t>act or result of</a:t>
+              <a:t>to convince or urge</a:t>
             </a:r>
             <a:endParaRPr lang="en-US" sz="850" dirty="0"/>
           </a:p>
@@ -15416,13 +15667,13 @@
       </p:sp>
       <p:sp>
         <p:nvSpPr>
-          <p:cNvPr id="23" name="Text 21"/>
-          <p:cNvSpPr/>
-          <p:nvPr/>
-        </p:nvSpPr>
-        <p:spPr>
-          <a:xfrm>
-            <a:off x="5803392" y="2752344"/>
+          <p:cNvPr id="22" name="Text 20"/>
+          <p:cNvSpPr/>
+          <p:nvPr/>
+        </p:nvSpPr>
+        <p:spPr>
+          <a:xfrm>
+            <a:off x="4370832" y="2752344"/>
             <a:ext cx="1828800" cy="182880"/>
           </a:xfrm>
           <a:prstGeom prst="rect">
@@ -15447,7 +15698,7 @@
                 <a:ea typeface="Calibri" pitchFamily="34" charset="-122"/>
                 <a:cs typeface="Calibri" pitchFamily="34" charset="-120"/>
               </a:rPr>
-              <a:t>'sion' makes /zhun/ sound</a:t>
+              <a:t>'e' dropped before vowel suffix</a:t>
             </a:r>
             <a:endParaRPr lang="en-US" sz="700" dirty="0"/>
           </a:p>
@@ -15455,7 +15706,119 @@
       </p:sp>
       <p:sp>
         <p:nvSpPr>
-          <p:cNvPr id="24" name="Shape 22"/>
+          <p:cNvPr id="23" name="Shape 21"/>
+          <p:cNvSpPr/>
+          <p:nvPr/>
+        </p:nvSpPr>
+        <p:spPr>
+          <a:xfrm>
+            <a:off x="6519672" y="2258568"/>
+            <a:ext cx="1828800" cy="292608"/>
+          </a:xfrm>
+          <a:prstGeom prst="rect">
+            <a:avLst>
+              <a:gd name="adj" fmla="val 25000"/>
+            </a:avLst>
+          </a:prstGeom>
+          <a:solidFill>
+            <a:srgbClr val="FCE7F3"/>
+          </a:solidFill>
+          <a:ln w="19050">
+            <a:solidFill>
+              <a:srgbClr val="DB2777"/>
+            </a:solidFill>
+            <a:prstDash val="solid"/>
+          </a:ln>
+          <a:effectLst>
+            <a:outerShdw sx="100000" sy="100000" kx="0" ky="0" algn="bl" rotWithShape="0" blurRad="101600" dist="38100" dir="8100000">
+              <a:srgbClr val="000000">
+                <a:alpha val="12000"/>
+              </a:srgbClr>
+            </a:outerShdw>
+          </a:effectLst>
+        </p:spPr>
+      </p:sp>
+      <p:sp>
+        <p:nvSpPr>
+          <p:cNvPr id="24" name="Text 22"/>
+          <p:cNvSpPr/>
+          <p:nvPr/>
+        </p:nvSpPr>
+        <p:spPr>
+          <a:xfrm>
+            <a:off x="6519672" y="2258568"/>
+            <a:ext cx="1828800" cy="292608"/>
+          </a:xfrm>
+          <a:prstGeom prst="rect">
+            <a:avLst/>
+          </a:prstGeom>
+          <a:noFill/>
+          <a:ln/>
+        </p:spPr>
+        <p:txBody>
+          <a:bodyPr wrap="square" lIns="0" tIns="0" rIns="0" bIns="0" rtlCol="0" anchor="ctr"/>
+          <a:lstStyle/>
+          <a:p>
+            <a:pPr algn="ctr" indent="0" marL="0">
+              <a:buNone/>
+            </a:pPr>
+            <a:r>
+              <a:rPr lang="en-US" sz="1300" b="1" dirty="0">
+                <a:solidFill>
+                  <a:srgbClr val="9D174D"/>
+                </a:solidFill>
+                <a:latin typeface="Trebuchet MS" pitchFamily="34" charset="0"/>
+                <a:ea typeface="Trebuchet MS" pitchFamily="34" charset="-122"/>
+                <a:cs typeface="Trebuchet MS" pitchFamily="34" charset="-120"/>
+              </a:rPr>
+              <a:t>ed</a:t>
+            </a:r>
+            <a:endParaRPr lang="en-US" sz="1300" dirty="0"/>
+          </a:p>
+        </p:txBody>
+      </p:sp>
+      <p:sp>
+        <p:nvSpPr>
+          <p:cNvPr id="25" name="Text 23"/>
+          <p:cNvSpPr/>
+          <p:nvPr/>
+        </p:nvSpPr>
+        <p:spPr>
+          <a:xfrm>
+            <a:off x="6519672" y="2569464"/>
+            <a:ext cx="1828800" cy="201168"/>
+          </a:xfrm>
+          <a:prstGeom prst="rect">
+            <a:avLst/>
+          </a:prstGeom>
+          <a:noFill/>
+          <a:ln/>
+        </p:spPr>
+        <p:txBody>
+          <a:bodyPr wrap="square" lIns="0" tIns="0" rIns="0" bIns="0" rtlCol="0" anchor="t"/>
+          <a:lstStyle/>
+          <a:p>
+            <a:pPr algn="ctr" indent="0" marL="0">
+              <a:buNone/>
+            </a:pPr>
+            <a:r>
+              <a:rPr lang="en-US" sz="850" dirty="0">
+                <a:solidFill>
+                  <a:srgbClr val="475569"/>
+                </a:solidFill>
+                <a:latin typeface="Calibri" pitchFamily="34" charset="0"/>
+                <a:ea typeface="Calibri" pitchFamily="34" charset="-122"/>
+                <a:cs typeface="Calibri" pitchFamily="34" charset="-120"/>
+              </a:rPr>
+              <a:t>past tense</a:t>
+            </a:r>
+            <a:endParaRPr lang="en-US" sz="850" dirty="0"/>
+          </a:p>
+        </p:txBody>
+      </p:sp>
+      <p:sp>
+        <p:nvSpPr>
+          <p:cNvPr id="26" name="Shape 24"/>
           <p:cNvSpPr/>
           <p:nvPr/>
         </p:nvSpPr>
@@ -15482,7 +15845,7 @@
       </p:sp>
       <p:sp>
         <p:nvSpPr>
-          <p:cNvPr id="25" name="Text 23"/>
+          <p:cNvPr id="27" name="Text 25"/>
           <p:cNvSpPr/>
           <p:nvPr/>
         </p:nvSpPr>
@@ -15521,7 +15884,7 @@
       </p:sp>
       <p:sp>
         <p:nvSpPr>
-          <p:cNvPr id="26" name="Shape 24"/>
+          <p:cNvPr id="28" name="Shape 26"/>
           <p:cNvSpPr/>
           <p:nvPr/>
         </p:nvSpPr>
@@ -15548,14 +15911,14 @@
       </p:sp>
       <p:sp>
         <p:nvSpPr>
-          <p:cNvPr id="27" name="Shape 25"/>
-          <p:cNvSpPr/>
-          <p:nvPr/>
-        </p:nvSpPr>
-        <p:spPr>
-          <a:xfrm>
-            <a:off x="2313432" y="3364992"/>
-            <a:ext cx="1645920" cy="475488"/>
+          <p:cNvPr id="29" name="Shape 27"/>
+          <p:cNvSpPr/>
+          <p:nvPr/>
+        </p:nvSpPr>
+        <p:spPr>
+          <a:xfrm>
+            <a:off x="1975104" y="3364992"/>
+            <a:ext cx="1554480" cy="475488"/>
           </a:xfrm>
           <a:prstGeom prst="rect">
             <a:avLst>
@@ -15575,14 +15938,14 @@
       </p:sp>
       <p:sp>
         <p:nvSpPr>
-          <p:cNvPr id="28" name="Text 26"/>
-          <p:cNvSpPr/>
-          <p:nvPr/>
-        </p:nvSpPr>
-        <p:spPr>
-          <a:xfrm>
-            <a:off x="2313432" y="3364992"/>
-            <a:ext cx="1645920" cy="475488"/>
+          <p:cNvPr id="30" name="Text 28"/>
+          <p:cNvSpPr/>
+          <p:nvPr/>
+        </p:nvSpPr>
+        <p:spPr>
+          <a:xfrm>
+            <a:off x="1975104" y="3364992"/>
+            <a:ext cx="1554480" cy="475488"/>
           </a:xfrm>
           <a:prstGeom prst="rect">
             <a:avLst/>
@@ -15606,7 +15969,7 @@
                 <a:ea typeface="Trebuchet MS" pitchFamily="34" charset="-122"/>
                 <a:cs typeface="Trebuchet MS" pitchFamily="34" charset="-120"/>
               </a:rPr>
-              <a:t>per</a:t>
+              <a:t>un</a:t>
             </a:r>
             <a:endParaRPr lang="en-US" sz="1400" dirty="0"/>
           </a:p>
@@ -15614,14 +15977,14 @@
       </p:sp>
       <p:sp>
         <p:nvSpPr>
-          <p:cNvPr id="29" name="Text 27"/>
-          <p:cNvSpPr/>
-          <p:nvPr/>
-        </p:nvSpPr>
-        <p:spPr>
-          <a:xfrm>
-            <a:off x="3959352" y="3364992"/>
-            <a:ext cx="411480" cy="475488"/>
+          <p:cNvPr id="31" name="Text 29"/>
+          <p:cNvSpPr/>
+          <p:nvPr/>
+        </p:nvSpPr>
+        <p:spPr>
+          <a:xfrm>
+            <a:off x="3529584" y="3364992"/>
+            <a:ext cx="73152" cy="475488"/>
           </a:xfrm>
           <a:prstGeom prst="rect">
             <a:avLst/>
@@ -15653,14 +16016,14 @@
       </p:sp>
       <p:sp>
         <p:nvSpPr>
-          <p:cNvPr id="30" name="Shape 28"/>
-          <p:cNvSpPr/>
-          <p:nvPr/>
-        </p:nvSpPr>
-        <p:spPr>
-          <a:xfrm>
-            <a:off x="4370832" y="3364992"/>
-            <a:ext cx="1645920" cy="475488"/>
+          <p:cNvPr id="32" name="Shape 30"/>
+          <p:cNvSpPr/>
+          <p:nvPr/>
+        </p:nvSpPr>
+        <p:spPr>
+          <a:xfrm>
+            <a:off x="3602736" y="3364992"/>
+            <a:ext cx="1554480" cy="475488"/>
           </a:xfrm>
           <a:prstGeom prst="rect">
             <a:avLst>
@@ -15680,14 +16043,14 @@
       </p:sp>
       <p:sp>
         <p:nvSpPr>
-          <p:cNvPr id="31" name="Text 29"/>
-          <p:cNvSpPr/>
-          <p:nvPr/>
-        </p:nvSpPr>
-        <p:spPr>
-          <a:xfrm>
-            <a:off x="4370832" y="3364992"/>
-            <a:ext cx="1645920" cy="475488"/>
+          <p:cNvPr id="33" name="Text 31"/>
+          <p:cNvSpPr/>
+          <p:nvPr/>
+        </p:nvSpPr>
+        <p:spPr>
+          <a:xfrm>
+            <a:off x="3602736" y="3364992"/>
+            <a:ext cx="1554480" cy="475488"/>
           </a:xfrm>
           <a:prstGeom prst="rect">
             <a:avLst/>
@@ -15711,7 +16074,7 @@
                 <a:ea typeface="Trebuchet MS" pitchFamily="34" charset="-122"/>
                 <a:cs typeface="Trebuchet MS" pitchFamily="34" charset="-120"/>
               </a:rPr>
-              <a:t>sua</a:t>
+              <a:t>per</a:t>
             </a:r>
             <a:endParaRPr lang="en-US" sz="1400" dirty="0"/>
           </a:p>
@@ -15719,14 +16082,14 @@
       </p:sp>
       <p:sp>
         <p:nvSpPr>
-          <p:cNvPr id="32" name="Text 30"/>
-          <p:cNvSpPr/>
-          <p:nvPr/>
-        </p:nvSpPr>
-        <p:spPr>
-          <a:xfrm>
-            <a:off x="6016752" y="3364992"/>
-            <a:ext cx="411480" cy="475488"/>
+          <p:cNvPr id="34" name="Text 32"/>
+          <p:cNvSpPr/>
+          <p:nvPr/>
+        </p:nvSpPr>
+        <p:spPr>
+          <a:xfrm>
+            <a:off x="5157216" y="3364992"/>
+            <a:ext cx="73152" cy="475488"/>
           </a:xfrm>
           <a:prstGeom prst="rect">
             <a:avLst/>
@@ -15758,14 +16121,14 @@
       </p:sp>
       <p:sp>
         <p:nvSpPr>
-          <p:cNvPr id="33" name="Shape 31"/>
-          <p:cNvSpPr/>
-          <p:nvPr/>
-        </p:nvSpPr>
-        <p:spPr>
-          <a:xfrm>
-            <a:off x="6428232" y="3364992"/>
-            <a:ext cx="1645920" cy="475488"/>
+          <p:cNvPr id="35" name="Shape 33"/>
+          <p:cNvSpPr/>
+          <p:nvPr/>
+        </p:nvSpPr>
+        <p:spPr>
+          <a:xfrm>
+            <a:off x="5230368" y="3364992"/>
+            <a:ext cx="1554480" cy="475488"/>
           </a:xfrm>
           <a:prstGeom prst="rect">
             <a:avLst>
@@ -15785,14 +16148,14 @@
       </p:sp>
       <p:sp>
         <p:nvSpPr>
-          <p:cNvPr id="34" name="Text 32"/>
-          <p:cNvSpPr/>
-          <p:nvPr/>
-        </p:nvSpPr>
-        <p:spPr>
-          <a:xfrm>
-            <a:off x="6428232" y="3364992"/>
-            <a:ext cx="1645920" cy="475488"/>
+          <p:cNvPr id="36" name="Text 34"/>
+          <p:cNvSpPr/>
+          <p:nvPr/>
+        </p:nvSpPr>
+        <p:spPr>
+          <a:xfrm>
+            <a:off x="5230368" y="3364992"/>
+            <a:ext cx="1554480" cy="475488"/>
           </a:xfrm>
           <a:prstGeom prst="rect">
             <a:avLst/>
@@ -15816,7 +16179,7 @@
                 <a:ea typeface="Trebuchet MS" pitchFamily="34" charset="-122"/>
                 <a:cs typeface="Trebuchet MS" pitchFamily="34" charset="-120"/>
               </a:rPr>
-              <a:t>sion</a:t>
+              <a:t>sua</a:t>
             </a:r>
             <a:endParaRPr lang="en-US" sz="1400" dirty="0"/>
           </a:p>
@@ -15824,7 +16187,112 @@
       </p:sp>
       <p:sp>
         <p:nvSpPr>
-          <p:cNvPr id="35" name="Shape 33"/>
+          <p:cNvPr id="37" name="Text 35"/>
+          <p:cNvSpPr/>
+          <p:nvPr/>
+        </p:nvSpPr>
+        <p:spPr>
+          <a:xfrm>
+            <a:off x="6784848" y="3364992"/>
+            <a:ext cx="73152" cy="475488"/>
+          </a:xfrm>
+          <a:prstGeom prst="rect">
+            <a:avLst/>
+          </a:prstGeom>
+          <a:noFill/>
+          <a:ln/>
+        </p:spPr>
+        <p:txBody>
+          <a:bodyPr wrap="square" lIns="0" tIns="0" rIns="0" bIns="0" rtlCol="0" anchor="ctr"/>
+          <a:lstStyle/>
+          <a:p>
+            <a:pPr algn="ctr" indent="0" marL="0">
+              <a:buNone/>
+            </a:pPr>
+            <a:r>
+              <a:rPr lang="en-US" sz="1600" b="1" dirty="0">
+                <a:solidFill>
+                  <a:srgbClr val="0D9488"/>
+                </a:solidFill>
+                <a:latin typeface="Trebuchet MS" pitchFamily="34" charset="0"/>
+                <a:ea typeface="Trebuchet MS" pitchFamily="34" charset="-122"/>
+                <a:cs typeface="Trebuchet MS" pitchFamily="34" charset="-120"/>
+              </a:rPr>
+              <a:t>·</a:t>
+            </a:r>
+            <a:endParaRPr lang="en-US" sz="1600" dirty="0"/>
+          </a:p>
+        </p:txBody>
+      </p:sp>
+      <p:sp>
+        <p:nvSpPr>
+          <p:cNvPr id="38" name="Shape 36"/>
+          <p:cNvSpPr/>
+          <p:nvPr/>
+        </p:nvSpPr>
+        <p:spPr>
+          <a:xfrm>
+            <a:off x="6858000" y="3364992"/>
+            <a:ext cx="1554480" cy="475488"/>
+          </a:xfrm>
+          <a:prstGeom prst="rect">
+            <a:avLst>
+              <a:gd name="adj" fmla="val 9615"/>
+            </a:avLst>
+          </a:prstGeom>
+          <a:solidFill>
+            <a:srgbClr val="FFFFFF"/>
+          </a:solidFill>
+          <a:ln w="12700">
+            <a:solidFill>
+              <a:srgbClr val="0D9488"/>
+            </a:solidFill>
+            <a:prstDash val="solid"/>
+          </a:ln>
+        </p:spPr>
+      </p:sp>
+      <p:sp>
+        <p:nvSpPr>
+          <p:cNvPr id="39" name="Text 37"/>
+          <p:cNvSpPr/>
+          <p:nvPr/>
+        </p:nvSpPr>
+        <p:spPr>
+          <a:xfrm>
+            <a:off x="6858000" y="3364992"/>
+            <a:ext cx="1554480" cy="475488"/>
+          </a:xfrm>
+          <a:prstGeom prst="rect">
+            <a:avLst/>
+          </a:prstGeom>
+          <a:noFill/>
+          <a:ln/>
+        </p:spPr>
+        <p:txBody>
+          <a:bodyPr wrap="square" lIns="0" tIns="0" rIns="0" bIns="0" rtlCol="0" anchor="ctr"/>
+          <a:lstStyle/>
+          <a:p>
+            <a:pPr algn="ctr" indent="0" marL="0">
+              <a:buNone/>
+            </a:pPr>
+            <a:r>
+              <a:rPr lang="en-US" sz="1400" b="1" dirty="0">
+                <a:solidFill>
+                  <a:srgbClr val="0D9488"/>
+                </a:solidFill>
+                <a:latin typeface="Trebuchet MS" pitchFamily="34" charset="0"/>
+                <a:ea typeface="Trebuchet MS" pitchFamily="34" charset="-122"/>
+                <a:cs typeface="Trebuchet MS" pitchFamily="34" charset="-120"/>
+              </a:rPr>
+              <a:t>ded</a:t>
+            </a:r>
+            <a:endParaRPr lang="en-US" sz="1400" dirty="0"/>
+          </a:p>
+        </p:txBody>
+      </p:sp>
+      <p:sp>
+        <p:nvSpPr>
+          <p:cNvPr id="40" name="Shape 38"/>
           <p:cNvSpPr/>
           <p:nvPr/>
         </p:nvSpPr>
@@ -15851,7 +16319,7 @@
       </p:sp>
       <p:sp>
         <p:nvSpPr>
-          <p:cNvPr id="36" name="Text 34"/>
+          <p:cNvPr id="41" name="Text 39"/>
           <p:cNvSpPr/>
           <p:nvPr/>
         </p:nvSpPr>
@@ -15890,7 +16358,7 @@
       </p:sp>
       <p:sp>
         <p:nvSpPr>
-          <p:cNvPr id="37" name="Shape 35"/>
+          <p:cNvPr id="42" name="Shape 40"/>
           <p:cNvSpPr/>
           <p:nvPr/>
         </p:nvSpPr>
@@ -15917,13 +16385,13 @@
       </p:sp>
       <p:sp>
         <p:nvSpPr>
-          <p:cNvPr id="38" name="Shape 36"/>
-          <p:cNvSpPr/>
-          <p:nvPr/>
-        </p:nvSpPr>
-        <p:spPr>
-          <a:xfrm>
-            <a:off x="2124837" y="4169664"/>
+          <p:cNvPr id="43" name="Shape 41"/>
+          <p:cNvSpPr/>
+          <p:nvPr/>
+        </p:nvSpPr>
+        <p:spPr>
+          <a:xfrm>
+            <a:off x="2023872" y="4169664"/>
             <a:ext cx="685800" cy="384048"/>
           </a:xfrm>
           <a:prstGeom prst="rect">
@@ -15944,13 +16412,13 @@
       </p:sp>
       <p:sp>
         <p:nvSpPr>
-          <p:cNvPr id="39" name="Text 37"/>
-          <p:cNvSpPr/>
-          <p:nvPr/>
-        </p:nvSpPr>
-        <p:spPr>
-          <a:xfrm>
-            <a:off x="2124837" y="4169664"/>
+          <p:cNvPr id="44" name="Text 42"/>
+          <p:cNvSpPr/>
+          <p:nvPr/>
+        </p:nvSpPr>
+        <p:spPr>
+          <a:xfrm>
+            <a:off x="2023872" y="4169664"/>
             <a:ext cx="685800" cy="384048"/>
           </a:xfrm>
           <a:prstGeom prst="rect">
@@ -15975,7 +16443,7 @@
                 <a:ea typeface="Trebuchet MS" pitchFamily="34" charset="-122"/>
                 <a:cs typeface="Trebuchet MS" pitchFamily="34" charset="-120"/>
               </a:rPr>
-              <a:t>p</a:t>
+              <a:t>u</a:t>
             </a:r>
             <a:endParaRPr lang="en-US" sz="900" dirty="0"/>
           </a:p>
@@ -15983,13 +16451,13 @@
       </p:sp>
       <p:sp>
         <p:nvSpPr>
-          <p:cNvPr id="40" name="Shape 38"/>
-          <p:cNvSpPr/>
-          <p:nvPr/>
-        </p:nvSpPr>
-        <p:spPr>
-          <a:xfrm>
-            <a:off x="3033522" y="4169664"/>
+          <p:cNvPr id="45" name="Shape 43"/>
+          <p:cNvSpPr/>
+          <p:nvPr/>
+        </p:nvSpPr>
+        <p:spPr>
+          <a:xfrm>
+            <a:off x="2831592" y="4169664"/>
             <a:ext cx="685800" cy="384048"/>
           </a:xfrm>
           <a:prstGeom prst="rect">
@@ -16010,13 +16478,13 @@
       </p:sp>
       <p:sp>
         <p:nvSpPr>
-          <p:cNvPr id="41" name="Text 39"/>
-          <p:cNvSpPr/>
-          <p:nvPr/>
-        </p:nvSpPr>
-        <p:spPr>
-          <a:xfrm>
-            <a:off x="3033522" y="4169664"/>
+          <p:cNvPr id="46" name="Text 44"/>
+          <p:cNvSpPr/>
+          <p:nvPr/>
+        </p:nvSpPr>
+        <p:spPr>
+          <a:xfrm>
+            <a:off x="2831592" y="4169664"/>
             <a:ext cx="685800" cy="384048"/>
           </a:xfrm>
           <a:prstGeom prst="rect">
@@ -16041,7 +16509,7 @@
                 <a:ea typeface="Trebuchet MS" pitchFamily="34" charset="-122"/>
                 <a:cs typeface="Trebuchet MS" pitchFamily="34" charset="-120"/>
               </a:rPr>
-              <a:t>er</a:t>
+              <a:t>n</a:t>
             </a:r>
             <a:endParaRPr lang="en-US" sz="900" dirty="0"/>
           </a:p>
@@ -16049,13 +16517,13 @@
       </p:sp>
       <p:sp>
         <p:nvSpPr>
-          <p:cNvPr id="42" name="Shape 40"/>
-          <p:cNvSpPr/>
-          <p:nvPr/>
-        </p:nvSpPr>
-        <p:spPr>
-          <a:xfrm>
-            <a:off x="3942207" y="4169664"/>
+          <p:cNvPr id="47" name="Shape 45"/>
+          <p:cNvSpPr/>
+          <p:nvPr/>
+        </p:nvSpPr>
+        <p:spPr>
+          <a:xfrm>
+            <a:off x="3639312" y="4169664"/>
             <a:ext cx="685800" cy="384048"/>
           </a:xfrm>
           <a:prstGeom prst="rect">
@@ -16076,13 +16544,13 @@
       </p:sp>
       <p:sp>
         <p:nvSpPr>
-          <p:cNvPr id="43" name="Text 41"/>
-          <p:cNvSpPr/>
-          <p:nvPr/>
-        </p:nvSpPr>
-        <p:spPr>
-          <a:xfrm>
-            <a:off x="3942207" y="4169664"/>
+          <p:cNvPr id="48" name="Text 46"/>
+          <p:cNvSpPr/>
+          <p:nvPr/>
+        </p:nvSpPr>
+        <p:spPr>
+          <a:xfrm>
+            <a:off x="3639312" y="4169664"/>
             <a:ext cx="685800" cy="384048"/>
           </a:xfrm>
           <a:prstGeom prst="rect">
@@ -16107,7 +16575,7 @@
                 <a:ea typeface="Trebuchet MS" pitchFamily="34" charset="-122"/>
                 <a:cs typeface="Trebuchet MS" pitchFamily="34" charset="-120"/>
               </a:rPr>
-              <a:t>s</a:t>
+              <a:t>p</a:t>
             </a:r>
             <a:endParaRPr lang="en-US" sz="900" dirty="0"/>
           </a:p>
@@ -16115,13 +16583,13 @@
       </p:sp>
       <p:sp>
         <p:nvSpPr>
-          <p:cNvPr id="44" name="Shape 42"/>
-          <p:cNvSpPr/>
-          <p:nvPr/>
-        </p:nvSpPr>
-        <p:spPr>
-          <a:xfrm>
-            <a:off x="4850892" y="4169664"/>
+          <p:cNvPr id="49" name="Shape 47"/>
+          <p:cNvSpPr/>
+          <p:nvPr/>
+        </p:nvSpPr>
+        <p:spPr>
+          <a:xfrm>
+            <a:off x="4447032" y="4169664"/>
             <a:ext cx="685800" cy="384048"/>
           </a:xfrm>
           <a:prstGeom prst="rect">
@@ -16142,13 +16610,13 @@
       </p:sp>
       <p:sp>
         <p:nvSpPr>
-          <p:cNvPr id="45" name="Text 43"/>
-          <p:cNvSpPr/>
-          <p:nvPr/>
-        </p:nvSpPr>
-        <p:spPr>
-          <a:xfrm>
-            <a:off x="4850892" y="4169664"/>
+          <p:cNvPr id="50" name="Text 48"/>
+          <p:cNvSpPr/>
+          <p:nvPr/>
+        </p:nvSpPr>
+        <p:spPr>
+          <a:xfrm>
+            <a:off x="4447032" y="4169664"/>
             <a:ext cx="685800" cy="384048"/>
           </a:xfrm>
           <a:prstGeom prst="rect">
@@ -16173,7 +16641,7 @@
                 <a:ea typeface="Trebuchet MS" pitchFamily="34" charset="-122"/>
                 <a:cs typeface="Trebuchet MS" pitchFamily="34" charset="-120"/>
               </a:rPr>
-              <a:t>ua</a:t>
+              <a:t>er</a:t>
             </a:r>
             <a:endParaRPr lang="en-US" sz="900" dirty="0"/>
           </a:p>
@@ -16181,13 +16649,13 @@
       </p:sp>
       <p:sp>
         <p:nvSpPr>
-          <p:cNvPr id="46" name="Shape 44"/>
-          <p:cNvSpPr/>
-          <p:nvPr/>
-        </p:nvSpPr>
-        <p:spPr>
-          <a:xfrm>
-            <a:off x="5759577" y="4169664"/>
+          <p:cNvPr id="51" name="Shape 49"/>
+          <p:cNvSpPr/>
+          <p:nvPr/>
+        </p:nvSpPr>
+        <p:spPr>
+          <a:xfrm>
+            <a:off x="5254752" y="4169664"/>
             <a:ext cx="685800" cy="384048"/>
           </a:xfrm>
           <a:prstGeom prst="rect">
@@ -16208,13 +16676,13 @@
       </p:sp>
       <p:sp>
         <p:nvSpPr>
-          <p:cNvPr id="47" name="Text 45"/>
-          <p:cNvSpPr/>
-          <p:nvPr/>
-        </p:nvSpPr>
-        <p:spPr>
-          <a:xfrm>
-            <a:off x="5759577" y="4169664"/>
+          <p:cNvPr id="52" name="Text 50"/>
+          <p:cNvSpPr/>
+          <p:nvPr/>
+        </p:nvSpPr>
+        <p:spPr>
+          <a:xfrm>
+            <a:off x="5254752" y="4169664"/>
             <a:ext cx="685800" cy="384048"/>
           </a:xfrm>
           <a:prstGeom prst="rect">
@@ -16247,13 +16715,211 @@
       </p:sp>
       <p:sp>
         <p:nvSpPr>
-          <p:cNvPr id="48" name="Text 46"/>
-          <p:cNvSpPr/>
-          <p:nvPr/>
-        </p:nvSpPr>
-        <p:spPr>
-          <a:xfrm>
-            <a:off x="5759577" y="4572000"/>
+          <p:cNvPr id="53" name="Shape 51"/>
+          <p:cNvSpPr/>
+          <p:nvPr/>
+        </p:nvSpPr>
+        <p:spPr>
+          <a:xfrm>
+            <a:off x="6062472" y="4169664"/>
+            <a:ext cx="685800" cy="384048"/>
+          </a:xfrm>
+          <a:prstGeom prst="rect">
+            <a:avLst>
+              <a:gd name="adj" fmla="val 9524"/>
+            </a:avLst>
+          </a:prstGeom>
+          <a:solidFill>
+            <a:srgbClr val="FFFFFF"/>
+          </a:solidFill>
+          <a:ln w="12700">
+            <a:solidFill>
+              <a:srgbClr val="DB2777"/>
+            </a:solidFill>
+            <a:prstDash val="solid"/>
+          </a:ln>
+        </p:spPr>
+      </p:sp>
+      <p:sp>
+        <p:nvSpPr>
+          <p:cNvPr id="54" name="Text 52"/>
+          <p:cNvSpPr/>
+          <p:nvPr/>
+        </p:nvSpPr>
+        <p:spPr>
+          <a:xfrm>
+            <a:off x="6062472" y="4169664"/>
+            <a:ext cx="685800" cy="384048"/>
+          </a:xfrm>
+          <a:prstGeom prst="rect">
+            <a:avLst/>
+          </a:prstGeom>
+          <a:noFill/>
+          <a:ln/>
+        </p:spPr>
+        <p:txBody>
+          <a:bodyPr wrap="square" lIns="0" tIns="0" rIns="0" bIns="0" rtlCol="0" anchor="ctr"/>
+          <a:lstStyle/>
+          <a:p>
+            <a:pPr algn="ctr" indent="0" marL="0">
+              <a:buNone/>
+            </a:pPr>
+            <a:r>
+              <a:rPr lang="en-US" sz="900" b="1" dirty="0">
+                <a:solidFill>
+                  <a:srgbClr val="9D174D"/>
+                </a:solidFill>
+                <a:latin typeface="Trebuchet MS" pitchFamily="34" charset="0"/>
+                <a:ea typeface="Trebuchet MS" pitchFamily="34" charset="-122"/>
+                <a:cs typeface="Trebuchet MS" pitchFamily="34" charset="-120"/>
+              </a:rPr>
+              <a:t>ua</a:t>
+            </a:r>
+            <a:endParaRPr lang="en-US" sz="900" dirty="0"/>
+          </a:p>
+        </p:txBody>
+      </p:sp>
+      <p:sp>
+        <p:nvSpPr>
+          <p:cNvPr id="55" name="Shape 53"/>
+          <p:cNvSpPr/>
+          <p:nvPr/>
+        </p:nvSpPr>
+        <p:spPr>
+          <a:xfrm>
+            <a:off x="6870192" y="4169664"/>
+            <a:ext cx="685800" cy="384048"/>
+          </a:xfrm>
+          <a:prstGeom prst="rect">
+            <a:avLst>
+              <a:gd name="adj" fmla="val 9524"/>
+            </a:avLst>
+          </a:prstGeom>
+          <a:solidFill>
+            <a:srgbClr val="FFFFFF"/>
+          </a:solidFill>
+          <a:ln w="12700">
+            <a:solidFill>
+              <a:srgbClr val="DB2777"/>
+            </a:solidFill>
+            <a:prstDash val="solid"/>
+          </a:ln>
+        </p:spPr>
+      </p:sp>
+      <p:sp>
+        <p:nvSpPr>
+          <p:cNvPr id="56" name="Text 54"/>
+          <p:cNvSpPr/>
+          <p:nvPr/>
+        </p:nvSpPr>
+        <p:spPr>
+          <a:xfrm>
+            <a:off x="6870192" y="4169664"/>
+            <a:ext cx="685800" cy="384048"/>
+          </a:xfrm>
+          <a:prstGeom prst="rect">
+            <a:avLst/>
+          </a:prstGeom>
+          <a:noFill/>
+          <a:ln/>
+        </p:spPr>
+        <p:txBody>
+          <a:bodyPr wrap="square" lIns="0" tIns="0" rIns="0" bIns="0" rtlCol="0" anchor="ctr"/>
+          <a:lstStyle/>
+          <a:p>
+            <a:pPr algn="ctr" indent="0" marL="0">
+              <a:buNone/>
+            </a:pPr>
+            <a:r>
+              <a:rPr lang="en-US" sz="900" b="1" dirty="0">
+                <a:solidFill>
+                  <a:srgbClr val="9D174D"/>
+                </a:solidFill>
+                <a:latin typeface="Trebuchet MS" pitchFamily="34" charset="0"/>
+                <a:ea typeface="Trebuchet MS" pitchFamily="34" charset="-122"/>
+                <a:cs typeface="Trebuchet MS" pitchFamily="34" charset="-120"/>
+              </a:rPr>
+              <a:t>d</a:t>
+            </a:r>
+            <a:endParaRPr lang="en-US" sz="900" dirty="0"/>
+          </a:p>
+        </p:txBody>
+      </p:sp>
+      <p:sp>
+        <p:nvSpPr>
+          <p:cNvPr id="57" name="Shape 55"/>
+          <p:cNvSpPr/>
+          <p:nvPr/>
+        </p:nvSpPr>
+        <p:spPr>
+          <a:xfrm>
+            <a:off x="7677912" y="4169664"/>
+            <a:ext cx="685800" cy="384048"/>
+          </a:xfrm>
+          <a:prstGeom prst="rect">
+            <a:avLst>
+              <a:gd name="adj" fmla="val 9524"/>
+            </a:avLst>
+          </a:prstGeom>
+          <a:solidFill>
+            <a:srgbClr val="FFFFFF"/>
+          </a:solidFill>
+          <a:ln w="12700">
+            <a:solidFill>
+              <a:srgbClr val="DB2777"/>
+            </a:solidFill>
+            <a:prstDash val="solid"/>
+          </a:ln>
+        </p:spPr>
+      </p:sp>
+      <p:sp>
+        <p:nvSpPr>
+          <p:cNvPr id="58" name="Text 56"/>
+          <p:cNvSpPr/>
+          <p:nvPr/>
+        </p:nvSpPr>
+        <p:spPr>
+          <a:xfrm>
+            <a:off x="7677912" y="4169664"/>
+            <a:ext cx="685800" cy="384048"/>
+          </a:xfrm>
+          <a:prstGeom prst="rect">
+            <a:avLst/>
+          </a:prstGeom>
+          <a:noFill/>
+          <a:ln/>
+        </p:spPr>
+        <p:txBody>
+          <a:bodyPr wrap="square" lIns="0" tIns="0" rIns="0" bIns="0" rtlCol="0" anchor="ctr"/>
+          <a:lstStyle/>
+          <a:p>
+            <a:pPr algn="ctr" indent="0" marL="0">
+              <a:buNone/>
+            </a:pPr>
+            <a:r>
+              <a:rPr lang="en-US" sz="900" b="1" dirty="0">
+                <a:solidFill>
+                  <a:srgbClr val="9D174D"/>
+                </a:solidFill>
+                <a:latin typeface="Trebuchet MS" pitchFamily="34" charset="0"/>
+                <a:ea typeface="Trebuchet MS" pitchFamily="34" charset="-122"/>
+                <a:cs typeface="Trebuchet MS" pitchFamily="34" charset="-120"/>
+              </a:rPr>
+              <a:t>ed</a:t>
+            </a:r>
+            <a:endParaRPr lang="en-US" sz="900" dirty="0"/>
+          </a:p>
+        </p:txBody>
+      </p:sp>
+      <p:sp>
+        <p:nvSpPr>
+          <p:cNvPr id="59" name="Text 57"/>
+          <p:cNvSpPr/>
+          <p:nvPr/>
+        </p:nvSpPr>
+        <p:spPr>
+          <a:xfrm>
+            <a:off x="7677912" y="4572000"/>
             <a:ext cx="685800" cy="219456"/>
           </a:xfrm>
           <a:prstGeom prst="rect">
@@ -16278,180 +16944,9 @@
                 <a:ea typeface="Calibri" pitchFamily="34" charset="-122"/>
                 <a:cs typeface="Calibri" pitchFamily="34" charset="-120"/>
               </a:rPr>
-              <a:t>/zh/</a:t>
+              <a:t>/id/</a:t>
             </a:r>
             <a:endParaRPr lang="en-US" sz="750" dirty="0"/>
-          </a:p>
-        </p:txBody>
-      </p:sp>
-      <p:sp>
-        <p:nvSpPr>
-          <p:cNvPr id="49" name="Shape 47"/>
-          <p:cNvSpPr/>
-          <p:nvPr/>
-        </p:nvSpPr>
-        <p:spPr>
-          <a:xfrm>
-            <a:off x="6668262" y="4169664"/>
-            <a:ext cx="685800" cy="384048"/>
-          </a:xfrm>
-          <a:prstGeom prst="rect">
-            <a:avLst>
-              <a:gd name="adj" fmla="val 9524"/>
-            </a:avLst>
-          </a:prstGeom>
-          <a:solidFill>
-            <a:srgbClr val="FFFFFF"/>
-          </a:solidFill>
-          <a:ln w="12700">
-            <a:solidFill>
-              <a:srgbClr val="DB2777"/>
-            </a:solidFill>
-            <a:prstDash val="solid"/>
-          </a:ln>
-        </p:spPr>
-      </p:sp>
-      <p:sp>
-        <p:nvSpPr>
-          <p:cNvPr id="50" name="Text 48"/>
-          <p:cNvSpPr/>
-          <p:nvPr/>
-        </p:nvSpPr>
-        <p:spPr>
-          <a:xfrm>
-            <a:off x="6668262" y="4169664"/>
-            <a:ext cx="685800" cy="384048"/>
-          </a:xfrm>
-          <a:prstGeom prst="rect">
-            <a:avLst/>
-          </a:prstGeom>
-          <a:noFill/>
-          <a:ln/>
-        </p:spPr>
-        <p:txBody>
-          <a:bodyPr wrap="square" lIns="0" tIns="0" rIns="0" bIns="0" rtlCol="0" anchor="ctr"/>
-          <a:lstStyle/>
-          <a:p>
-            <a:pPr algn="ctr" indent="0" marL="0">
-              <a:buNone/>
-            </a:pPr>
-            <a:r>
-              <a:rPr lang="en-US" sz="900" b="1" dirty="0">
-                <a:solidFill>
-                  <a:srgbClr val="9D174D"/>
-                </a:solidFill>
-                <a:latin typeface="Trebuchet MS" pitchFamily="34" charset="0"/>
-                <a:ea typeface="Trebuchet MS" pitchFamily="34" charset="-122"/>
-                <a:cs typeface="Trebuchet MS" pitchFamily="34" charset="-120"/>
-              </a:rPr>
-              <a:t>io</a:t>
-            </a:r>
-            <a:endParaRPr lang="en-US" sz="900" dirty="0"/>
-          </a:p>
-        </p:txBody>
-      </p:sp>
-      <p:sp>
-        <p:nvSpPr>
-          <p:cNvPr id="51" name="Text 49"/>
-          <p:cNvSpPr/>
-          <p:nvPr/>
-        </p:nvSpPr>
-        <p:spPr>
-          <a:xfrm>
-            <a:off x="6668262" y="4572000"/>
-            <a:ext cx="685800" cy="219456"/>
-          </a:xfrm>
-          <a:prstGeom prst="rect">
-            <a:avLst/>
-          </a:prstGeom>
-          <a:noFill/>
-          <a:ln/>
-        </p:spPr>
-        <p:txBody>
-          <a:bodyPr wrap="square" lIns="0" tIns="0" rIns="0" bIns="0" rtlCol="0" anchor="t"/>
-          <a:lstStyle/>
-          <a:p>
-            <a:pPr algn="ctr" indent="0" marL="0">
-              <a:buNone/>
-            </a:pPr>
-            <a:r>
-              <a:rPr lang="en-US" sz="750" i="1" dirty="0">
-                <a:solidFill>
-                  <a:srgbClr val="94A3B8"/>
-                </a:solidFill>
-                <a:latin typeface="Calibri" pitchFamily="34" charset="0"/>
-                <a:ea typeface="Calibri" pitchFamily="34" charset="-122"/>
-                <a:cs typeface="Calibri" pitchFamily="34" charset="-120"/>
-              </a:rPr>
-              <a:t>/u/</a:t>
-            </a:r>
-            <a:endParaRPr lang="en-US" sz="750" dirty="0"/>
-          </a:p>
-        </p:txBody>
-      </p:sp>
-      <p:sp>
-        <p:nvSpPr>
-          <p:cNvPr id="52" name="Shape 50"/>
-          <p:cNvSpPr/>
-          <p:nvPr/>
-        </p:nvSpPr>
-        <p:spPr>
-          <a:xfrm>
-            <a:off x="7576947" y="4169664"/>
-            <a:ext cx="685800" cy="384048"/>
-          </a:xfrm>
-          <a:prstGeom prst="rect">
-            <a:avLst>
-              <a:gd name="adj" fmla="val 9524"/>
-            </a:avLst>
-          </a:prstGeom>
-          <a:solidFill>
-            <a:srgbClr val="FFFFFF"/>
-          </a:solidFill>
-          <a:ln w="12700">
-            <a:solidFill>
-              <a:srgbClr val="DB2777"/>
-            </a:solidFill>
-            <a:prstDash val="solid"/>
-          </a:ln>
-        </p:spPr>
-      </p:sp>
-      <p:sp>
-        <p:nvSpPr>
-          <p:cNvPr id="53" name="Text 51"/>
-          <p:cNvSpPr/>
-          <p:nvPr/>
-        </p:nvSpPr>
-        <p:spPr>
-          <a:xfrm>
-            <a:off x="7576947" y="4169664"/>
-            <a:ext cx="685800" cy="384048"/>
-          </a:xfrm>
-          <a:prstGeom prst="rect">
-            <a:avLst/>
-          </a:prstGeom>
-          <a:noFill/>
-          <a:ln/>
-        </p:spPr>
-        <p:txBody>
-          <a:bodyPr wrap="square" lIns="0" tIns="0" rIns="0" bIns="0" rtlCol="0" anchor="ctr"/>
-          <a:lstStyle/>
-          <a:p>
-            <a:pPr algn="ctr" indent="0" marL="0">
-              <a:buNone/>
-            </a:pPr>
-            <a:r>
-              <a:rPr lang="en-US" sz="900" b="1" dirty="0">
-                <a:solidFill>
-                  <a:srgbClr val="9D174D"/>
-                </a:solidFill>
-                <a:latin typeface="Trebuchet MS" pitchFamily="34" charset="0"/>
-                <a:ea typeface="Trebuchet MS" pitchFamily="34" charset="-122"/>
-                <a:cs typeface="Trebuchet MS" pitchFamily="34" charset="-120"/>
-              </a:rPr>
-              <a:t>n</a:t>
-            </a:r>
-            <a:endParaRPr lang="en-US" sz="900" dirty="0"/>
           </a:p>
         </p:txBody>
       </p:sp>
@@ -17023,7 +17518,7 @@
                 <a:ea typeface="Calibri" pitchFamily="34" charset="-122"/>
                 <a:cs typeface="Calibri" pitchFamily="34" charset="-120"/>
               </a:rPr>
-              <a:t>Word Labs  •  wordlabs.app  •  Root: 'persuade' = to urge or convince someone</a:t>
+              <a:t>Word Labs  •  wordlabs.app  •  Root: 'persuade' = to convince or urge someone</a:t>
             </a:r>
             <a:endParaRPr lang="en-US" sz="800" dirty="0"/>
           </a:p>
@@ -17663,7 +18158,7 @@
                 <a:ea typeface="Calibri" pitchFamily="34" charset="-122"/>
                 <a:cs typeface="Calibri" pitchFamily="34" charset="-120"/>
               </a:rPr>
-              <a:t>Word Labs  •  wordlabs.app  •  Root: 'persuade' = to urge or convince someone</a:t>
+              <a:t>Word Labs  •  wordlabs.app  •  Root: 'persuade' = to convince or urge someone</a:t>
             </a:r>
             <a:endParaRPr lang="en-US" sz="800" dirty="0"/>
           </a:p>
@@ -17806,7 +18301,7 @@
                 <a:ea typeface="Calibri" pitchFamily="34" charset="-122"/>
                 <a:cs typeface="Calibri" pitchFamily="34" charset="-120"/>
               </a:rPr>
-              <a:t> spoke </a:t>
+              <a:t> spoke so </a:t>
             </a:r>
             <a:pPr algn="l" indent="0" marL="0">
               <a:buNone/>
@@ -17837,7 +18332,7 @@
                 <a:ea typeface="Calibri" pitchFamily="34" charset="-122"/>
                 <a:cs typeface="Calibri" pitchFamily="34" charset="-120"/>
               </a:rPr>
-              <a:t>, but Sam remained </a:t>
+              <a:t> that everyone listened, but true </a:t>
             </a:r>
             <a:pPr algn="l" indent="0" marL="0">
               <a:buNone/>
@@ -17854,7 +18349,7 @@
                 <a:ea typeface="Calibri" pitchFamily="34" charset="-122"/>
                 <a:cs typeface="Calibri" pitchFamily="34" charset="-120"/>
               </a:rPr>
-              <a:t>unpersuaded</a:t>
+              <a:t>persuasion</a:t>
             </a:r>
             <a:pPr algn="l" indent="0" marL="0">
               <a:buNone/>
@@ -17868,7 +18363,7 @@
                 <a:ea typeface="Calibri" pitchFamily="34" charset="-122"/>
                 <a:cs typeface="Calibri" pitchFamily="34" charset="-120"/>
               </a:rPr>
-              <a:t> and refused to change his mind.</a:t>
+              <a:t> takes time and patience.</a:t>
             </a:r>
             <a:endParaRPr lang="en-US" sz="1800" dirty="0"/>
           </a:p>
@@ -18279,7 +18774,7 @@
                 <a:ea typeface="Trebuchet MS" pitchFamily="34" charset="-122"/>
                 <a:cs typeface="Trebuchet MS" pitchFamily="34" charset="-120"/>
               </a:rPr>
-              <a:t>unpersuaded</a:t>
+              <a:t>persuasion</a:t>
             </a:r>
             <a:endParaRPr lang="en-US" sz="1400" dirty="0"/>
           </a:p>
@@ -18610,7 +19105,7 @@
                 <a:ea typeface="Calibri" pitchFamily="34" charset="-122"/>
                 <a:cs typeface="Calibri" pitchFamily="34" charset="-120"/>
               </a:rPr>
-              <a:t>Word Labs  •  wordlabs.app  •  Root: 'persuade' = to urge or convince someone</a:t>
+              <a:t>Word Labs  •  wordlabs.app  •  Root: 'persuade' = to convince or urge someone</a:t>
             </a:r>
             <a:endParaRPr lang="en-US" sz="800" dirty="0"/>
           </a:p>
@@ -19437,7 +19932,7 @@
                 <a:ea typeface="Calibri" pitchFamily="34" charset="-122"/>
                 <a:cs typeface="Calibri" pitchFamily="34" charset="-120"/>
               </a:rPr>
-              <a:t>Word Labs  •  wordlabs.app  •  Root: 'persuade' = to urge or convince someone</a:t>
+              <a:t>Word Labs  •  wordlabs.app  •  Root: 'persuade' = to convince or urge someone</a:t>
             </a:r>
             <a:endParaRPr lang="en-US" sz="800" dirty="0"/>
           </a:p>
@@ -19754,7 +20249,7 @@
                 <a:ea typeface="Calibri" pitchFamily="34" charset="-122"/>
                 <a:cs typeface="Calibri" pitchFamily="34" charset="-120"/>
               </a:rPr>
-              <a:t>to urge or convince</a:t>
+              <a:t>to convince or urge</a:t>
             </a:r>
             <a:endParaRPr lang="en-US" sz="850" dirty="0"/>
           </a:p>
@@ -19905,7 +20400,7 @@
                 <a:ea typeface="Calibri" pitchFamily="34" charset="-122"/>
                 <a:cs typeface="Calibri" pitchFamily="34" charset="-120"/>
               </a:rPr>
-              <a:t>one who does</a:t>
+              <a:t>a person who does something</a:t>
             </a:r>
             <a:endParaRPr lang="en-US" sz="850" dirty="0"/>
           </a:p>
@@ -20461,7 +20956,7 @@
                 <a:ea typeface="Calibri" pitchFamily="34" charset="-122"/>
                 <a:cs typeface="Calibri" pitchFamily="34" charset="-120"/>
               </a:rPr>
-              <a:t>Word Labs  •  wordlabs.app  •  Root: 'persuade' = to urge or convince someone</a:t>
+              <a:t>Word Labs  •  wordlabs.app  •  Root: 'persuade' = to convince or urge someone</a:t>
             </a:r>
             <a:endParaRPr lang="en-US" sz="800" dirty="0"/>
           </a:p>
@@ -20778,7 +21273,7 @@
                 <a:ea typeface="Calibri" pitchFamily="34" charset="-122"/>
                 <a:cs typeface="Calibri" pitchFamily="34" charset="-120"/>
               </a:rPr>
-              <a:t>to urge or convince</a:t>
+              <a:t>to convince or urge</a:t>
             </a:r>
             <a:endParaRPr lang="en-US" sz="850" dirty="0"/>
           </a:p>
@@ -20929,7 +21424,7 @@
                 <a:ea typeface="Calibri" pitchFamily="34" charset="-122"/>
                 <a:cs typeface="Calibri" pitchFamily="34" charset="-120"/>
               </a:rPr>
-              <a:t>one who does</a:t>
+              <a:t>a person who does something</a:t>
             </a:r>
             <a:endParaRPr lang="en-US" sz="850" dirty="0"/>
           </a:p>
@@ -21722,7 +22217,7 @@
                 <a:ea typeface="Calibri" pitchFamily="34" charset="-122"/>
                 <a:cs typeface="Calibri" pitchFamily="34" charset="-120"/>
               </a:rPr>
-              <a:t>Word Labs  •  wordlabs.app  •  Root: 'persuade' = to urge or convince someone</a:t>
+              <a:t>Word Labs  •  wordlabs.app  •  Root: 'persuade' = to convince or urge someone</a:t>
             </a:r>
             <a:endParaRPr lang="en-US" sz="800" dirty="0"/>
           </a:p>
@@ -22039,7 +22534,7 @@
                 <a:ea typeface="Calibri" pitchFamily="34" charset="-122"/>
                 <a:cs typeface="Calibri" pitchFamily="34" charset="-120"/>
               </a:rPr>
-              <a:t>to urge or convince</a:t>
+              <a:t>to convince or urge</a:t>
             </a:r>
             <a:endParaRPr lang="en-US" sz="850" dirty="0"/>
           </a:p>
@@ -22190,7 +22685,7 @@
                 <a:ea typeface="Calibri" pitchFamily="34" charset="-122"/>
                 <a:cs typeface="Calibri" pitchFamily="34" charset="-120"/>
               </a:rPr>
-              <a:t>one who does</a:t>
+              <a:t>a person who does something</a:t>
             </a:r>
             <a:endParaRPr lang="en-US" sz="850" dirty="0"/>
           </a:p>
@@ -23340,7 +23835,7 @@
                 <a:ea typeface="Calibri" pitchFamily="34" charset="-122"/>
                 <a:cs typeface="Calibri" pitchFamily="34" charset="-120"/>
               </a:rPr>
-              <a:t>Word Labs  •  wordlabs.app  •  Root: 'persuade' = to urge or convince someone</a:t>
+              <a:t>Word Labs  •  wordlabs.app  •  Root: 'persuade' = to convince or urge someone</a:t>
             </a:r>
             <a:endParaRPr lang="en-US" sz="800" dirty="0"/>
           </a:p>
@@ -24167,7 +24662,7 @@
                 <a:ea typeface="Calibri" pitchFamily="34" charset="-122"/>
                 <a:cs typeface="Calibri" pitchFamily="34" charset="-120"/>
               </a:rPr>
-              <a:t>Word Labs  •  wordlabs.app  •  Root: 'persuade' = to urge or convince someone</a:t>
+              <a:t>Word Labs  •  wordlabs.app  •  Root: 'persuade' = to convince or urge someone</a:t>
             </a:r>
             <a:endParaRPr lang="en-US" sz="800" dirty="0"/>
           </a:p>
@@ -24484,7 +24979,7 @@
                 <a:ea typeface="Calibri" pitchFamily="34" charset="-122"/>
                 <a:cs typeface="Calibri" pitchFamily="34" charset="-120"/>
               </a:rPr>
-              <a:t>to urge or convince</a:t>
+              <a:t>to convince or urge</a:t>
             </a:r>
             <a:endParaRPr lang="en-US" sz="850" dirty="0"/>
           </a:p>
@@ -24523,7 +25018,7 @@
                 <a:ea typeface="Calibri" pitchFamily="34" charset="-122"/>
                 <a:cs typeface="Calibri" pitchFamily="34" charset="-120"/>
               </a:rPr>
-              <a:t>'suade' becomes 'suas' before suffix</a:t>
+              <a:t>'suade' becomes 'suas' before vowel suffix</a:t>
             </a:r>
             <a:endParaRPr lang="en-US" sz="700" dirty="0"/>
           </a:p>
@@ -25303,7 +25798,7 @@
                 <a:ea typeface="Calibri" pitchFamily="34" charset="-122"/>
                 <a:cs typeface="Calibri" pitchFamily="34" charset="-120"/>
               </a:rPr>
-              <a:t>Word Labs  •  wordlabs.app  •  Root: 'persuade' = to urge or convince someone</a:t>
+              <a:t>Word Labs  •  wordlabs.app  •  Root: 'persuade' = to convince or urge someone</a:t>
             </a:r>
             <a:endParaRPr lang="en-US" sz="800" dirty="0"/>
           </a:p>
@@ -25376,7 +25871,7 @@
                 <a:ea typeface="Trebuchet MS" pitchFamily="34" charset="-122"/>
                 <a:cs typeface="Trebuchet MS" pitchFamily="34" charset="-120"/>
               </a:rPr>
-              <a:t>We are learning that the root 'persuade' means 'to urge or convince someone'.</a:t>
+              <a:t>We are learning that the root 'persuade' means 'to convince or urge someone'.</a:t>
             </a:r>
             <a:endParaRPr lang="en-US" sz="2000" dirty="0"/>
           </a:p>
@@ -26022,7 +26517,7 @@
                 <a:ea typeface="Calibri" pitchFamily="34" charset="-122"/>
                 <a:cs typeface="Calibri" pitchFamily="34" charset="-120"/>
               </a:rPr>
-              <a:t>Word Labs  •  wordlabs.app  •  Root: 'persuade' = to urge or convince someone</a:t>
+              <a:t>Word Labs  •  wordlabs.app  •  Root: 'persuade' = to convince or urge someone</a:t>
             </a:r>
             <a:endParaRPr lang="en-US" sz="800" dirty="0"/>
           </a:p>
@@ -26339,7 +26834,7 @@
                 <a:ea typeface="Calibri" pitchFamily="34" charset="-122"/>
                 <a:cs typeface="Calibri" pitchFamily="34" charset="-120"/>
               </a:rPr>
-              <a:t>to urge or convince</a:t>
+              <a:t>to convince or urge</a:t>
             </a:r>
             <a:endParaRPr lang="en-US" sz="850" dirty="0"/>
           </a:p>
@@ -26378,7 +26873,7 @@
                 <a:ea typeface="Calibri" pitchFamily="34" charset="-122"/>
                 <a:cs typeface="Calibri" pitchFamily="34" charset="-120"/>
               </a:rPr>
-              <a:t>'suade' becomes 'suas' before suffix</a:t>
+              <a:t>'suade' becomes 'suas' before vowel suffix</a:t>
             </a:r>
             <a:endParaRPr lang="en-US" sz="700" dirty="0"/>
           </a:p>
@@ -27500,7 +27995,7 @@
                 <a:ea typeface="Calibri" pitchFamily="34" charset="-122"/>
                 <a:cs typeface="Calibri" pitchFamily="34" charset="-120"/>
               </a:rPr>
-              <a:t>Word Labs  •  wordlabs.app  •  Root: 'persuade' = to urge or convince someone</a:t>
+              <a:t>Word Labs  •  wordlabs.app  •  Root: 'persuade' = to convince or urge someone</a:t>
             </a:r>
             <a:endParaRPr lang="en-US" sz="800" dirty="0"/>
           </a:p>
@@ -27817,7 +28312,7 @@
                 <a:ea typeface="Calibri" pitchFamily="34" charset="-122"/>
                 <a:cs typeface="Calibri" pitchFamily="34" charset="-120"/>
               </a:rPr>
-              <a:t>to urge or convince</a:t>
+              <a:t>to convince or urge</a:t>
             </a:r>
             <a:endParaRPr lang="en-US" sz="850" dirty="0"/>
           </a:p>
@@ -27856,7 +28351,7 @@
                 <a:ea typeface="Calibri" pitchFamily="34" charset="-122"/>
                 <a:cs typeface="Calibri" pitchFamily="34" charset="-120"/>
               </a:rPr>
-              <a:t>'suade' becomes 'suas' before suffix</a:t>
+              <a:t>'suade' becomes 'suas' before vowel suffix</a:t>
             </a:r>
             <a:endParaRPr lang="en-US" sz="700" dirty="0"/>
           </a:p>
@@ -29090,7 +29585,46 @@
       </p:sp>
       <p:sp>
         <p:nvSpPr>
-          <p:cNvPr id="56" name="Shape 54"/>
+          <p:cNvPr id="56" name="Text 54"/>
+          <p:cNvSpPr/>
+          <p:nvPr/>
+        </p:nvSpPr>
+        <p:spPr>
+          <a:xfrm>
+            <a:off x="6062472" y="4572000"/>
+            <a:ext cx="685800" cy="219456"/>
+          </a:xfrm>
+          <a:prstGeom prst="rect">
+            <a:avLst/>
+          </a:prstGeom>
+          <a:noFill/>
+          <a:ln/>
+        </p:spPr>
+        <p:txBody>
+          <a:bodyPr wrap="square" lIns="0" tIns="0" rIns="0" bIns="0" rtlCol="0" anchor="t"/>
+          <a:lstStyle/>
+          <a:p>
+            <a:pPr algn="ctr" indent="0" marL="0">
+              <a:buNone/>
+            </a:pPr>
+            <a:r>
+              <a:rPr lang="en-US" sz="750" i="1" dirty="0">
+                <a:solidFill>
+                  <a:srgbClr val="94A3B8"/>
+                </a:solidFill>
+                <a:latin typeface="Calibri" pitchFamily="34" charset="0"/>
+                <a:ea typeface="Calibri" pitchFamily="34" charset="-122"/>
+                <a:cs typeface="Calibri" pitchFamily="34" charset="-120"/>
+              </a:rPr>
+              <a:t>/iv/</a:t>
+            </a:r>
+            <a:endParaRPr lang="en-US" sz="750" dirty="0"/>
+          </a:p>
+        </p:txBody>
+      </p:sp>
+      <p:sp>
+        <p:nvSpPr>
+          <p:cNvPr id="57" name="Shape 55"/>
           <p:cNvSpPr/>
           <p:nvPr/>
         </p:nvSpPr>
@@ -29117,7 +29651,7 @@
       </p:sp>
       <p:sp>
         <p:nvSpPr>
-          <p:cNvPr id="57" name="Text 55"/>
+          <p:cNvPr id="58" name="Text 56"/>
           <p:cNvSpPr/>
           <p:nvPr/>
         </p:nvSpPr>
@@ -29156,7 +29690,7 @@
       </p:sp>
       <p:sp>
         <p:nvSpPr>
-          <p:cNvPr id="58" name="Shape 56"/>
+          <p:cNvPr id="59" name="Shape 57"/>
           <p:cNvSpPr/>
           <p:nvPr/>
         </p:nvSpPr>
@@ -29183,7 +29717,7 @@
       </p:sp>
       <p:sp>
         <p:nvSpPr>
-          <p:cNvPr id="59" name="Text 57"/>
+          <p:cNvPr id="60" name="Text 58"/>
           <p:cNvSpPr/>
           <p:nvPr/>
         </p:nvSpPr>
@@ -29506,7 +30040,7 @@
                 <a:ea typeface="Calibri" pitchFamily="34" charset="-122"/>
                 <a:cs typeface="Calibri" pitchFamily="34" charset="-120"/>
               </a:rPr>
-              <a:t>Word Labs  •  wordlabs.app  •  Root: 'persuade' = to urge or convince someone</a:t>
+              <a:t>Word Labs  •  wordlabs.app  •  Root: 'persuade' = to convince or urge someone</a:t>
             </a:r>
             <a:endParaRPr lang="en-US" sz="800" dirty="0"/>
           </a:p>
@@ -29645,7 +30179,7 @@
                 <a:ea typeface="Trebuchet MS" pitchFamily="34" charset="-122"/>
                 <a:cs typeface="Trebuchet MS" pitchFamily="34" charset="-120"/>
               </a:rPr>
-              <a:t>unpersuaded</a:t>
+              <a:t>persuasion</a:t>
             </a:r>
             <a:endParaRPr lang="en-US" sz="2800" dirty="0"/>
           </a:p>
@@ -30333,7 +30867,7 @@
                 <a:ea typeface="Calibri" pitchFamily="34" charset="-122"/>
                 <a:cs typeface="Calibri" pitchFamily="34" charset="-120"/>
               </a:rPr>
-              <a:t>Word Labs  •  wordlabs.app  •  Root: 'persuade' = to urge or convince someone</a:t>
+              <a:t>Word Labs  •  wordlabs.app  •  Root: 'persuade' = to convince or urge someone</a:t>
             </a:r>
             <a:endParaRPr lang="en-US" sz="800" dirty="0"/>
           </a:p>
@@ -30472,7 +31006,7 @@
                 <a:ea typeface="Trebuchet MS" pitchFamily="34" charset="-122"/>
                 <a:cs typeface="Trebuchet MS" pitchFamily="34" charset="-120"/>
               </a:rPr>
-              <a:t>unpersuaded</a:t>
+              <a:t>persuasion</a:t>
             </a:r>
             <a:endParaRPr lang="en-US" sz="2800" dirty="0"/>
           </a:p>
@@ -30552,7 +31086,7 @@
         </p:nvSpPr>
         <p:spPr>
           <a:xfrm>
-            <a:off x="2221992" y="2258568"/>
+            <a:off x="2938272" y="2258568"/>
             <a:ext cx="1828800" cy="292608"/>
           </a:xfrm>
           <a:prstGeom prst="rect">
@@ -30561,11 +31095,11 @@
             </a:avLst>
           </a:prstGeom>
           <a:solidFill>
-            <a:srgbClr val="DDD6FE"/>
+            <a:srgbClr val="CCFBF1"/>
           </a:solidFill>
           <a:ln w="19050">
             <a:solidFill>
-              <a:srgbClr val="7C3AED"/>
+              <a:srgbClr val="0D9488"/>
             </a:solidFill>
             <a:prstDash val="solid"/>
           </a:ln>
@@ -30586,7 +31120,7 @@
         </p:nvSpPr>
         <p:spPr>
           <a:xfrm>
-            <a:off x="2221992" y="2258568"/>
+            <a:off x="2938272" y="2258568"/>
             <a:ext cx="1828800" cy="292608"/>
           </a:xfrm>
           <a:prstGeom prst="rect">
@@ -30605,13 +31139,13 @@
             <a:r>
               <a:rPr lang="en-US" sz="1300" b="1" dirty="0">
                 <a:solidFill>
-                  <a:srgbClr val="4C1D95"/>
+                  <a:srgbClr val="0F766E"/>
                 </a:solidFill>
                 <a:latin typeface="Trebuchet MS" pitchFamily="34" charset="0"/>
                 <a:ea typeface="Trebuchet MS" pitchFamily="34" charset="-122"/>
                 <a:cs typeface="Trebuchet MS" pitchFamily="34" charset="-120"/>
               </a:rPr>
-              <a:t>un</a:t>
+              <a:t>persuade</a:t>
             </a:r>
             <a:endParaRPr lang="en-US" sz="1300" dirty="0"/>
           </a:p>
@@ -30625,7 +31159,7 @@
         </p:nvSpPr>
         <p:spPr>
           <a:xfrm>
-            <a:off x="2221992" y="2569464"/>
+            <a:off x="2938272" y="2569464"/>
             <a:ext cx="1828800" cy="201168"/>
           </a:xfrm>
           <a:prstGeom prst="rect">
@@ -30650,7 +31184,7 @@
                 <a:ea typeface="Calibri" pitchFamily="34" charset="-122"/>
                 <a:cs typeface="Calibri" pitchFamily="34" charset="-120"/>
               </a:rPr>
-              <a:t>not</a:t>
+              <a:t>to convince or urge</a:t>
             </a:r>
             <a:endParaRPr lang="en-US" sz="850" dirty="0"/>
           </a:p>
@@ -30658,13 +31192,52 @@
       </p:sp>
       <p:sp>
         <p:nvSpPr>
-          <p:cNvPr id="19" name="Shape 17"/>
-          <p:cNvSpPr/>
-          <p:nvPr/>
-        </p:nvSpPr>
-        <p:spPr>
-          <a:xfrm>
-            <a:off x="4370832" y="2258568"/>
+          <p:cNvPr id="19" name="Text 17"/>
+          <p:cNvSpPr/>
+          <p:nvPr/>
+        </p:nvSpPr>
+        <p:spPr>
+          <a:xfrm>
+            <a:off x="2938272" y="2752344"/>
+            <a:ext cx="1828800" cy="182880"/>
+          </a:xfrm>
+          <a:prstGeom prst="rect">
+            <a:avLst/>
+          </a:prstGeom>
+          <a:noFill/>
+          <a:ln/>
+        </p:spPr>
+        <p:txBody>
+          <a:bodyPr wrap="square" lIns="0" tIns="0" rIns="0" bIns="0" rtlCol="0" anchor="t"/>
+          <a:lstStyle/>
+          <a:p>
+            <a:pPr algn="ctr" indent="0" marL="0">
+              <a:buNone/>
+            </a:pPr>
+            <a:r>
+              <a:rPr lang="en-US" sz="700" i="1" dirty="0">
+                <a:solidFill>
+                  <a:srgbClr val="94A3B8"/>
+                </a:solidFill>
+                <a:latin typeface="Calibri" pitchFamily="34" charset="0"/>
+                <a:ea typeface="Calibri" pitchFamily="34" charset="-122"/>
+                <a:cs typeface="Calibri" pitchFamily="34" charset="-120"/>
+              </a:rPr>
+              <a:t>'suade' becomes 'suas' before suffix</a:t>
+            </a:r>
+            <a:endParaRPr lang="en-US" sz="700" dirty="0"/>
+          </a:p>
+        </p:txBody>
+      </p:sp>
+      <p:sp>
+        <p:nvSpPr>
+          <p:cNvPr id="20" name="Shape 18"/>
+          <p:cNvSpPr/>
+          <p:nvPr/>
+        </p:nvSpPr>
+        <p:spPr>
+          <a:xfrm>
+            <a:off x="5803392" y="2258568"/>
             <a:ext cx="1828800" cy="292608"/>
           </a:xfrm>
           <a:prstGeom prst="rect">
@@ -30673,11 +31246,11 @@
             </a:avLst>
           </a:prstGeom>
           <a:solidFill>
-            <a:srgbClr val="CCFBF1"/>
+            <a:srgbClr val="FCE7F3"/>
           </a:solidFill>
           <a:ln w="19050">
             <a:solidFill>
-              <a:srgbClr val="0D9488"/>
+              <a:srgbClr val="DB2777"/>
             </a:solidFill>
             <a:prstDash val="solid"/>
           </a:ln>
@@ -30692,13 +31265,13 @@
       </p:sp>
       <p:sp>
         <p:nvSpPr>
-          <p:cNvPr id="20" name="Text 18"/>
-          <p:cNvSpPr/>
-          <p:nvPr/>
-        </p:nvSpPr>
-        <p:spPr>
-          <a:xfrm>
-            <a:off x="4370832" y="2258568"/>
+          <p:cNvPr id="21" name="Text 19"/>
+          <p:cNvSpPr/>
+          <p:nvPr/>
+        </p:nvSpPr>
+        <p:spPr>
+          <a:xfrm>
+            <a:off x="5803392" y="2258568"/>
             <a:ext cx="1828800" cy="292608"/>
           </a:xfrm>
           <a:prstGeom prst="rect">
@@ -30717,13 +31290,13 @@
             <a:r>
               <a:rPr lang="en-US" sz="1300" b="1" dirty="0">
                 <a:solidFill>
-                  <a:srgbClr val="0F766E"/>
+                  <a:srgbClr val="9D174D"/>
                 </a:solidFill>
                 <a:latin typeface="Trebuchet MS" pitchFamily="34" charset="0"/>
                 <a:ea typeface="Trebuchet MS" pitchFamily="34" charset="-122"/>
                 <a:cs typeface="Trebuchet MS" pitchFamily="34" charset="-120"/>
               </a:rPr>
-              <a:t>persuade</a:t>
+              <a:t>ion</a:t>
             </a:r>
             <a:endParaRPr lang="en-US" sz="1300" dirty="0"/>
           </a:p>
@@ -30731,13 +31304,13 @@
       </p:sp>
       <p:sp>
         <p:nvSpPr>
-          <p:cNvPr id="21" name="Text 19"/>
-          <p:cNvSpPr/>
-          <p:nvPr/>
-        </p:nvSpPr>
-        <p:spPr>
-          <a:xfrm>
-            <a:off x="4370832" y="2569464"/>
+          <p:cNvPr id="22" name="Text 20"/>
+          <p:cNvSpPr/>
+          <p:nvPr/>
+        </p:nvSpPr>
+        <p:spPr>
+          <a:xfrm>
+            <a:off x="5803392" y="2569464"/>
             <a:ext cx="1828800" cy="201168"/>
           </a:xfrm>
           <a:prstGeom prst="rect">
@@ -30762,7 +31335,7 @@
                 <a:ea typeface="Calibri" pitchFamily="34" charset="-122"/>
                 <a:cs typeface="Calibri" pitchFamily="34" charset="-120"/>
               </a:rPr>
-              <a:t>to urge or convince</a:t>
+              <a:t>the act or result of</a:t>
             </a:r>
             <a:endParaRPr lang="en-US" sz="850" dirty="0"/>
           </a:p>
@@ -30770,13 +31343,13 @@
       </p:sp>
       <p:sp>
         <p:nvSpPr>
-          <p:cNvPr id="22" name="Text 20"/>
-          <p:cNvSpPr/>
-          <p:nvPr/>
-        </p:nvSpPr>
-        <p:spPr>
-          <a:xfrm>
-            <a:off x="4370832" y="2752344"/>
+          <p:cNvPr id="23" name="Text 21"/>
+          <p:cNvSpPr/>
+          <p:nvPr/>
+        </p:nvSpPr>
+        <p:spPr>
+          <a:xfrm>
+            <a:off x="5803392" y="2752344"/>
             <a:ext cx="1828800" cy="182880"/>
           </a:xfrm>
           <a:prstGeom prst="rect">
@@ -30801,7 +31374,7 @@
                 <a:ea typeface="Calibri" pitchFamily="34" charset="-122"/>
                 <a:cs typeface="Calibri" pitchFamily="34" charset="-120"/>
               </a:rPr>
-              <a:t>'e' dropped before vowel suffix</a:t>
+              <a:t>'sion' pronounced /zhun/ after vowel</a:t>
             </a:r>
             <a:endParaRPr lang="en-US" sz="700" dirty="0"/>
           </a:p>
@@ -30809,130 +31382,150 @@
       </p:sp>
       <p:sp>
         <p:nvSpPr>
-          <p:cNvPr id="23" name="Shape 21"/>
-          <p:cNvSpPr/>
-          <p:nvPr/>
-        </p:nvSpPr>
-        <p:spPr>
-          <a:xfrm>
-            <a:off x="6519672" y="2258568"/>
-            <a:ext cx="1828800" cy="292608"/>
+          <p:cNvPr id="24" name="Shape 22"/>
+          <p:cNvSpPr/>
+          <p:nvPr/>
+        </p:nvSpPr>
+        <p:spPr>
+          <a:xfrm>
+            <a:off x="365760" y="3273552"/>
+            <a:ext cx="1371600" cy="658368"/>
           </a:xfrm>
           <a:prstGeom prst="rect">
             <a:avLst>
-              <a:gd name="adj" fmla="val 25000"/>
+              <a:gd name="adj" fmla="val 8333"/>
             </a:avLst>
           </a:prstGeom>
           <a:solidFill>
-            <a:srgbClr val="FCE7F3"/>
-          </a:solidFill>
-          <a:ln w="19050">
-            <a:solidFill>
-              <a:srgbClr val="DB2777"/>
-            </a:solidFill>
-            <a:prstDash val="solid"/>
-          </a:ln>
-          <a:effectLst>
-            <a:outerShdw sx="100000" sy="100000" kx="0" ky="0" algn="bl" rotWithShape="0" blurRad="101600" dist="38100" dir="8100000">
-              <a:srgbClr val="000000">
-                <a:alpha val="12000"/>
-              </a:srgbClr>
-            </a:outerShdw>
-          </a:effectLst>
-        </p:spPr>
-      </p:sp>
-      <p:sp>
-        <p:nvSpPr>
-          <p:cNvPr id="24" name="Text 22"/>
-          <p:cNvSpPr/>
-          <p:nvPr/>
-        </p:nvSpPr>
-        <p:spPr>
-          <a:xfrm>
-            <a:off x="6519672" y="2258568"/>
-            <a:ext cx="1828800" cy="292608"/>
-          </a:xfrm>
-          <a:prstGeom prst="rect">
-            <a:avLst/>
-          </a:prstGeom>
-          <a:noFill/>
-          <a:ln/>
-        </p:spPr>
-        <p:txBody>
-          <a:bodyPr wrap="square" lIns="0" tIns="0" rIns="0" bIns="0" rtlCol="0" anchor="ctr"/>
-          <a:lstStyle/>
-          <a:p>
-            <a:pPr algn="ctr" indent="0" marL="0">
-              <a:buNone/>
-            </a:pPr>
-            <a:r>
-              <a:rPr lang="en-US" sz="1300" b="1" dirty="0">
-                <a:solidFill>
-                  <a:srgbClr val="9D174D"/>
+            <a:srgbClr val="E2E8F0"/>
+          </a:solidFill>
+          <a:ln w="12700">
+            <a:solidFill>
+              <a:srgbClr val="E2E8F0"/>
+            </a:solidFill>
+            <a:prstDash val="solid"/>
+          </a:ln>
+        </p:spPr>
+      </p:sp>
+      <p:sp>
+        <p:nvSpPr>
+          <p:cNvPr id="25" name="Text 23"/>
+          <p:cNvSpPr/>
+          <p:nvPr/>
+        </p:nvSpPr>
+        <p:spPr>
+          <a:xfrm>
+            <a:off x="365760" y="3273552"/>
+            <a:ext cx="1371600" cy="658368"/>
+          </a:xfrm>
+          <a:prstGeom prst="rect">
+            <a:avLst/>
+          </a:prstGeom>
+          <a:noFill/>
+          <a:ln/>
+        </p:spPr>
+        <p:txBody>
+          <a:bodyPr wrap="square" lIns="0" tIns="0" rIns="0" bIns="0" rtlCol="0" anchor="ctr"/>
+          <a:lstStyle/>
+          <a:p>
+            <a:pPr algn="ctr" indent="0" marL="0">
+              <a:buNone/>
+            </a:pPr>
+            <a:r>
+              <a:rPr lang="en-US" sz="1100" b="1" dirty="0">
+                <a:solidFill>
+                  <a:srgbClr val="475569"/>
                 </a:solidFill>
                 <a:latin typeface="Trebuchet MS" pitchFamily="34" charset="0"/>
                 <a:ea typeface="Trebuchet MS" pitchFamily="34" charset="-122"/>
                 <a:cs typeface="Trebuchet MS" pitchFamily="34" charset="-120"/>
               </a:rPr>
-              <a:t>ed</a:t>
-            </a:r>
-            <a:endParaRPr lang="en-US" sz="1300" dirty="0"/>
-          </a:p>
-        </p:txBody>
-      </p:sp>
-      <p:sp>
-        <p:nvSpPr>
-          <p:cNvPr id="25" name="Text 23"/>
-          <p:cNvSpPr/>
-          <p:nvPr/>
-        </p:nvSpPr>
-        <p:spPr>
-          <a:xfrm>
-            <a:off x="6519672" y="2569464"/>
-            <a:ext cx="1828800" cy="201168"/>
-          </a:xfrm>
-          <a:prstGeom prst="rect">
-            <a:avLst/>
-          </a:prstGeom>
-          <a:noFill/>
-          <a:ln/>
-        </p:spPr>
-        <p:txBody>
-          <a:bodyPr wrap="square" lIns="0" tIns="0" rIns="0" bIns="0" rtlCol="0" anchor="t"/>
-          <a:lstStyle/>
-          <a:p>
-            <a:pPr algn="ctr" indent="0" marL="0">
-              <a:buNone/>
-            </a:pPr>
-            <a:r>
-              <a:rPr lang="en-US" sz="850" dirty="0">
-                <a:solidFill>
-                  <a:srgbClr val="475569"/>
+              <a:t>Syllables</a:t>
+            </a:r>
+            <a:endParaRPr lang="en-US" sz="1100" dirty="0"/>
+          </a:p>
+        </p:txBody>
+      </p:sp>
+      <p:sp>
+        <p:nvSpPr>
+          <p:cNvPr id="26" name="Shape 24"/>
+          <p:cNvSpPr/>
+          <p:nvPr/>
+        </p:nvSpPr>
+        <p:spPr>
+          <a:xfrm>
+            <a:off x="1874520" y="3273552"/>
+            <a:ext cx="6903720" cy="658368"/>
+          </a:xfrm>
+          <a:prstGeom prst="rect">
+            <a:avLst>
+              <a:gd name="adj" fmla="val 8333"/>
+            </a:avLst>
+          </a:prstGeom>
+          <a:solidFill>
+            <a:srgbClr val="F8FAFC"/>
+          </a:solidFill>
+          <a:ln w="12700">
+            <a:solidFill>
+              <a:srgbClr val="E2E8F0"/>
+            </a:solidFill>
+            <a:prstDash val="dash"/>
+          </a:ln>
+        </p:spPr>
+      </p:sp>
+      <p:sp>
+        <p:nvSpPr>
+          <p:cNvPr id="27" name="Text 25"/>
+          <p:cNvSpPr/>
+          <p:nvPr/>
+        </p:nvSpPr>
+        <p:spPr>
+          <a:xfrm>
+            <a:off x="1874520" y="3273552"/>
+            <a:ext cx="6903720" cy="658368"/>
+          </a:xfrm>
+          <a:prstGeom prst="rect">
+            <a:avLst/>
+          </a:prstGeom>
+          <a:noFill/>
+          <a:ln/>
+        </p:spPr>
+        <p:txBody>
+          <a:bodyPr wrap="square" rtlCol="0" anchor="ctr"/>
+          <a:lstStyle/>
+          <a:p>
+            <a:pPr algn="ctr" indent="0" marL="0">
+              <a:buNone/>
+            </a:pPr>
+            <a:r>
+              <a:rPr lang="en-US" sz="1100" i="1" dirty="0">
+                <a:solidFill>
+                  <a:srgbClr val="CBD5E1"/>
                 </a:solidFill>
                 <a:latin typeface="Calibri" pitchFamily="34" charset="0"/>
                 <a:ea typeface="Calibri" pitchFamily="34" charset="-122"/>
                 <a:cs typeface="Calibri" pitchFamily="34" charset="-120"/>
               </a:rPr>
-              <a:t>in the past</a:t>
-            </a:r>
-            <a:endParaRPr lang="en-US" sz="850" dirty="0"/>
-          </a:p>
-        </p:txBody>
-      </p:sp>
-      <p:sp>
-        <p:nvSpPr>
-          <p:cNvPr id="26" name="Shape 24"/>
-          <p:cNvSpPr/>
-          <p:nvPr/>
-        </p:nvSpPr>
-        <p:spPr>
-          <a:xfrm>
-            <a:off x="365760" y="3273552"/>
-            <a:ext cx="1371600" cy="658368"/>
+              <a:t>Write here...</a:t>
+            </a:r>
+            <a:endParaRPr lang="en-US" sz="1100" dirty="0"/>
+          </a:p>
+        </p:txBody>
+      </p:sp>
+      <p:sp>
+        <p:nvSpPr>
+          <p:cNvPr id="28" name="Shape 26"/>
+          <p:cNvSpPr/>
+          <p:nvPr/>
+        </p:nvSpPr>
+        <p:spPr>
+          <a:xfrm>
+            <a:off x="365760" y="4096512"/>
+            <a:ext cx="1371600" cy="804672"/>
           </a:xfrm>
           <a:prstGeom prst="rect">
             <a:avLst>
-              <a:gd name="adj" fmla="val 8333"/>
+              <a:gd name="adj" fmla="val 6818"/>
             </a:avLst>
           </a:prstGeom>
           <a:solidFill>
@@ -30948,14 +31541,14 @@
       </p:sp>
       <p:sp>
         <p:nvSpPr>
-          <p:cNvPr id="27" name="Text 25"/>
-          <p:cNvSpPr/>
-          <p:nvPr/>
-        </p:nvSpPr>
-        <p:spPr>
-          <a:xfrm>
-            <a:off x="365760" y="3273552"/>
-            <a:ext cx="1371600" cy="658368"/>
+          <p:cNvPr id="29" name="Text 27"/>
+          <p:cNvSpPr/>
+          <p:nvPr/>
+        </p:nvSpPr>
+        <p:spPr>
+          <a:xfrm>
+            <a:off x="365760" y="4096512"/>
+            <a:ext cx="1371600" cy="804672"/>
           </a:xfrm>
           <a:prstGeom prst="rect">
             <a:avLst/>
@@ -30979,7 +31572,7 @@
                 <a:ea typeface="Trebuchet MS" pitchFamily="34" charset="-122"/>
                 <a:cs typeface="Trebuchet MS" pitchFamily="34" charset="-120"/>
               </a:rPr>
-              <a:t>Syllables</a:t>
+              <a:t>Phonemes</a:t>
             </a:r>
             <a:endParaRPr lang="en-US" sz="1100" dirty="0"/>
           </a:p>
@@ -30987,80 +31580,14 @@
       </p:sp>
       <p:sp>
         <p:nvSpPr>
-          <p:cNvPr id="28" name="Shape 26"/>
-          <p:cNvSpPr/>
-          <p:nvPr/>
-        </p:nvSpPr>
-        <p:spPr>
-          <a:xfrm>
-            <a:off x="1874520" y="3273552"/>
-            <a:ext cx="6903720" cy="658368"/>
-          </a:xfrm>
-          <a:prstGeom prst="rect">
-            <a:avLst>
-              <a:gd name="adj" fmla="val 8333"/>
-            </a:avLst>
-          </a:prstGeom>
-          <a:solidFill>
-            <a:srgbClr val="F8FAFC"/>
-          </a:solidFill>
-          <a:ln w="12700">
-            <a:solidFill>
-              <a:srgbClr val="E2E8F0"/>
-            </a:solidFill>
-            <a:prstDash val="dash"/>
-          </a:ln>
-        </p:spPr>
-      </p:sp>
-      <p:sp>
-        <p:nvSpPr>
-          <p:cNvPr id="29" name="Text 27"/>
-          <p:cNvSpPr/>
-          <p:nvPr/>
-        </p:nvSpPr>
-        <p:spPr>
-          <a:xfrm>
-            <a:off x="1874520" y="3273552"/>
-            <a:ext cx="6903720" cy="658368"/>
-          </a:xfrm>
-          <a:prstGeom prst="rect">
-            <a:avLst/>
-          </a:prstGeom>
-          <a:noFill/>
-          <a:ln/>
-        </p:spPr>
-        <p:txBody>
-          <a:bodyPr wrap="square" rtlCol="0" anchor="ctr"/>
-          <a:lstStyle/>
-          <a:p>
-            <a:pPr algn="ctr" indent="0" marL="0">
-              <a:buNone/>
-            </a:pPr>
-            <a:r>
-              <a:rPr lang="en-US" sz="1100" i="1" dirty="0">
-                <a:solidFill>
-                  <a:srgbClr val="CBD5E1"/>
-                </a:solidFill>
-                <a:latin typeface="Calibri" pitchFamily="34" charset="0"/>
-                <a:ea typeface="Calibri" pitchFamily="34" charset="-122"/>
-                <a:cs typeface="Calibri" pitchFamily="34" charset="-120"/>
-              </a:rPr>
-              <a:t>Write here...</a:t>
-            </a:r>
-            <a:endParaRPr lang="en-US" sz="1100" dirty="0"/>
-          </a:p>
-        </p:txBody>
-      </p:sp>
-      <p:sp>
-        <p:nvSpPr>
           <p:cNvPr id="30" name="Shape 28"/>
           <p:cNvSpPr/>
           <p:nvPr/>
         </p:nvSpPr>
         <p:spPr>
           <a:xfrm>
-            <a:off x="365760" y="4096512"/>
-            <a:ext cx="1371600" cy="804672"/>
+            <a:off x="1874520" y="4096512"/>
+            <a:ext cx="6903720" cy="804672"/>
           </a:xfrm>
           <a:prstGeom prst="rect">
             <a:avLst>
@@ -31068,85 +31595,19 @@
             </a:avLst>
           </a:prstGeom>
           <a:solidFill>
-            <a:srgbClr val="E2E8F0"/>
+            <a:srgbClr val="F8FAFC"/>
           </a:solidFill>
           <a:ln w="12700">
             <a:solidFill>
               <a:srgbClr val="E2E8F0"/>
             </a:solidFill>
-            <a:prstDash val="solid"/>
+            <a:prstDash val="dash"/>
           </a:ln>
         </p:spPr>
       </p:sp>
       <p:sp>
         <p:nvSpPr>
           <p:cNvPr id="31" name="Text 29"/>
-          <p:cNvSpPr/>
-          <p:nvPr/>
-        </p:nvSpPr>
-        <p:spPr>
-          <a:xfrm>
-            <a:off x="365760" y="4096512"/>
-            <a:ext cx="1371600" cy="804672"/>
-          </a:xfrm>
-          <a:prstGeom prst="rect">
-            <a:avLst/>
-          </a:prstGeom>
-          <a:noFill/>
-          <a:ln/>
-        </p:spPr>
-        <p:txBody>
-          <a:bodyPr wrap="square" lIns="0" tIns="0" rIns="0" bIns="0" rtlCol="0" anchor="ctr"/>
-          <a:lstStyle/>
-          <a:p>
-            <a:pPr algn="ctr" indent="0" marL="0">
-              <a:buNone/>
-            </a:pPr>
-            <a:r>
-              <a:rPr lang="en-US" sz="1100" b="1" dirty="0">
-                <a:solidFill>
-                  <a:srgbClr val="475569"/>
-                </a:solidFill>
-                <a:latin typeface="Trebuchet MS" pitchFamily="34" charset="0"/>
-                <a:ea typeface="Trebuchet MS" pitchFamily="34" charset="-122"/>
-                <a:cs typeface="Trebuchet MS" pitchFamily="34" charset="-120"/>
-              </a:rPr>
-              <a:t>Phonemes</a:t>
-            </a:r>
-            <a:endParaRPr lang="en-US" sz="1100" dirty="0"/>
-          </a:p>
-        </p:txBody>
-      </p:sp>
-      <p:sp>
-        <p:nvSpPr>
-          <p:cNvPr id="32" name="Shape 30"/>
-          <p:cNvSpPr/>
-          <p:nvPr/>
-        </p:nvSpPr>
-        <p:spPr>
-          <a:xfrm>
-            <a:off x="1874520" y="4096512"/>
-            <a:ext cx="6903720" cy="804672"/>
-          </a:xfrm>
-          <a:prstGeom prst="rect">
-            <a:avLst>
-              <a:gd name="adj" fmla="val 6818"/>
-            </a:avLst>
-          </a:prstGeom>
-          <a:solidFill>
-            <a:srgbClr val="F8FAFC"/>
-          </a:solidFill>
-          <a:ln w="12700">
-            <a:solidFill>
-              <a:srgbClr val="E2E8F0"/>
-            </a:solidFill>
-            <a:prstDash val="dash"/>
-          </a:ln>
-        </p:spPr>
-      </p:sp>
-      <p:sp>
-        <p:nvSpPr>
-          <p:cNvPr id="33" name="Text 31"/>
           <p:cNvSpPr/>
           <p:nvPr/>
         </p:nvSpPr>
@@ -31469,7 +31930,7 @@
                 <a:ea typeface="Calibri" pitchFamily="34" charset="-122"/>
                 <a:cs typeface="Calibri" pitchFamily="34" charset="-120"/>
               </a:rPr>
-              <a:t>Word Labs  •  wordlabs.app  •  Root: 'persuade' = to urge or convince someone</a:t>
+              <a:t>Word Labs  •  wordlabs.app  •  Root: 'persuade' = to convince or urge someone</a:t>
             </a:r>
             <a:endParaRPr lang="en-US" sz="800" dirty="0"/>
           </a:p>
@@ -31608,7 +32069,7 @@
                 <a:ea typeface="Trebuchet MS" pitchFamily="34" charset="-122"/>
                 <a:cs typeface="Trebuchet MS" pitchFamily="34" charset="-120"/>
               </a:rPr>
-              <a:t>unpersuaded</a:t>
+              <a:t>persuasion</a:t>
             </a:r>
             <a:endParaRPr lang="en-US" sz="2800" dirty="0"/>
           </a:p>
@@ -31688,7 +32149,7 @@
         </p:nvSpPr>
         <p:spPr>
           <a:xfrm>
-            <a:off x="2221992" y="2258568"/>
+            <a:off x="2938272" y="2258568"/>
             <a:ext cx="1828800" cy="292608"/>
           </a:xfrm>
           <a:prstGeom prst="rect">
@@ -31697,11 +32158,11 @@
             </a:avLst>
           </a:prstGeom>
           <a:solidFill>
-            <a:srgbClr val="DDD6FE"/>
+            <a:srgbClr val="CCFBF1"/>
           </a:solidFill>
           <a:ln w="19050">
             <a:solidFill>
-              <a:srgbClr val="7C3AED"/>
+              <a:srgbClr val="0D9488"/>
             </a:solidFill>
             <a:prstDash val="solid"/>
           </a:ln>
@@ -31722,7 +32183,7 @@
         </p:nvSpPr>
         <p:spPr>
           <a:xfrm>
-            <a:off x="2221992" y="2258568"/>
+            <a:off x="2938272" y="2258568"/>
             <a:ext cx="1828800" cy="292608"/>
           </a:xfrm>
           <a:prstGeom prst="rect">
@@ -31741,13 +32202,13 @@
             <a:r>
               <a:rPr lang="en-US" sz="1300" b="1" dirty="0">
                 <a:solidFill>
-                  <a:srgbClr val="4C1D95"/>
+                  <a:srgbClr val="0F766E"/>
                 </a:solidFill>
                 <a:latin typeface="Trebuchet MS" pitchFamily="34" charset="0"/>
                 <a:ea typeface="Trebuchet MS" pitchFamily="34" charset="-122"/>
                 <a:cs typeface="Trebuchet MS" pitchFamily="34" charset="-120"/>
               </a:rPr>
-              <a:t>un</a:t>
+              <a:t>persuade</a:t>
             </a:r>
             <a:endParaRPr lang="en-US" sz="1300" dirty="0"/>
           </a:p>
@@ -31761,7 +32222,7 @@
         </p:nvSpPr>
         <p:spPr>
           <a:xfrm>
-            <a:off x="2221992" y="2569464"/>
+            <a:off x="2938272" y="2569464"/>
             <a:ext cx="1828800" cy="201168"/>
           </a:xfrm>
           <a:prstGeom prst="rect">
@@ -31786,7 +32247,7 @@
                 <a:ea typeface="Calibri" pitchFamily="34" charset="-122"/>
                 <a:cs typeface="Calibri" pitchFamily="34" charset="-120"/>
               </a:rPr>
-              <a:t>not</a:t>
+              <a:t>to convince or urge</a:t>
             </a:r>
             <a:endParaRPr lang="en-US" sz="850" dirty="0"/>
           </a:p>
@@ -31794,13 +32255,52 @@
       </p:sp>
       <p:sp>
         <p:nvSpPr>
-          <p:cNvPr id="19" name="Shape 17"/>
-          <p:cNvSpPr/>
-          <p:nvPr/>
-        </p:nvSpPr>
-        <p:spPr>
-          <a:xfrm>
-            <a:off x="4370832" y="2258568"/>
+          <p:cNvPr id="19" name="Text 17"/>
+          <p:cNvSpPr/>
+          <p:nvPr/>
+        </p:nvSpPr>
+        <p:spPr>
+          <a:xfrm>
+            <a:off x="2938272" y="2752344"/>
+            <a:ext cx="1828800" cy="182880"/>
+          </a:xfrm>
+          <a:prstGeom prst="rect">
+            <a:avLst/>
+          </a:prstGeom>
+          <a:noFill/>
+          <a:ln/>
+        </p:spPr>
+        <p:txBody>
+          <a:bodyPr wrap="square" lIns="0" tIns="0" rIns="0" bIns="0" rtlCol="0" anchor="t"/>
+          <a:lstStyle/>
+          <a:p>
+            <a:pPr algn="ctr" indent="0" marL="0">
+              <a:buNone/>
+            </a:pPr>
+            <a:r>
+              <a:rPr lang="en-US" sz="700" i="1" dirty="0">
+                <a:solidFill>
+                  <a:srgbClr val="94A3B8"/>
+                </a:solidFill>
+                <a:latin typeface="Calibri" pitchFamily="34" charset="0"/>
+                <a:ea typeface="Calibri" pitchFamily="34" charset="-122"/>
+                <a:cs typeface="Calibri" pitchFamily="34" charset="-120"/>
+              </a:rPr>
+              <a:t>'suade' becomes 'suas' before suffix</a:t>
+            </a:r>
+            <a:endParaRPr lang="en-US" sz="700" dirty="0"/>
+          </a:p>
+        </p:txBody>
+      </p:sp>
+      <p:sp>
+        <p:nvSpPr>
+          <p:cNvPr id="20" name="Shape 18"/>
+          <p:cNvSpPr/>
+          <p:nvPr/>
+        </p:nvSpPr>
+        <p:spPr>
+          <a:xfrm>
+            <a:off x="5803392" y="2258568"/>
             <a:ext cx="1828800" cy="292608"/>
           </a:xfrm>
           <a:prstGeom prst="rect">
@@ -31809,11 +32309,11 @@
             </a:avLst>
           </a:prstGeom>
           <a:solidFill>
-            <a:srgbClr val="CCFBF1"/>
+            <a:srgbClr val="FCE7F3"/>
           </a:solidFill>
           <a:ln w="19050">
             <a:solidFill>
-              <a:srgbClr val="0D9488"/>
+              <a:srgbClr val="DB2777"/>
             </a:solidFill>
             <a:prstDash val="solid"/>
           </a:ln>
@@ -31828,13 +32328,13 @@
       </p:sp>
       <p:sp>
         <p:nvSpPr>
-          <p:cNvPr id="20" name="Text 18"/>
-          <p:cNvSpPr/>
-          <p:nvPr/>
-        </p:nvSpPr>
-        <p:spPr>
-          <a:xfrm>
-            <a:off x="4370832" y="2258568"/>
+          <p:cNvPr id="21" name="Text 19"/>
+          <p:cNvSpPr/>
+          <p:nvPr/>
+        </p:nvSpPr>
+        <p:spPr>
+          <a:xfrm>
+            <a:off x="5803392" y="2258568"/>
             <a:ext cx="1828800" cy="292608"/>
           </a:xfrm>
           <a:prstGeom prst="rect">
@@ -31853,13 +32353,13 @@
             <a:r>
               <a:rPr lang="en-US" sz="1300" b="1" dirty="0">
                 <a:solidFill>
-                  <a:srgbClr val="0F766E"/>
+                  <a:srgbClr val="9D174D"/>
                 </a:solidFill>
                 <a:latin typeface="Trebuchet MS" pitchFamily="34" charset="0"/>
                 <a:ea typeface="Trebuchet MS" pitchFamily="34" charset="-122"/>
                 <a:cs typeface="Trebuchet MS" pitchFamily="34" charset="-120"/>
               </a:rPr>
-              <a:t>persuade</a:t>
+              <a:t>ion</a:t>
             </a:r>
             <a:endParaRPr lang="en-US" sz="1300" dirty="0"/>
           </a:p>
@@ -31867,13 +32367,13 @@
       </p:sp>
       <p:sp>
         <p:nvSpPr>
-          <p:cNvPr id="21" name="Text 19"/>
-          <p:cNvSpPr/>
-          <p:nvPr/>
-        </p:nvSpPr>
-        <p:spPr>
-          <a:xfrm>
-            <a:off x="4370832" y="2569464"/>
+          <p:cNvPr id="22" name="Text 20"/>
+          <p:cNvSpPr/>
+          <p:nvPr/>
+        </p:nvSpPr>
+        <p:spPr>
+          <a:xfrm>
+            <a:off x="5803392" y="2569464"/>
             <a:ext cx="1828800" cy="201168"/>
           </a:xfrm>
           <a:prstGeom prst="rect">
@@ -31898,7 +32398,7 @@
                 <a:ea typeface="Calibri" pitchFamily="34" charset="-122"/>
                 <a:cs typeface="Calibri" pitchFamily="34" charset="-120"/>
               </a:rPr>
-              <a:t>to urge or convince</a:t>
+              <a:t>the act or result of</a:t>
             </a:r>
             <a:endParaRPr lang="en-US" sz="850" dirty="0"/>
           </a:p>
@@ -31906,13 +32406,13 @@
       </p:sp>
       <p:sp>
         <p:nvSpPr>
-          <p:cNvPr id="22" name="Text 20"/>
-          <p:cNvSpPr/>
-          <p:nvPr/>
-        </p:nvSpPr>
-        <p:spPr>
-          <a:xfrm>
-            <a:off x="4370832" y="2752344"/>
+          <p:cNvPr id="23" name="Text 21"/>
+          <p:cNvSpPr/>
+          <p:nvPr/>
+        </p:nvSpPr>
+        <p:spPr>
+          <a:xfrm>
+            <a:off x="5803392" y="2752344"/>
             <a:ext cx="1828800" cy="182880"/>
           </a:xfrm>
           <a:prstGeom prst="rect">
@@ -31937,7 +32437,7 @@
                 <a:ea typeface="Calibri" pitchFamily="34" charset="-122"/>
                 <a:cs typeface="Calibri" pitchFamily="34" charset="-120"/>
               </a:rPr>
-              <a:t>'e' dropped before vowel suffix</a:t>
+              <a:t>'sion' pronounced /zhun/ after vowel</a:t>
             </a:r>
             <a:endParaRPr lang="en-US" sz="700" dirty="0"/>
           </a:p>
@@ -31945,113 +32445,67 @@
       </p:sp>
       <p:sp>
         <p:nvSpPr>
-          <p:cNvPr id="23" name="Shape 21"/>
-          <p:cNvSpPr/>
-          <p:nvPr/>
-        </p:nvSpPr>
-        <p:spPr>
-          <a:xfrm>
-            <a:off x="6519672" y="2258568"/>
-            <a:ext cx="1828800" cy="292608"/>
+          <p:cNvPr id="24" name="Shape 22"/>
+          <p:cNvSpPr/>
+          <p:nvPr/>
+        </p:nvSpPr>
+        <p:spPr>
+          <a:xfrm>
+            <a:off x="365760" y="3273552"/>
+            <a:ext cx="1371600" cy="658368"/>
           </a:xfrm>
           <a:prstGeom prst="rect">
             <a:avLst>
-              <a:gd name="adj" fmla="val 25000"/>
+              <a:gd name="adj" fmla="val 8333"/>
             </a:avLst>
           </a:prstGeom>
           <a:solidFill>
-            <a:srgbClr val="FCE7F3"/>
-          </a:solidFill>
-          <a:ln w="19050">
-            <a:solidFill>
-              <a:srgbClr val="DB2777"/>
-            </a:solidFill>
-            <a:prstDash val="solid"/>
-          </a:ln>
-          <a:effectLst>
-            <a:outerShdw sx="100000" sy="100000" kx="0" ky="0" algn="bl" rotWithShape="0" blurRad="101600" dist="38100" dir="8100000">
-              <a:srgbClr val="000000">
-                <a:alpha val="12000"/>
-              </a:srgbClr>
-            </a:outerShdw>
-          </a:effectLst>
-        </p:spPr>
-      </p:sp>
-      <p:sp>
-        <p:nvSpPr>
-          <p:cNvPr id="24" name="Text 22"/>
-          <p:cNvSpPr/>
-          <p:nvPr/>
-        </p:nvSpPr>
-        <p:spPr>
-          <a:xfrm>
-            <a:off x="6519672" y="2258568"/>
-            <a:ext cx="1828800" cy="292608"/>
-          </a:xfrm>
-          <a:prstGeom prst="rect">
-            <a:avLst/>
-          </a:prstGeom>
-          <a:noFill/>
-          <a:ln/>
-        </p:spPr>
-        <p:txBody>
-          <a:bodyPr wrap="square" lIns="0" tIns="0" rIns="0" bIns="0" rtlCol="0" anchor="ctr"/>
-          <a:lstStyle/>
-          <a:p>
-            <a:pPr algn="ctr" indent="0" marL="0">
-              <a:buNone/>
-            </a:pPr>
-            <a:r>
-              <a:rPr lang="en-US" sz="1300" b="1" dirty="0">
-                <a:solidFill>
-                  <a:srgbClr val="9D174D"/>
+            <a:srgbClr val="E2E8F0"/>
+          </a:solidFill>
+          <a:ln w="12700">
+            <a:solidFill>
+              <a:srgbClr val="E2E8F0"/>
+            </a:solidFill>
+            <a:prstDash val="solid"/>
+          </a:ln>
+        </p:spPr>
+      </p:sp>
+      <p:sp>
+        <p:nvSpPr>
+          <p:cNvPr id="25" name="Text 23"/>
+          <p:cNvSpPr/>
+          <p:nvPr/>
+        </p:nvSpPr>
+        <p:spPr>
+          <a:xfrm>
+            <a:off x="365760" y="3273552"/>
+            <a:ext cx="1371600" cy="658368"/>
+          </a:xfrm>
+          <a:prstGeom prst="rect">
+            <a:avLst/>
+          </a:prstGeom>
+          <a:noFill/>
+          <a:ln/>
+        </p:spPr>
+        <p:txBody>
+          <a:bodyPr wrap="square" lIns="0" tIns="0" rIns="0" bIns="0" rtlCol="0" anchor="ctr"/>
+          <a:lstStyle/>
+          <a:p>
+            <a:pPr algn="ctr" indent="0" marL="0">
+              <a:buNone/>
+            </a:pPr>
+            <a:r>
+              <a:rPr lang="en-US" sz="1100" b="1" dirty="0">
+                <a:solidFill>
+                  <a:srgbClr val="475569"/>
                 </a:solidFill>
                 <a:latin typeface="Trebuchet MS" pitchFamily="34" charset="0"/>
                 <a:ea typeface="Trebuchet MS" pitchFamily="34" charset="-122"/>
                 <a:cs typeface="Trebuchet MS" pitchFamily="34" charset="-120"/>
               </a:rPr>
-              <a:t>ed</a:t>
-            </a:r>
-            <a:endParaRPr lang="en-US" sz="1300" dirty="0"/>
-          </a:p>
-        </p:txBody>
-      </p:sp>
-      <p:sp>
-        <p:nvSpPr>
-          <p:cNvPr id="25" name="Text 23"/>
-          <p:cNvSpPr/>
-          <p:nvPr/>
-        </p:nvSpPr>
-        <p:spPr>
-          <a:xfrm>
-            <a:off x="6519672" y="2569464"/>
-            <a:ext cx="1828800" cy="201168"/>
-          </a:xfrm>
-          <a:prstGeom prst="rect">
-            <a:avLst/>
-          </a:prstGeom>
-          <a:noFill/>
-          <a:ln/>
-        </p:spPr>
-        <p:txBody>
-          <a:bodyPr wrap="square" lIns="0" tIns="0" rIns="0" bIns="0" rtlCol="0" anchor="t"/>
-          <a:lstStyle/>
-          <a:p>
-            <a:pPr algn="ctr" indent="0" marL="0">
-              <a:buNone/>
-            </a:pPr>
-            <a:r>
-              <a:rPr lang="en-US" sz="850" dirty="0">
-                <a:solidFill>
-                  <a:srgbClr val="475569"/>
-                </a:solidFill>
-                <a:latin typeface="Calibri" pitchFamily="34" charset="0"/>
-                <a:ea typeface="Calibri" pitchFamily="34" charset="-122"/>
-                <a:cs typeface="Calibri" pitchFamily="34" charset="-120"/>
-              </a:rPr>
-              <a:t>in the past</a:t>
-            </a:r>
-            <a:endParaRPr lang="en-US" sz="850" dirty="0"/>
+              <a:t>Syllables</a:t>
+            </a:r>
+            <a:endParaRPr lang="en-US" sz="1100" dirty="0"/>
           </a:p>
         </p:txBody>
       </p:sp>
@@ -32063,8 +32517,8 @@
         </p:nvSpPr>
         <p:spPr>
           <a:xfrm>
-            <a:off x="365760" y="3273552"/>
-            <a:ext cx="1371600" cy="658368"/>
+            <a:off x="1874520" y="3273552"/>
+            <a:ext cx="6903720" cy="658368"/>
           </a:xfrm>
           <a:prstGeom prst="rect">
             <a:avLst>
@@ -32072,92 +32526,131 @@
             </a:avLst>
           </a:prstGeom>
           <a:solidFill>
-            <a:srgbClr val="E2E8F0"/>
-          </a:solidFill>
-          <a:ln w="12700">
-            <a:solidFill>
-              <a:srgbClr val="E2E8F0"/>
-            </a:solidFill>
-            <a:prstDash val="solid"/>
-          </a:ln>
-        </p:spPr>
-      </p:sp>
-      <p:sp>
-        <p:nvSpPr>
-          <p:cNvPr id="27" name="Text 25"/>
-          <p:cNvSpPr/>
-          <p:nvPr/>
-        </p:nvSpPr>
-        <p:spPr>
-          <a:xfrm>
-            <a:off x="365760" y="3273552"/>
-            <a:ext cx="1371600" cy="658368"/>
-          </a:xfrm>
-          <a:prstGeom prst="rect">
-            <a:avLst/>
-          </a:prstGeom>
-          <a:noFill/>
-          <a:ln/>
-        </p:spPr>
-        <p:txBody>
-          <a:bodyPr wrap="square" lIns="0" tIns="0" rIns="0" bIns="0" rtlCol="0" anchor="ctr"/>
-          <a:lstStyle/>
-          <a:p>
-            <a:pPr algn="ctr" indent="0" marL="0">
-              <a:buNone/>
-            </a:pPr>
-            <a:r>
-              <a:rPr lang="en-US" sz="1100" b="1" dirty="0">
-                <a:solidFill>
-                  <a:srgbClr val="475569"/>
+            <a:srgbClr val="CCFBF1"/>
+          </a:solidFill>
+          <a:ln w="12700">
+            <a:solidFill>
+              <a:srgbClr val="0D9488"/>
+            </a:solidFill>
+            <a:prstDash val="solid"/>
+          </a:ln>
+        </p:spPr>
+      </p:sp>
+      <p:sp>
+        <p:nvSpPr>
+          <p:cNvPr id="27" name="Shape 25"/>
+          <p:cNvSpPr/>
+          <p:nvPr/>
+        </p:nvSpPr>
+        <p:spPr>
+          <a:xfrm>
+            <a:off x="2313432" y="3364992"/>
+            <a:ext cx="1645920" cy="475488"/>
+          </a:xfrm>
+          <a:prstGeom prst="rect">
+            <a:avLst>
+              <a:gd name="adj" fmla="val 9615"/>
+            </a:avLst>
+          </a:prstGeom>
+          <a:solidFill>
+            <a:srgbClr val="FFFFFF"/>
+          </a:solidFill>
+          <a:ln w="12700">
+            <a:solidFill>
+              <a:srgbClr val="0D9488"/>
+            </a:solidFill>
+            <a:prstDash val="solid"/>
+          </a:ln>
+        </p:spPr>
+      </p:sp>
+      <p:sp>
+        <p:nvSpPr>
+          <p:cNvPr id="28" name="Text 26"/>
+          <p:cNvSpPr/>
+          <p:nvPr/>
+        </p:nvSpPr>
+        <p:spPr>
+          <a:xfrm>
+            <a:off x="2313432" y="3364992"/>
+            <a:ext cx="1645920" cy="475488"/>
+          </a:xfrm>
+          <a:prstGeom prst="rect">
+            <a:avLst/>
+          </a:prstGeom>
+          <a:noFill/>
+          <a:ln/>
+        </p:spPr>
+        <p:txBody>
+          <a:bodyPr wrap="square" lIns="0" tIns="0" rIns="0" bIns="0" rtlCol="0" anchor="ctr"/>
+          <a:lstStyle/>
+          <a:p>
+            <a:pPr algn="ctr" indent="0" marL="0">
+              <a:buNone/>
+            </a:pPr>
+            <a:r>
+              <a:rPr lang="en-US" sz="1400" b="1" dirty="0">
+                <a:solidFill>
+                  <a:srgbClr val="0D9488"/>
                 </a:solidFill>
                 <a:latin typeface="Trebuchet MS" pitchFamily="34" charset="0"/>
                 <a:ea typeface="Trebuchet MS" pitchFamily="34" charset="-122"/>
                 <a:cs typeface="Trebuchet MS" pitchFamily="34" charset="-120"/>
               </a:rPr>
-              <a:t>Syllables</a:t>
-            </a:r>
-            <a:endParaRPr lang="en-US" sz="1100" dirty="0"/>
-          </a:p>
-        </p:txBody>
-      </p:sp>
-      <p:sp>
-        <p:nvSpPr>
-          <p:cNvPr id="28" name="Shape 26"/>
-          <p:cNvSpPr/>
-          <p:nvPr/>
-        </p:nvSpPr>
-        <p:spPr>
-          <a:xfrm>
-            <a:off x="1874520" y="3273552"/>
-            <a:ext cx="6903720" cy="658368"/>
-          </a:xfrm>
-          <a:prstGeom prst="rect">
-            <a:avLst>
-              <a:gd name="adj" fmla="val 8333"/>
-            </a:avLst>
-          </a:prstGeom>
-          <a:solidFill>
-            <a:srgbClr val="CCFBF1"/>
-          </a:solidFill>
-          <a:ln w="12700">
-            <a:solidFill>
-              <a:srgbClr val="0D9488"/>
-            </a:solidFill>
-            <a:prstDash val="solid"/>
-          </a:ln>
-        </p:spPr>
-      </p:sp>
-      <p:sp>
-        <p:nvSpPr>
-          <p:cNvPr id="29" name="Shape 27"/>
-          <p:cNvSpPr/>
-          <p:nvPr/>
-        </p:nvSpPr>
-        <p:spPr>
-          <a:xfrm>
-            <a:off x="1975104" y="3364992"/>
-            <a:ext cx="1554480" cy="475488"/>
+              <a:t>per</a:t>
+            </a:r>
+            <a:endParaRPr lang="en-US" sz="1400" dirty="0"/>
+          </a:p>
+        </p:txBody>
+      </p:sp>
+      <p:sp>
+        <p:nvSpPr>
+          <p:cNvPr id="29" name="Text 27"/>
+          <p:cNvSpPr/>
+          <p:nvPr/>
+        </p:nvSpPr>
+        <p:spPr>
+          <a:xfrm>
+            <a:off x="3959352" y="3364992"/>
+            <a:ext cx="411480" cy="475488"/>
+          </a:xfrm>
+          <a:prstGeom prst="rect">
+            <a:avLst/>
+          </a:prstGeom>
+          <a:noFill/>
+          <a:ln/>
+        </p:spPr>
+        <p:txBody>
+          <a:bodyPr wrap="square" lIns="0" tIns="0" rIns="0" bIns="0" rtlCol="0" anchor="ctr"/>
+          <a:lstStyle/>
+          <a:p>
+            <a:pPr algn="ctr" indent="0" marL="0">
+              <a:buNone/>
+            </a:pPr>
+            <a:r>
+              <a:rPr lang="en-US" sz="1600" b="1" dirty="0">
+                <a:solidFill>
+                  <a:srgbClr val="0D9488"/>
+                </a:solidFill>
+                <a:latin typeface="Trebuchet MS" pitchFamily="34" charset="0"/>
+                <a:ea typeface="Trebuchet MS" pitchFamily="34" charset="-122"/>
+                <a:cs typeface="Trebuchet MS" pitchFamily="34" charset="-120"/>
+              </a:rPr>
+              <a:t>·</a:t>
+            </a:r>
+            <a:endParaRPr lang="en-US" sz="1600" dirty="0"/>
+          </a:p>
+        </p:txBody>
+      </p:sp>
+      <p:sp>
+        <p:nvSpPr>
+          <p:cNvPr id="30" name="Shape 28"/>
+          <p:cNvSpPr/>
+          <p:nvPr/>
+        </p:nvSpPr>
+        <p:spPr>
+          <a:xfrm>
+            <a:off x="4370832" y="3364992"/>
+            <a:ext cx="1645920" cy="475488"/>
           </a:xfrm>
           <a:prstGeom prst="rect">
             <a:avLst>
@@ -32177,14 +32670,14 @@
       </p:sp>
       <p:sp>
         <p:nvSpPr>
-          <p:cNvPr id="30" name="Text 28"/>
-          <p:cNvSpPr/>
-          <p:nvPr/>
-        </p:nvSpPr>
-        <p:spPr>
-          <a:xfrm>
-            <a:off x="1975104" y="3364992"/>
-            <a:ext cx="1554480" cy="475488"/>
+          <p:cNvPr id="31" name="Text 29"/>
+          <p:cNvSpPr/>
+          <p:nvPr/>
+        </p:nvSpPr>
+        <p:spPr>
+          <a:xfrm>
+            <a:off x="4370832" y="3364992"/>
+            <a:ext cx="1645920" cy="475488"/>
           </a:xfrm>
           <a:prstGeom prst="rect">
             <a:avLst/>
@@ -32208,7 +32701,7 @@
                 <a:ea typeface="Trebuchet MS" pitchFamily="34" charset="-122"/>
                 <a:cs typeface="Trebuchet MS" pitchFamily="34" charset="-120"/>
               </a:rPr>
-              <a:t>un</a:t>
+              <a:t>sua</a:t>
             </a:r>
             <a:endParaRPr lang="en-US" sz="1400" dirty="0"/>
           </a:p>
@@ -32216,14 +32709,14 @@
       </p:sp>
       <p:sp>
         <p:nvSpPr>
-          <p:cNvPr id="31" name="Text 29"/>
-          <p:cNvSpPr/>
-          <p:nvPr/>
-        </p:nvSpPr>
-        <p:spPr>
-          <a:xfrm>
-            <a:off x="3529584" y="3364992"/>
-            <a:ext cx="73152" cy="475488"/>
+          <p:cNvPr id="32" name="Text 30"/>
+          <p:cNvSpPr/>
+          <p:nvPr/>
+        </p:nvSpPr>
+        <p:spPr>
+          <a:xfrm>
+            <a:off x="6016752" y="3364992"/>
+            <a:ext cx="411480" cy="475488"/>
           </a:xfrm>
           <a:prstGeom prst="rect">
             <a:avLst/>
@@ -32255,14 +32748,14 @@
       </p:sp>
       <p:sp>
         <p:nvSpPr>
-          <p:cNvPr id="32" name="Shape 30"/>
-          <p:cNvSpPr/>
-          <p:nvPr/>
-        </p:nvSpPr>
-        <p:spPr>
-          <a:xfrm>
-            <a:off x="3602736" y="3364992"/>
-            <a:ext cx="1554480" cy="475488"/>
+          <p:cNvPr id="33" name="Shape 31"/>
+          <p:cNvSpPr/>
+          <p:nvPr/>
+        </p:nvSpPr>
+        <p:spPr>
+          <a:xfrm>
+            <a:off x="6428232" y="3364992"/>
+            <a:ext cx="1645920" cy="475488"/>
           </a:xfrm>
           <a:prstGeom prst="rect">
             <a:avLst>
@@ -32282,14 +32775,14 @@
       </p:sp>
       <p:sp>
         <p:nvSpPr>
-          <p:cNvPr id="33" name="Text 31"/>
-          <p:cNvSpPr/>
-          <p:nvPr/>
-        </p:nvSpPr>
-        <p:spPr>
-          <a:xfrm>
-            <a:off x="3602736" y="3364992"/>
-            <a:ext cx="1554480" cy="475488"/>
+          <p:cNvPr id="34" name="Text 32"/>
+          <p:cNvSpPr/>
+          <p:nvPr/>
+        </p:nvSpPr>
+        <p:spPr>
+          <a:xfrm>
+            <a:off x="6428232" y="3364992"/>
+            <a:ext cx="1645920" cy="475488"/>
           </a:xfrm>
           <a:prstGeom prst="rect">
             <a:avLst/>
@@ -32313,7 +32806,7 @@
                 <a:ea typeface="Trebuchet MS" pitchFamily="34" charset="-122"/>
                 <a:cs typeface="Trebuchet MS" pitchFamily="34" charset="-120"/>
               </a:rPr>
-              <a:t>per</a:t>
+              <a:t>sion</a:t>
             </a:r>
             <a:endParaRPr lang="en-US" sz="1400" dirty="0"/>
           </a:p>
@@ -32321,224 +32814,80 @@
       </p:sp>
       <p:sp>
         <p:nvSpPr>
-          <p:cNvPr id="34" name="Text 32"/>
-          <p:cNvSpPr/>
-          <p:nvPr/>
-        </p:nvSpPr>
-        <p:spPr>
-          <a:xfrm>
-            <a:off x="5157216" y="3364992"/>
-            <a:ext cx="73152" cy="475488"/>
-          </a:xfrm>
-          <a:prstGeom prst="rect">
-            <a:avLst/>
-          </a:prstGeom>
-          <a:noFill/>
-          <a:ln/>
-        </p:spPr>
-        <p:txBody>
-          <a:bodyPr wrap="square" lIns="0" tIns="0" rIns="0" bIns="0" rtlCol="0" anchor="ctr"/>
-          <a:lstStyle/>
-          <a:p>
-            <a:pPr algn="ctr" indent="0" marL="0">
-              <a:buNone/>
-            </a:pPr>
-            <a:r>
-              <a:rPr lang="en-US" sz="1600" b="1" dirty="0">
-                <a:solidFill>
-                  <a:srgbClr val="0D9488"/>
+          <p:cNvPr id="35" name="Shape 33"/>
+          <p:cNvSpPr/>
+          <p:nvPr/>
+        </p:nvSpPr>
+        <p:spPr>
+          <a:xfrm>
+            <a:off x="365760" y="4096512"/>
+            <a:ext cx="1371600" cy="804672"/>
+          </a:xfrm>
+          <a:prstGeom prst="rect">
+            <a:avLst>
+              <a:gd name="adj" fmla="val 6818"/>
+            </a:avLst>
+          </a:prstGeom>
+          <a:solidFill>
+            <a:srgbClr val="E2E8F0"/>
+          </a:solidFill>
+          <a:ln w="12700">
+            <a:solidFill>
+              <a:srgbClr val="E2E8F0"/>
+            </a:solidFill>
+            <a:prstDash val="solid"/>
+          </a:ln>
+        </p:spPr>
+      </p:sp>
+      <p:sp>
+        <p:nvSpPr>
+          <p:cNvPr id="36" name="Text 34"/>
+          <p:cNvSpPr/>
+          <p:nvPr/>
+        </p:nvSpPr>
+        <p:spPr>
+          <a:xfrm>
+            <a:off x="365760" y="4096512"/>
+            <a:ext cx="1371600" cy="804672"/>
+          </a:xfrm>
+          <a:prstGeom prst="rect">
+            <a:avLst/>
+          </a:prstGeom>
+          <a:noFill/>
+          <a:ln/>
+        </p:spPr>
+        <p:txBody>
+          <a:bodyPr wrap="square" lIns="0" tIns="0" rIns="0" bIns="0" rtlCol="0" anchor="ctr"/>
+          <a:lstStyle/>
+          <a:p>
+            <a:pPr algn="ctr" indent="0" marL="0">
+              <a:buNone/>
+            </a:pPr>
+            <a:r>
+              <a:rPr lang="en-US" sz="1100" b="1" dirty="0">
+                <a:solidFill>
+                  <a:srgbClr val="475569"/>
                 </a:solidFill>
                 <a:latin typeface="Trebuchet MS" pitchFamily="34" charset="0"/>
                 <a:ea typeface="Trebuchet MS" pitchFamily="34" charset="-122"/>
                 <a:cs typeface="Trebuchet MS" pitchFamily="34" charset="-120"/>
               </a:rPr>
-              <a:t>·</a:t>
-            </a:r>
-            <a:endParaRPr lang="en-US" sz="1600" dirty="0"/>
-          </a:p>
-        </p:txBody>
-      </p:sp>
-      <p:sp>
-        <p:nvSpPr>
-          <p:cNvPr id="35" name="Shape 33"/>
-          <p:cNvSpPr/>
-          <p:nvPr/>
-        </p:nvSpPr>
-        <p:spPr>
-          <a:xfrm>
-            <a:off x="5230368" y="3364992"/>
-            <a:ext cx="1554480" cy="475488"/>
-          </a:xfrm>
-          <a:prstGeom prst="rect">
-            <a:avLst>
-              <a:gd name="adj" fmla="val 9615"/>
-            </a:avLst>
-          </a:prstGeom>
-          <a:solidFill>
-            <a:srgbClr val="FFFFFF"/>
-          </a:solidFill>
-          <a:ln w="12700">
-            <a:solidFill>
-              <a:srgbClr val="0D9488"/>
-            </a:solidFill>
-            <a:prstDash val="solid"/>
-          </a:ln>
-        </p:spPr>
-      </p:sp>
-      <p:sp>
-        <p:nvSpPr>
-          <p:cNvPr id="36" name="Text 34"/>
-          <p:cNvSpPr/>
-          <p:nvPr/>
-        </p:nvSpPr>
-        <p:spPr>
-          <a:xfrm>
-            <a:off x="5230368" y="3364992"/>
-            <a:ext cx="1554480" cy="475488"/>
-          </a:xfrm>
-          <a:prstGeom prst="rect">
-            <a:avLst/>
-          </a:prstGeom>
-          <a:noFill/>
-          <a:ln/>
-        </p:spPr>
-        <p:txBody>
-          <a:bodyPr wrap="square" lIns="0" tIns="0" rIns="0" bIns="0" rtlCol="0" anchor="ctr"/>
-          <a:lstStyle/>
-          <a:p>
-            <a:pPr algn="ctr" indent="0" marL="0">
-              <a:buNone/>
-            </a:pPr>
-            <a:r>
-              <a:rPr lang="en-US" sz="1400" b="1" dirty="0">
-                <a:solidFill>
-                  <a:srgbClr val="0D9488"/>
-                </a:solidFill>
-                <a:latin typeface="Trebuchet MS" pitchFamily="34" charset="0"/>
-                <a:ea typeface="Trebuchet MS" pitchFamily="34" charset="-122"/>
-                <a:cs typeface="Trebuchet MS" pitchFamily="34" charset="-120"/>
-              </a:rPr>
-              <a:t>sua</a:t>
-            </a:r>
-            <a:endParaRPr lang="en-US" sz="1400" dirty="0"/>
-          </a:p>
-        </p:txBody>
-      </p:sp>
-      <p:sp>
-        <p:nvSpPr>
-          <p:cNvPr id="37" name="Text 35"/>
-          <p:cNvSpPr/>
-          <p:nvPr/>
-        </p:nvSpPr>
-        <p:spPr>
-          <a:xfrm>
-            <a:off x="6784848" y="3364992"/>
-            <a:ext cx="73152" cy="475488"/>
-          </a:xfrm>
-          <a:prstGeom prst="rect">
-            <a:avLst/>
-          </a:prstGeom>
-          <a:noFill/>
-          <a:ln/>
-        </p:spPr>
-        <p:txBody>
-          <a:bodyPr wrap="square" lIns="0" tIns="0" rIns="0" bIns="0" rtlCol="0" anchor="ctr"/>
-          <a:lstStyle/>
-          <a:p>
-            <a:pPr algn="ctr" indent="0" marL="0">
-              <a:buNone/>
-            </a:pPr>
-            <a:r>
-              <a:rPr lang="en-US" sz="1600" b="1" dirty="0">
-                <a:solidFill>
-                  <a:srgbClr val="0D9488"/>
-                </a:solidFill>
-                <a:latin typeface="Trebuchet MS" pitchFamily="34" charset="0"/>
-                <a:ea typeface="Trebuchet MS" pitchFamily="34" charset="-122"/>
-                <a:cs typeface="Trebuchet MS" pitchFamily="34" charset="-120"/>
-              </a:rPr>
-              <a:t>·</a:t>
-            </a:r>
-            <a:endParaRPr lang="en-US" sz="1600" dirty="0"/>
-          </a:p>
-        </p:txBody>
-      </p:sp>
-      <p:sp>
-        <p:nvSpPr>
-          <p:cNvPr id="38" name="Shape 36"/>
-          <p:cNvSpPr/>
-          <p:nvPr/>
-        </p:nvSpPr>
-        <p:spPr>
-          <a:xfrm>
-            <a:off x="6858000" y="3364992"/>
-            <a:ext cx="1554480" cy="475488"/>
-          </a:xfrm>
-          <a:prstGeom prst="rect">
-            <a:avLst>
-              <a:gd name="adj" fmla="val 9615"/>
-            </a:avLst>
-          </a:prstGeom>
-          <a:solidFill>
-            <a:srgbClr val="FFFFFF"/>
-          </a:solidFill>
-          <a:ln w="12700">
-            <a:solidFill>
-              <a:srgbClr val="0D9488"/>
-            </a:solidFill>
-            <a:prstDash val="solid"/>
-          </a:ln>
-        </p:spPr>
-      </p:sp>
-      <p:sp>
-        <p:nvSpPr>
-          <p:cNvPr id="39" name="Text 37"/>
-          <p:cNvSpPr/>
-          <p:nvPr/>
-        </p:nvSpPr>
-        <p:spPr>
-          <a:xfrm>
-            <a:off x="6858000" y="3364992"/>
-            <a:ext cx="1554480" cy="475488"/>
-          </a:xfrm>
-          <a:prstGeom prst="rect">
-            <a:avLst/>
-          </a:prstGeom>
-          <a:noFill/>
-          <a:ln/>
-        </p:spPr>
-        <p:txBody>
-          <a:bodyPr wrap="square" lIns="0" tIns="0" rIns="0" bIns="0" rtlCol="0" anchor="ctr"/>
-          <a:lstStyle/>
-          <a:p>
-            <a:pPr algn="ctr" indent="0" marL="0">
-              <a:buNone/>
-            </a:pPr>
-            <a:r>
-              <a:rPr lang="en-US" sz="1400" b="1" dirty="0">
-                <a:solidFill>
-                  <a:srgbClr val="0D9488"/>
-                </a:solidFill>
-                <a:latin typeface="Trebuchet MS" pitchFamily="34" charset="0"/>
-                <a:ea typeface="Trebuchet MS" pitchFamily="34" charset="-122"/>
-                <a:cs typeface="Trebuchet MS" pitchFamily="34" charset="-120"/>
-              </a:rPr>
-              <a:t>ded</a:t>
-            </a:r>
-            <a:endParaRPr lang="en-US" sz="1400" dirty="0"/>
-          </a:p>
-        </p:txBody>
-      </p:sp>
-      <p:sp>
-        <p:nvSpPr>
-          <p:cNvPr id="40" name="Shape 38"/>
-          <p:cNvSpPr/>
-          <p:nvPr/>
-        </p:nvSpPr>
-        <p:spPr>
-          <a:xfrm>
-            <a:off x="365760" y="4096512"/>
-            <a:ext cx="1371600" cy="804672"/>
+              <a:t>Phonemes</a:t>
+            </a:r>
+            <a:endParaRPr lang="en-US" sz="1100" dirty="0"/>
+          </a:p>
+        </p:txBody>
+      </p:sp>
+      <p:sp>
+        <p:nvSpPr>
+          <p:cNvPr id="37" name="Shape 35"/>
+          <p:cNvSpPr/>
+          <p:nvPr/>
+        </p:nvSpPr>
+        <p:spPr>
+          <a:xfrm>
+            <a:off x="1874520" y="4096512"/>
+            <a:ext cx="6903720" cy="804672"/>
           </a:xfrm>
           <a:prstGeom prst="rect">
             <a:avLst>
@@ -32546,85 +32895,19 @@
             </a:avLst>
           </a:prstGeom>
           <a:solidFill>
-            <a:srgbClr val="E2E8F0"/>
+            <a:srgbClr val="F8FAFC"/>
           </a:solidFill>
           <a:ln w="12700">
             <a:solidFill>
               <a:srgbClr val="E2E8F0"/>
             </a:solidFill>
-            <a:prstDash val="solid"/>
-          </a:ln>
-        </p:spPr>
-      </p:sp>
-      <p:sp>
-        <p:nvSpPr>
-          <p:cNvPr id="41" name="Text 39"/>
-          <p:cNvSpPr/>
-          <p:nvPr/>
-        </p:nvSpPr>
-        <p:spPr>
-          <a:xfrm>
-            <a:off x="365760" y="4096512"/>
-            <a:ext cx="1371600" cy="804672"/>
-          </a:xfrm>
-          <a:prstGeom prst="rect">
-            <a:avLst/>
-          </a:prstGeom>
-          <a:noFill/>
-          <a:ln/>
-        </p:spPr>
-        <p:txBody>
-          <a:bodyPr wrap="square" lIns="0" tIns="0" rIns="0" bIns="0" rtlCol="0" anchor="ctr"/>
-          <a:lstStyle/>
-          <a:p>
-            <a:pPr algn="ctr" indent="0" marL="0">
-              <a:buNone/>
-            </a:pPr>
-            <a:r>
-              <a:rPr lang="en-US" sz="1100" b="1" dirty="0">
-                <a:solidFill>
-                  <a:srgbClr val="475569"/>
-                </a:solidFill>
-                <a:latin typeface="Trebuchet MS" pitchFamily="34" charset="0"/>
-                <a:ea typeface="Trebuchet MS" pitchFamily="34" charset="-122"/>
-                <a:cs typeface="Trebuchet MS" pitchFamily="34" charset="-120"/>
-              </a:rPr>
-              <a:t>Phonemes</a:t>
-            </a:r>
-            <a:endParaRPr lang="en-US" sz="1100" dirty="0"/>
-          </a:p>
-        </p:txBody>
-      </p:sp>
-      <p:sp>
-        <p:nvSpPr>
-          <p:cNvPr id="42" name="Shape 40"/>
-          <p:cNvSpPr/>
-          <p:nvPr/>
-        </p:nvSpPr>
-        <p:spPr>
-          <a:xfrm>
-            <a:off x="1874520" y="4096512"/>
-            <a:ext cx="6903720" cy="804672"/>
-          </a:xfrm>
-          <a:prstGeom prst="rect">
-            <a:avLst>
-              <a:gd name="adj" fmla="val 6818"/>
-            </a:avLst>
-          </a:prstGeom>
-          <a:solidFill>
-            <a:srgbClr val="F8FAFC"/>
-          </a:solidFill>
-          <a:ln w="12700">
-            <a:solidFill>
-              <a:srgbClr val="E2E8F0"/>
-            </a:solidFill>
             <a:prstDash val="dash"/>
           </a:ln>
         </p:spPr>
       </p:sp>
       <p:sp>
         <p:nvSpPr>
-          <p:cNvPr id="43" name="Text 41"/>
+          <p:cNvPr id="38" name="Text 36"/>
           <p:cNvSpPr/>
           <p:nvPr/>
         </p:nvSpPr>
@@ -32947,7 +33230,7 @@
                 <a:ea typeface="Calibri" pitchFamily="34" charset="-122"/>
                 <a:cs typeface="Calibri" pitchFamily="34" charset="-120"/>
               </a:rPr>
-              <a:t>Word Labs  •  wordlabs.app  •  Root: 'persuade' = to urge or convince someone</a:t>
+              <a:t>Word Labs  •  wordlabs.app  •  Root: 'persuade' = to convince or urge someone</a:t>
             </a:r>
             <a:endParaRPr lang="en-US" sz="800" dirty="0"/>
           </a:p>
@@ -33086,7 +33369,7 @@
                 <a:ea typeface="Trebuchet MS" pitchFamily="34" charset="-122"/>
                 <a:cs typeface="Trebuchet MS" pitchFamily="34" charset="-120"/>
               </a:rPr>
-              <a:t>unpersuaded</a:t>
+              <a:t>persuasion</a:t>
             </a:r>
             <a:endParaRPr lang="en-US" sz="2800" dirty="0"/>
           </a:p>
@@ -33166,7 +33449,7 @@
         </p:nvSpPr>
         <p:spPr>
           <a:xfrm>
-            <a:off x="2221992" y="2258568"/>
+            <a:off x="2938272" y="2258568"/>
             <a:ext cx="1828800" cy="292608"/>
           </a:xfrm>
           <a:prstGeom prst="rect">
@@ -33175,11 +33458,11 @@
             </a:avLst>
           </a:prstGeom>
           <a:solidFill>
-            <a:srgbClr val="DDD6FE"/>
+            <a:srgbClr val="CCFBF1"/>
           </a:solidFill>
           <a:ln w="19050">
             <a:solidFill>
-              <a:srgbClr val="7C3AED"/>
+              <a:srgbClr val="0D9488"/>
             </a:solidFill>
             <a:prstDash val="solid"/>
           </a:ln>
@@ -33200,7 +33483,7 @@
         </p:nvSpPr>
         <p:spPr>
           <a:xfrm>
-            <a:off x="2221992" y="2258568"/>
+            <a:off x="2938272" y="2258568"/>
             <a:ext cx="1828800" cy="292608"/>
           </a:xfrm>
           <a:prstGeom prst="rect">
@@ -33219,13 +33502,13 @@
             <a:r>
               <a:rPr lang="en-US" sz="1300" b="1" dirty="0">
                 <a:solidFill>
-                  <a:srgbClr val="4C1D95"/>
+                  <a:srgbClr val="0F766E"/>
                 </a:solidFill>
                 <a:latin typeface="Trebuchet MS" pitchFamily="34" charset="0"/>
                 <a:ea typeface="Trebuchet MS" pitchFamily="34" charset="-122"/>
                 <a:cs typeface="Trebuchet MS" pitchFamily="34" charset="-120"/>
               </a:rPr>
-              <a:t>un</a:t>
+              <a:t>persuade</a:t>
             </a:r>
             <a:endParaRPr lang="en-US" sz="1300" dirty="0"/>
           </a:p>
@@ -33239,7 +33522,7 @@
         </p:nvSpPr>
         <p:spPr>
           <a:xfrm>
-            <a:off x="2221992" y="2569464"/>
+            <a:off x="2938272" y="2569464"/>
             <a:ext cx="1828800" cy="201168"/>
           </a:xfrm>
           <a:prstGeom prst="rect">
@@ -33264,7 +33547,7 @@
                 <a:ea typeface="Calibri" pitchFamily="34" charset="-122"/>
                 <a:cs typeface="Calibri" pitchFamily="34" charset="-120"/>
               </a:rPr>
-              <a:t>not</a:t>
+              <a:t>to convince or urge</a:t>
             </a:r>
             <a:endParaRPr lang="en-US" sz="850" dirty="0"/>
           </a:p>
@@ -33272,13 +33555,52 @@
       </p:sp>
       <p:sp>
         <p:nvSpPr>
-          <p:cNvPr id="19" name="Shape 17"/>
-          <p:cNvSpPr/>
-          <p:nvPr/>
-        </p:nvSpPr>
-        <p:spPr>
-          <a:xfrm>
-            <a:off x="4370832" y="2258568"/>
+          <p:cNvPr id="19" name="Text 17"/>
+          <p:cNvSpPr/>
+          <p:nvPr/>
+        </p:nvSpPr>
+        <p:spPr>
+          <a:xfrm>
+            <a:off x="2938272" y="2752344"/>
+            <a:ext cx="1828800" cy="182880"/>
+          </a:xfrm>
+          <a:prstGeom prst="rect">
+            <a:avLst/>
+          </a:prstGeom>
+          <a:noFill/>
+          <a:ln/>
+        </p:spPr>
+        <p:txBody>
+          <a:bodyPr wrap="square" lIns="0" tIns="0" rIns="0" bIns="0" rtlCol="0" anchor="t"/>
+          <a:lstStyle/>
+          <a:p>
+            <a:pPr algn="ctr" indent="0" marL="0">
+              <a:buNone/>
+            </a:pPr>
+            <a:r>
+              <a:rPr lang="en-US" sz="700" i="1" dirty="0">
+                <a:solidFill>
+                  <a:srgbClr val="94A3B8"/>
+                </a:solidFill>
+                <a:latin typeface="Calibri" pitchFamily="34" charset="0"/>
+                <a:ea typeface="Calibri" pitchFamily="34" charset="-122"/>
+                <a:cs typeface="Calibri" pitchFamily="34" charset="-120"/>
+              </a:rPr>
+              <a:t>'suade' becomes 'suas' before suffix</a:t>
+            </a:r>
+            <a:endParaRPr lang="en-US" sz="700" dirty="0"/>
+          </a:p>
+        </p:txBody>
+      </p:sp>
+      <p:sp>
+        <p:nvSpPr>
+          <p:cNvPr id="20" name="Shape 18"/>
+          <p:cNvSpPr/>
+          <p:nvPr/>
+        </p:nvSpPr>
+        <p:spPr>
+          <a:xfrm>
+            <a:off x="5803392" y="2258568"/>
             <a:ext cx="1828800" cy="292608"/>
           </a:xfrm>
           <a:prstGeom prst="rect">
@@ -33287,11 +33609,11 @@
             </a:avLst>
           </a:prstGeom>
           <a:solidFill>
-            <a:srgbClr val="CCFBF1"/>
+            <a:srgbClr val="FCE7F3"/>
           </a:solidFill>
           <a:ln w="19050">
             <a:solidFill>
-              <a:srgbClr val="0D9488"/>
+              <a:srgbClr val="DB2777"/>
             </a:solidFill>
             <a:prstDash val="solid"/>
           </a:ln>
@@ -33306,13 +33628,13 @@
       </p:sp>
       <p:sp>
         <p:nvSpPr>
-          <p:cNvPr id="20" name="Text 18"/>
-          <p:cNvSpPr/>
-          <p:nvPr/>
-        </p:nvSpPr>
-        <p:spPr>
-          <a:xfrm>
-            <a:off x="4370832" y="2258568"/>
+          <p:cNvPr id="21" name="Text 19"/>
+          <p:cNvSpPr/>
+          <p:nvPr/>
+        </p:nvSpPr>
+        <p:spPr>
+          <a:xfrm>
+            <a:off x="5803392" y="2258568"/>
             <a:ext cx="1828800" cy="292608"/>
           </a:xfrm>
           <a:prstGeom prst="rect">
@@ -33331,13 +33653,13 @@
             <a:r>
               <a:rPr lang="en-US" sz="1300" b="1" dirty="0">
                 <a:solidFill>
-                  <a:srgbClr val="0F766E"/>
+                  <a:srgbClr val="9D174D"/>
                 </a:solidFill>
                 <a:latin typeface="Trebuchet MS" pitchFamily="34" charset="0"/>
                 <a:ea typeface="Trebuchet MS" pitchFamily="34" charset="-122"/>
                 <a:cs typeface="Trebuchet MS" pitchFamily="34" charset="-120"/>
               </a:rPr>
-              <a:t>persuade</a:t>
+              <a:t>ion</a:t>
             </a:r>
             <a:endParaRPr lang="en-US" sz="1300" dirty="0"/>
           </a:p>
@@ -33345,13 +33667,13 @@
       </p:sp>
       <p:sp>
         <p:nvSpPr>
-          <p:cNvPr id="21" name="Text 19"/>
-          <p:cNvSpPr/>
-          <p:nvPr/>
-        </p:nvSpPr>
-        <p:spPr>
-          <a:xfrm>
-            <a:off x="4370832" y="2569464"/>
+          <p:cNvPr id="22" name="Text 20"/>
+          <p:cNvSpPr/>
+          <p:nvPr/>
+        </p:nvSpPr>
+        <p:spPr>
+          <a:xfrm>
+            <a:off x="5803392" y="2569464"/>
             <a:ext cx="1828800" cy="201168"/>
           </a:xfrm>
           <a:prstGeom prst="rect">
@@ -33376,7 +33698,7 @@
                 <a:ea typeface="Calibri" pitchFamily="34" charset="-122"/>
                 <a:cs typeface="Calibri" pitchFamily="34" charset="-120"/>
               </a:rPr>
-              <a:t>to urge or convince</a:t>
+              <a:t>the act or result of</a:t>
             </a:r>
             <a:endParaRPr lang="en-US" sz="850" dirty="0"/>
           </a:p>
@@ -33384,13 +33706,13 @@
       </p:sp>
       <p:sp>
         <p:nvSpPr>
-          <p:cNvPr id="22" name="Text 20"/>
-          <p:cNvSpPr/>
-          <p:nvPr/>
-        </p:nvSpPr>
-        <p:spPr>
-          <a:xfrm>
-            <a:off x="4370832" y="2752344"/>
+          <p:cNvPr id="23" name="Text 21"/>
+          <p:cNvSpPr/>
+          <p:nvPr/>
+        </p:nvSpPr>
+        <p:spPr>
+          <a:xfrm>
+            <a:off x="5803392" y="2752344"/>
             <a:ext cx="1828800" cy="182880"/>
           </a:xfrm>
           <a:prstGeom prst="rect">
@@ -33415,7 +33737,7 @@
                 <a:ea typeface="Calibri" pitchFamily="34" charset="-122"/>
                 <a:cs typeface="Calibri" pitchFamily="34" charset="-120"/>
               </a:rPr>
-              <a:t>'e' dropped before vowel suffix</a:t>
+              <a:t>'sion' pronounced /zhun/ after vowel</a:t>
             </a:r>
             <a:endParaRPr lang="en-US" sz="700" dirty="0"/>
           </a:p>
@@ -33423,87 +33745,806 @@
       </p:sp>
       <p:sp>
         <p:nvSpPr>
-          <p:cNvPr id="23" name="Shape 21"/>
-          <p:cNvSpPr/>
-          <p:nvPr/>
-        </p:nvSpPr>
-        <p:spPr>
-          <a:xfrm>
-            <a:off x="6519672" y="2258568"/>
-            <a:ext cx="1828800" cy="292608"/>
+          <p:cNvPr id="24" name="Shape 22"/>
+          <p:cNvSpPr/>
+          <p:nvPr/>
+        </p:nvSpPr>
+        <p:spPr>
+          <a:xfrm>
+            <a:off x="365760" y="3273552"/>
+            <a:ext cx="1371600" cy="658368"/>
           </a:xfrm>
           <a:prstGeom prst="rect">
             <a:avLst>
-              <a:gd name="adj" fmla="val 25000"/>
+              <a:gd name="adj" fmla="val 8333"/>
             </a:avLst>
           </a:prstGeom>
           <a:solidFill>
-            <a:srgbClr val="FCE7F3"/>
-          </a:solidFill>
-          <a:ln w="19050">
-            <a:solidFill>
-              <a:srgbClr val="DB2777"/>
-            </a:solidFill>
-            <a:prstDash val="solid"/>
-          </a:ln>
-          <a:effectLst>
-            <a:outerShdw sx="100000" sy="100000" kx="0" ky="0" algn="bl" rotWithShape="0" blurRad="101600" dist="38100" dir="8100000">
-              <a:srgbClr val="000000">
-                <a:alpha val="12000"/>
-              </a:srgbClr>
-            </a:outerShdw>
-          </a:effectLst>
-        </p:spPr>
-      </p:sp>
-      <p:sp>
-        <p:nvSpPr>
-          <p:cNvPr id="24" name="Text 22"/>
-          <p:cNvSpPr/>
-          <p:nvPr/>
-        </p:nvSpPr>
-        <p:spPr>
-          <a:xfrm>
-            <a:off x="6519672" y="2258568"/>
-            <a:ext cx="1828800" cy="292608"/>
-          </a:xfrm>
-          <a:prstGeom prst="rect">
-            <a:avLst/>
-          </a:prstGeom>
-          <a:noFill/>
-          <a:ln/>
-        </p:spPr>
-        <p:txBody>
-          <a:bodyPr wrap="square" lIns="0" tIns="0" rIns="0" bIns="0" rtlCol="0" anchor="ctr"/>
-          <a:lstStyle/>
-          <a:p>
-            <a:pPr algn="ctr" indent="0" marL="0">
-              <a:buNone/>
-            </a:pPr>
-            <a:r>
-              <a:rPr lang="en-US" sz="1300" b="1" dirty="0">
-                <a:solidFill>
-                  <a:srgbClr val="9D174D"/>
+            <a:srgbClr val="E2E8F0"/>
+          </a:solidFill>
+          <a:ln w="12700">
+            <a:solidFill>
+              <a:srgbClr val="E2E8F0"/>
+            </a:solidFill>
+            <a:prstDash val="solid"/>
+          </a:ln>
+        </p:spPr>
+      </p:sp>
+      <p:sp>
+        <p:nvSpPr>
+          <p:cNvPr id="25" name="Text 23"/>
+          <p:cNvSpPr/>
+          <p:nvPr/>
+        </p:nvSpPr>
+        <p:spPr>
+          <a:xfrm>
+            <a:off x="365760" y="3273552"/>
+            <a:ext cx="1371600" cy="658368"/>
+          </a:xfrm>
+          <a:prstGeom prst="rect">
+            <a:avLst/>
+          </a:prstGeom>
+          <a:noFill/>
+          <a:ln/>
+        </p:spPr>
+        <p:txBody>
+          <a:bodyPr wrap="square" lIns="0" tIns="0" rIns="0" bIns="0" rtlCol="0" anchor="ctr"/>
+          <a:lstStyle/>
+          <a:p>
+            <a:pPr algn="ctr" indent="0" marL="0">
+              <a:buNone/>
+            </a:pPr>
+            <a:r>
+              <a:rPr lang="en-US" sz="1100" b="1" dirty="0">
+                <a:solidFill>
+                  <a:srgbClr val="475569"/>
                 </a:solidFill>
                 <a:latin typeface="Trebuchet MS" pitchFamily="34" charset="0"/>
                 <a:ea typeface="Trebuchet MS" pitchFamily="34" charset="-122"/>
                 <a:cs typeface="Trebuchet MS" pitchFamily="34" charset="-120"/>
               </a:rPr>
-              <a:t>ed</a:t>
-            </a:r>
-            <a:endParaRPr lang="en-US" sz="1300" dirty="0"/>
-          </a:p>
-        </p:txBody>
-      </p:sp>
-      <p:sp>
-        <p:nvSpPr>
-          <p:cNvPr id="25" name="Text 23"/>
-          <p:cNvSpPr/>
-          <p:nvPr/>
-        </p:nvSpPr>
-        <p:spPr>
-          <a:xfrm>
-            <a:off x="6519672" y="2569464"/>
-            <a:ext cx="1828800" cy="201168"/>
+              <a:t>Syllables</a:t>
+            </a:r>
+            <a:endParaRPr lang="en-US" sz="1100" dirty="0"/>
+          </a:p>
+        </p:txBody>
+      </p:sp>
+      <p:sp>
+        <p:nvSpPr>
+          <p:cNvPr id="26" name="Shape 24"/>
+          <p:cNvSpPr/>
+          <p:nvPr/>
+        </p:nvSpPr>
+        <p:spPr>
+          <a:xfrm>
+            <a:off x="1874520" y="3273552"/>
+            <a:ext cx="6903720" cy="658368"/>
+          </a:xfrm>
+          <a:prstGeom prst="rect">
+            <a:avLst>
+              <a:gd name="adj" fmla="val 8333"/>
+            </a:avLst>
+          </a:prstGeom>
+          <a:solidFill>
+            <a:srgbClr val="CCFBF1"/>
+          </a:solidFill>
+          <a:ln w="12700">
+            <a:solidFill>
+              <a:srgbClr val="0D9488"/>
+            </a:solidFill>
+            <a:prstDash val="solid"/>
+          </a:ln>
+        </p:spPr>
+      </p:sp>
+      <p:sp>
+        <p:nvSpPr>
+          <p:cNvPr id="27" name="Shape 25"/>
+          <p:cNvSpPr/>
+          <p:nvPr/>
+        </p:nvSpPr>
+        <p:spPr>
+          <a:xfrm>
+            <a:off x="2313432" y="3364992"/>
+            <a:ext cx="1645920" cy="475488"/>
+          </a:xfrm>
+          <a:prstGeom prst="rect">
+            <a:avLst>
+              <a:gd name="adj" fmla="val 9615"/>
+            </a:avLst>
+          </a:prstGeom>
+          <a:solidFill>
+            <a:srgbClr val="FFFFFF"/>
+          </a:solidFill>
+          <a:ln w="12700">
+            <a:solidFill>
+              <a:srgbClr val="0D9488"/>
+            </a:solidFill>
+            <a:prstDash val="solid"/>
+          </a:ln>
+        </p:spPr>
+      </p:sp>
+      <p:sp>
+        <p:nvSpPr>
+          <p:cNvPr id="28" name="Text 26"/>
+          <p:cNvSpPr/>
+          <p:nvPr/>
+        </p:nvSpPr>
+        <p:spPr>
+          <a:xfrm>
+            <a:off x="2313432" y="3364992"/>
+            <a:ext cx="1645920" cy="475488"/>
+          </a:xfrm>
+          <a:prstGeom prst="rect">
+            <a:avLst/>
+          </a:prstGeom>
+          <a:noFill/>
+          <a:ln/>
+        </p:spPr>
+        <p:txBody>
+          <a:bodyPr wrap="square" lIns="0" tIns="0" rIns="0" bIns="0" rtlCol="0" anchor="ctr"/>
+          <a:lstStyle/>
+          <a:p>
+            <a:pPr algn="ctr" indent="0" marL="0">
+              <a:buNone/>
+            </a:pPr>
+            <a:r>
+              <a:rPr lang="en-US" sz="1400" b="1" dirty="0">
+                <a:solidFill>
+                  <a:srgbClr val="0D9488"/>
+                </a:solidFill>
+                <a:latin typeface="Trebuchet MS" pitchFamily="34" charset="0"/>
+                <a:ea typeface="Trebuchet MS" pitchFamily="34" charset="-122"/>
+                <a:cs typeface="Trebuchet MS" pitchFamily="34" charset="-120"/>
+              </a:rPr>
+              <a:t>per</a:t>
+            </a:r>
+            <a:endParaRPr lang="en-US" sz="1400" dirty="0"/>
+          </a:p>
+        </p:txBody>
+      </p:sp>
+      <p:sp>
+        <p:nvSpPr>
+          <p:cNvPr id="29" name="Text 27"/>
+          <p:cNvSpPr/>
+          <p:nvPr/>
+        </p:nvSpPr>
+        <p:spPr>
+          <a:xfrm>
+            <a:off x="3959352" y="3364992"/>
+            <a:ext cx="411480" cy="475488"/>
+          </a:xfrm>
+          <a:prstGeom prst="rect">
+            <a:avLst/>
+          </a:prstGeom>
+          <a:noFill/>
+          <a:ln/>
+        </p:spPr>
+        <p:txBody>
+          <a:bodyPr wrap="square" lIns="0" tIns="0" rIns="0" bIns="0" rtlCol="0" anchor="ctr"/>
+          <a:lstStyle/>
+          <a:p>
+            <a:pPr algn="ctr" indent="0" marL="0">
+              <a:buNone/>
+            </a:pPr>
+            <a:r>
+              <a:rPr lang="en-US" sz="1600" b="1" dirty="0">
+                <a:solidFill>
+                  <a:srgbClr val="0D9488"/>
+                </a:solidFill>
+                <a:latin typeface="Trebuchet MS" pitchFamily="34" charset="0"/>
+                <a:ea typeface="Trebuchet MS" pitchFamily="34" charset="-122"/>
+                <a:cs typeface="Trebuchet MS" pitchFamily="34" charset="-120"/>
+              </a:rPr>
+              <a:t>·</a:t>
+            </a:r>
+            <a:endParaRPr lang="en-US" sz="1600" dirty="0"/>
+          </a:p>
+        </p:txBody>
+      </p:sp>
+      <p:sp>
+        <p:nvSpPr>
+          <p:cNvPr id="30" name="Shape 28"/>
+          <p:cNvSpPr/>
+          <p:nvPr/>
+        </p:nvSpPr>
+        <p:spPr>
+          <a:xfrm>
+            <a:off x="4370832" y="3364992"/>
+            <a:ext cx="1645920" cy="475488"/>
+          </a:xfrm>
+          <a:prstGeom prst="rect">
+            <a:avLst>
+              <a:gd name="adj" fmla="val 9615"/>
+            </a:avLst>
+          </a:prstGeom>
+          <a:solidFill>
+            <a:srgbClr val="FFFFFF"/>
+          </a:solidFill>
+          <a:ln w="12700">
+            <a:solidFill>
+              <a:srgbClr val="0D9488"/>
+            </a:solidFill>
+            <a:prstDash val="solid"/>
+          </a:ln>
+        </p:spPr>
+      </p:sp>
+      <p:sp>
+        <p:nvSpPr>
+          <p:cNvPr id="31" name="Text 29"/>
+          <p:cNvSpPr/>
+          <p:nvPr/>
+        </p:nvSpPr>
+        <p:spPr>
+          <a:xfrm>
+            <a:off x="4370832" y="3364992"/>
+            <a:ext cx="1645920" cy="475488"/>
+          </a:xfrm>
+          <a:prstGeom prst="rect">
+            <a:avLst/>
+          </a:prstGeom>
+          <a:noFill/>
+          <a:ln/>
+        </p:spPr>
+        <p:txBody>
+          <a:bodyPr wrap="square" lIns="0" tIns="0" rIns="0" bIns="0" rtlCol="0" anchor="ctr"/>
+          <a:lstStyle/>
+          <a:p>
+            <a:pPr algn="ctr" indent="0" marL="0">
+              <a:buNone/>
+            </a:pPr>
+            <a:r>
+              <a:rPr lang="en-US" sz="1400" b="1" dirty="0">
+                <a:solidFill>
+                  <a:srgbClr val="0D9488"/>
+                </a:solidFill>
+                <a:latin typeface="Trebuchet MS" pitchFamily="34" charset="0"/>
+                <a:ea typeface="Trebuchet MS" pitchFamily="34" charset="-122"/>
+                <a:cs typeface="Trebuchet MS" pitchFamily="34" charset="-120"/>
+              </a:rPr>
+              <a:t>sua</a:t>
+            </a:r>
+            <a:endParaRPr lang="en-US" sz="1400" dirty="0"/>
+          </a:p>
+        </p:txBody>
+      </p:sp>
+      <p:sp>
+        <p:nvSpPr>
+          <p:cNvPr id="32" name="Text 30"/>
+          <p:cNvSpPr/>
+          <p:nvPr/>
+        </p:nvSpPr>
+        <p:spPr>
+          <a:xfrm>
+            <a:off x="6016752" y="3364992"/>
+            <a:ext cx="411480" cy="475488"/>
+          </a:xfrm>
+          <a:prstGeom prst="rect">
+            <a:avLst/>
+          </a:prstGeom>
+          <a:noFill/>
+          <a:ln/>
+        </p:spPr>
+        <p:txBody>
+          <a:bodyPr wrap="square" lIns="0" tIns="0" rIns="0" bIns="0" rtlCol="0" anchor="ctr"/>
+          <a:lstStyle/>
+          <a:p>
+            <a:pPr algn="ctr" indent="0" marL="0">
+              <a:buNone/>
+            </a:pPr>
+            <a:r>
+              <a:rPr lang="en-US" sz="1600" b="1" dirty="0">
+                <a:solidFill>
+                  <a:srgbClr val="0D9488"/>
+                </a:solidFill>
+                <a:latin typeface="Trebuchet MS" pitchFamily="34" charset="0"/>
+                <a:ea typeface="Trebuchet MS" pitchFamily="34" charset="-122"/>
+                <a:cs typeface="Trebuchet MS" pitchFamily="34" charset="-120"/>
+              </a:rPr>
+              <a:t>·</a:t>
+            </a:r>
+            <a:endParaRPr lang="en-US" sz="1600" dirty="0"/>
+          </a:p>
+        </p:txBody>
+      </p:sp>
+      <p:sp>
+        <p:nvSpPr>
+          <p:cNvPr id="33" name="Shape 31"/>
+          <p:cNvSpPr/>
+          <p:nvPr/>
+        </p:nvSpPr>
+        <p:spPr>
+          <a:xfrm>
+            <a:off x="6428232" y="3364992"/>
+            <a:ext cx="1645920" cy="475488"/>
+          </a:xfrm>
+          <a:prstGeom prst="rect">
+            <a:avLst>
+              <a:gd name="adj" fmla="val 9615"/>
+            </a:avLst>
+          </a:prstGeom>
+          <a:solidFill>
+            <a:srgbClr val="FFFFFF"/>
+          </a:solidFill>
+          <a:ln w="12700">
+            <a:solidFill>
+              <a:srgbClr val="0D9488"/>
+            </a:solidFill>
+            <a:prstDash val="solid"/>
+          </a:ln>
+        </p:spPr>
+      </p:sp>
+      <p:sp>
+        <p:nvSpPr>
+          <p:cNvPr id="34" name="Text 32"/>
+          <p:cNvSpPr/>
+          <p:nvPr/>
+        </p:nvSpPr>
+        <p:spPr>
+          <a:xfrm>
+            <a:off x="6428232" y="3364992"/>
+            <a:ext cx="1645920" cy="475488"/>
+          </a:xfrm>
+          <a:prstGeom prst="rect">
+            <a:avLst/>
+          </a:prstGeom>
+          <a:noFill/>
+          <a:ln/>
+        </p:spPr>
+        <p:txBody>
+          <a:bodyPr wrap="square" lIns="0" tIns="0" rIns="0" bIns="0" rtlCol="0" anchor="ctr"/>
+          <a:lstStyle/>
+          <a:p>
+            <a:pPr algn="ctr" indent="0" marL="0">
+              <a:buNone/>
+            </a:pPr>
+            <a:r>
+              <a:rPr lang="en-US" sz="1400" b="1" dirty="0">
+                <a:solidFill>
+                  <a:srgbClr val="0D9488"/>
+                </a:solidFill>
+                <a:latin typeface="Trebuchet MS" pitchFamily="34" charset="0"/>
+                <a:ea typeface="Trebuchet MS" pitchFamily="34" charset="-122"/>
+                <a:cs typeface="Trebuchet MS" pitchFamily="34" charset="-120"/>
+              </a:rPr>
+              <a:t>sion</a:t>
+            </a:r>
+            <a:endParaRPr lang="en-US" sz="1400" dirty="0"/>
+          </a:p>
+        </p:txBody>
+      </p:sp>
+      <p:sp>
+        <p:nvSpPr>
+          <p:cNvPr id="35" name="Shape 33"/>
+          <p:cNvSpPr/>
+          <p:nvPr/>
+        </p:nvSpPr>
+        <p:spPr>
+          <a:xfrm>
+            <a:off x="365760" y="4096512"/>
+            <a:ext cx="1371600" cy="804672"/>
+          </a:xfrm>
+          <a:prstGeom prst="rect">
+            <a:avLst>
+              <a:gd name="adj" fmla="val 6818"/>
+            </a:avLst>
+          </a:prstGeom>
+          <a:solidFill>
+            <a:srgbClr val="E2E8F0"/>
+          </a:solidFill>
+          <a:ln w="12700">
+            <a:solidFill>
+              <a:srgbClr val="E2E8F0"/>
+            </a:solidFill>
+            <a:prstDash val="solid"/>
+          </a:ln>
+        </p:spPr>
+      </p:sp>
+      <p:sp>
+        <p:nvSpPr>
+          <p:cNvPr id="36" name="Text 34"/>
+          <p:cNvSpPr/>
+          <p:nvPr/>
+        </p:nvSpPr>
+        <p:spPr>
+          <a:xfrm>
+            <a:off x="365760" y="4096512"/>
+            <a:ext cx="1371600" cy="804672"/>
+          </a:xfrm>
+          <a:prstGeom prst="rect">
+            <a:avLst/>
+          </a:prstGeom>
+          <a:noFill/>
+          <a:ln/>
+        </p:spPr>
+        <p:txBody>
+          <a:bodyPr wrap="square" lIns="0" tIns="0" rIns="0" bIns="0" rtlCol="0" anchor="ctr"/>
+          <a:lstStyle/>
+          <a:p>
+            <a:pPr algn="ctr" indent="0" marL="0">
+              <a:buNone/>
+            </a:pPr>
+            <a:r>
+              <a:rPr lang="en-US" sz="1100" b="1" dirty="0">
+                <a:solidFill>
+                  <a:srgbClr val="475569"/>
+                </a:solidFill>
+                <a:latin typeface="Trebuchet MS" pitchFamily="34" charset="0"/>
+                <a:ea typeface="Trebuchet MS" pitchFamily="34" charset="-122"/>
+                <a:cs typeface="Trebuchet MS" pitchFamily="34" charset="-120"/>
+              </a:rPr>
+              <a:t>Phonemes</a:t>
+            </a:r>
+            <a:endParaRPr lang="en-US" sz="1100" dirty="0"/>
+          </a:p>
+        </p:txBody>
+      </p:sp>
+      <p:sp>
+        <p:nvSpPr>
+          <p:cNvPr id="37" name="Shape 35"/>
+          <p:cNvSpPr/>
+          <p:nvPr/>
+        </p:nvSpPr>
+        <p:spPr>
+          <a:xfrm>
+            <a:off x="1874520" y="4096512"/>
+            <a:ext cx="6903720" cy="804672"/>
+          </a:xfrm>
+          <a:prstGeom prst="rect">
+            <a:avLst>
+              <a:gd name="adj" fmla="val 6818"/>
+            </a:avLst>
+          </a:prstGeom>
+          <a:solidFill>
+            <a:srgbClr val="FCE7F3"/>
+          </a:solidFill>
+          <a:ln w="12700">
+            <a:solidFill>
+              <a:srgbClr val="DB2777"/>
+            </a:solidFill>
+            <a:prstDash val="solid"/>
+          </a:ln>
+        </p:spPr>
+      </p:sp>
+      <p:sp>
+        <p:nvSpPr>
+          <p:cNvPr id="38" name="Shape 36"/>
+          <p:cNvSpPr/>
+          <p:nvPr/>
+        </p:nvSpPr>
+        <p:spPr>
+          <a:xfrm>
+            <a:off x="2124837" y="4169664"/>
+            <a:ext cx="685800" cy="384048"/>
+          </a:xfrm>
+          <a:prstGeom prst="rect">
+            <a:avLst>
+              <a:gd name="adj" fmla="val 9524"/>
+            </a:avLst>
+          </a:prstGeom>
+          <a:solidFill>
+            <a:srgbClr val="FFFFFF"/>
+          </a:solidFill>
+          <a:ln w="12700">
+            <a:solidFill>
+              <a:srgbClr val="DB2777"/>
+            </a:solidFill>
+            <a:prstDash val="solid"/>
+          </a:ln>
+        </p:spPr>
+      </p:sp>
+      <p:sp>
+        <p:nvSpPr>
+          <p:cNvPr id="39" name="Text 37"/>
+          <p:cNvSpPr/>
+          <p:nvPr/>
+        </p:nvSpPr>
+        <p:spPr>
+          <a:xfrm>
+            <a:off x="2124837" y="4169664"/>
+            <a:ext cx="685800" cy="384048"/>
+          </a:xfrm>
+          <a:prstGeom prst="rect">
+            <a:avLst/>
+          </a:prstGeom>
+          <a:noFill/>
+          <a:ln/>
+        </p:spPr>
+        <p:txBody>
+          <a:bodyPr wrap="square" lIns="0" tIns="0" rIns="0" bIns="0" rtlCol="0" anchor="ctr"/>
+          <a:lstStyle/>
+          <a:p>
+            <a:pPr algn="ctr" indent="0" marL="0">
+              <a:buNone/>
+            </a:pPr>
+            <a:r>
+              <a:rPr lang="en-US" sz="900" b="1" dirty="0">
+                <a:solidFill>
+                  <a:srgbClr val="9D174D"/>
+                </a:solidFill>
+                <a:latin typeface="Trebuchet MS" pitchFamily="34" charset="0"/>
+                <a:ea typeface="Trebuchet MS" pitchFamily="34" charset="-122"/>
+                <a:cs typeface="Trebuchet MS" pitchFamily="34" charset="-120"/>
+              </a:rPr>
+              <a:t>p</a:t>
+            </a:r>
+            <a:endParaRPr lang="en-US" sz="900" dirty="0"/>
+          </a:p>
+        </p:txBody>
+      </p:sp>
+      <p:sp>
+        <p:nvSpPr>
+          <p:cNvPr id="40" name="Shape 38"/>
+          <p:cNvSpPr/>
+          <p:nvPr/>
+        </p:nvSpPr>
+        <p:spPr>
+          <a:xfrm>
+            <a:off x="3033522" y="4169664"/>
+            <a:ext cx="685800" cy="384048"/>
+          </a:xfrm>
+          <a:prstGeom prst="rect">
+            <a:avLst>
+              <a:gd name="adj" fmla="val 9524"/>
+            </a:avLst>
+          </a:prstGeom>
+          <a:solidFill>
+            <a:srgbClr val="FFFFFF"/>
+          </a:solidFill>
+          <a:ln w="12700">
+            <a:solidFill>
+              <a:srgbClr val="DB2777"/>
+            </a:solidFill>
+            <a:prstDash val="solid"/>
+          </a:ln>
+        </p:spPr>
+      </p:sp>
+      <p:sp>
+        <p:nvSpPr>
+          <p:cNvPr id="41" name="Text 39"/>
+          <p:cNvSpPr/>
+          <p:nvPr/>
+        </p:nvSpPr>
+        <p:spPr>
+          <a:xfrm>
+            <a:off x="3033522" y="4169664"/>
+            <a:ext cx="685800" cy="384048"/>
+          </a:xfrm>
+          <a:prstGeom prst="rect">
+            <a:avLst/>
+          </a:prstGeom>
+          <a:noFill/>
+          <a:ln/>
+        </p:spPr>
+        <p:txBody>
+          <a:bodyPr wrap="square" lIns="0" tIns="0" rIns="0" bIns="0" rtlCol="0" anchor="ctr"/>
+          <a:lstStyle/>
+          <a:p>
+            <a:pPr algn="ctr" indent="0" marL="0">
+              <a:buNone/>
+            </a:pPr>
+            <a:r>
+              <a:rPr lang="en-US" sz="900" b="1" dirty="0">
+                <a:solidFill>
+                  <a:srgbClr val="9D174D"/>
+                </a:solidFill>
+                <a:latin typeface="Trebuchet MS" pitchFamily="34" charset="0"/>
+                <a:ea typeface="Trebuchet MS" pitchFamily="34" charset="-122"/>
+                <a:cs typeface="Trebuchet MS" pitchFamily="34" charset="-120"/>
+              </a:rPr>
+              <a:t>er</a:t>
+            </a:r>
+            <a:endParaRPr lang="en-US" sz="900" dirty="0"/>
+          </a:p>
+        </p:txBody>
+      </p:sp>
+      <p:sp>
+        <p:nvSpPr>
+          <p:cNvPr id="42" name="Shape 40"/>
+          <p:cNvSpPr/>
+          <p:nvPr/>
+        </p:nvSpPr>
+        <p:spPr>
+          <a:xfrm>
+            <a:off x="3942207" y="4169664"/>
+            <a:ext cx="685800" cy="384048"/>
+          </a:xfrm>
+          <a:prstGeom prst="rect">
+            <a:avLst>
+              <a:gd name="adj" fmla="val 9524"/>
+            </a:avLst>
+          </a:prstGeom>
+          <a:solidFill>
+            <a:srgbClr val="FFFFFF"/>
+          </a:solidFill>
+          <a:ln w="12700">
+            <a:solidFill>
+              <a:srgbClr val="DB2777"/>
+            </a:solidFill>
+            <a:prstDash val="solid"/>
+          </a:ln>
+        </p:spPr>
+      </p:sp>
+      <p:sp>
+        <p:nvSpPr>
+          <p:cNvPr id="43" name="Text 41"/>
+          <p:cNvSpPr/>
+          <p:nvPr/>
+        </p:nvSpPr>
+        <p:spPr>
+          <a:xfrm>
+            <a:off x="3942207" y="4169664"/>
+            <a:ext cx="685800" cy="384048"/>
+          </a:xfrm>
+          <a:prstGeom prst="rect">
+            <a:avLst/>
+          </a:prstGeom>
+          <a:noFill/>
+          <a:ln/>
+        </p:spPr>
+        <p:txBody>
+          <a:bodyPr wrap="square" lIns="0" tIns="0" rIns="0" bIns="0" rtlCol="0" anchor="ctr"/>
+          <a:lstStyle/>
+          <a:p>
+            <a:pPr algn="ctr" indent="0" marL="0">
+              <a:buNone/>
+            </a:pPr>
+            <a:r>
+              <a:rPr lang="en-US" sz="900" b="1" dirty="0">
+                <a:solidFill>
+                  <a:srgbClr val="9D174D"/>
+                </a:solidFill>
+                <a:latin typeface="Trebuchet MS" pitchFamily="34" charset="0"/>
+                <a:ea typeface="Trebuchet MS" pitchFamily="34" charset="-122"/>
+                <a:cs typeface="Trebuchet MS" pitchFamily="34" charset="-120"/>
+              </a:rPr>
+              <a:t>s</a:t>
+            </a:r>
+            <a:endParaRPr lang="en-US" sz="900" dirty="0"/>
+          </a:p>
+        </p:txBody>
+      </p:sp>
+      <p:sp>
+        <p:nvSpPr>
+          <p:cNvPr id="44" name="Shape 42"/>
+          <p:cNvSpPr/>
+          <p:nvPr/>
+        </p:nvSpPr>
+        <p:spPr>
+          <a:xfrm>
+            <a:off x="4850892" y="4169664"/>
+            <a:ext cx="685800" cy="384048"/>
+          </a:xfrm>
+          <a:prstGeom prst="rect">
+            <a:avLst>
+              <a:gd name="adj" fmla="val 9524"/>
+            </a:avLst>
+          </a:prstGeom>
+          <a:solidFill>
+            <a:srgbClr val="FFFFFF"/>
+          </a:solidFill>
+          <a:ln w="12700">
+            <a:solidFill>
+              <a:srgbClr val="DB2777"/>
+            </a:solidFill>
+            <a:prstDash val="solid"/>
+          </a:ln>
+        </p:spPr>
+      </p:sp>
+      <p:sp>
+        <p:nvSpPr>
+          <p:cNvPr id="45" name="Text 43"/>
+          <p:cNvSpPr/>
+          <p:nvPr/>
+        </p:nvSpPr>
+        <p:spPr>
+          <a:xfrm>
+            <a:off x="4850892" y="4169664"/>
+            <a:ext cx="685800" cy="384048"/>
+          </a:xfrm>
+          <a:prstGeom prst="rect">
+            <a:avLst/>
+          </a:prstGeom>
+          <a:noFill/>
+          <a:ln/>
+        </p:spPr>
+        <p:txBody>
+          <a:bodyPr wrap="square" lIns="0" tIns="0" rIns="0" bIns="0" rtlCol="0" anchor="ctr"/>
+          <a:lstStyle/>
+          <a:p>
+            <a:pPr algn="ctr" indent="0" marL="0">
+              <a:buNone/>
+            </a:pPr>
+            <a:r>
+              <a:rPr lang="en-US" sz="900" b="1" dirty="0">
+                <a:solidFill>
+                  <a:srgbClr val="9D174D"/>
+                </a:solidFill>
+                <a:latin typeface="Trebuchet MS" pitchFamily="34" charset="0"/>
+                <a:ea typeface="Trebuchet MS" pitchFamily="34" charset="-122"/>
+                <a:cs typeface="Trebuchet MS" pitchFamily="34" charset="-120"/>
+              </a:rPr>
+              <a:t>ua</a:t>
+            </a:r>
+            <a:endParaRPr lang="en-US" sz="900" dirty="0"/>
+          </a:p>
+        </p:txBody>
+      </p:sp>
+      <p:sp>
+        <p:nvSpPr>
+          <p:cNvPr id="46" name="Shape 44"/>
+          <p:cNvSpPr/>
+          <p:nvPr/>
+        </p:nvSpPr>
+        <p:spPr>
+          <a:xfrm>
+            <a:off x="5759577" y="4169664"/>
+            <a:ext cx="685800" cy="384048"/>
+          </a:xfrm>
+          <a:prstGeom prst="rect">
+            <a:avLst>
+              <a:gd name="adj" fmla="val 9524"/>
+            </a:avLst>
+          </a:prstGeom>
+          <a:solidFill>
+            <a:srgbClr val="FFFFFF"/>
+          </a:solidFill>
+          <a:ln w="12700">
+            <a:solidFill>
+              <a:srgbClr val="DB2777"/>
+            </a:solidFill>
+            <a:prstDash val="solid"/>
+          </a:ln>
+        </p:spPr>
+      </p:sp>
+      <p:sp>
+        <p:nvSpPr>
+          <p:cNvPr id="47" name="Text 45"/>
+          <p:cNvSpPr/>
+          <p:nvPr/>
+        </p:nvSpPr>
+        <p:spPr>
+          <a:xfrm>
+            <a:off x="5759577" y="4169664"/>
+            <a:ext cx="685800" cy="384048"/>
+          </a:xfrm>
+          <a:prstGeom prst="rect">
+            <a:avLst/>
+          </a:prstGeom>
+          <a:noFill/>
+          <a:ln/>
+        </p:spPr>
+        <p:txBody>
+          <a:bodyPr wrap="square" lIns="0" tIns="0" rIns="0" bIns="0" rtlCol="0" anchor="ctr"/>
+          <a:lstStyle/>
+          <a:p>
+            <a:pPr algn="ctr" indent="0" marL="0">
+              <a:buNone/>
+            </a:pPr>
+            <a:r>
+              <a:rPr lang="en-US" sz="900" b="1" dirty="0">
+                <a:solidFill>
+                  <a:srgbClr val="9D174D"/>
+                </a:solidFill>
+                <a:latin typeface="Trebuchet MS" pitchFamily="34" charset="0"/>
+                <a:ea typeface="Trebuchet MS" pitchFamily="34" charset="-122"/>
+                <a:cs typeface="Trebuchet MS" pitchFamily="34" charset="-120"/>
+              </a:rPr>
+              <a:t>s</a:t>
+            </a:r>
+            <a:endParaRPr lang="en-US" sz="900" dirty="0"/>
+          </a:p>
+        </p:txBody>
+      </p:sp>
+      <p:sp>
+        <p:nvSpPr>
+          <p:cNvPr id="48" name="Text 46"/>
+          <p:cNvSpPr/>
+          <p:nvPr/>
+        </p:nvSpPr>
+        <p:spPr>
+          <a:xfrm>
+            <a:off x="5759577" y="4572000"/>
+            <a:ext cx="685800" cy="219456"/>
           </a:xfrm>
           <a:prstGeom prst="rect">
             <a:avLst/>
@@ -33519,1110 +34560,147 @@
               <a:buNone/>
             </a:pPr>
             <a:r>
-              <a:rPr lang="en-US" sz="850" dirty="0">
-                <a:solidFill>
-                  <a:srgbClr val="475569"/>
+              <a:rPr lang="en-US" sz="750" i="1" dirty="0">
+                <a:solidFill>
+                  <a:srgbClr val="94A3B8"/>
                 </a:solidFill>
                 <a:latin typeface="Calibri" pitchFamily="34" charset="0"/>
                 <a:ea typeface="Calibri" pitchFamily="34" charset="-122"/>
                 <a:cs typeface="Calibri" pitchFamily="34" charset="-120"/>
               </a:rPr>
-              <a:t>in the past</a:t>
-            </a:r>
-            <a:endParaRPr lang="en-US" sz="850" dirty="0"/>
-          </a:p>
-        </p:txBody>
-      </p:sp>
-      <p:sp>
-        <p:nvSpPr>
-          <p:cNvPr id="26" name="Shape 24"/>
-          <p:cNvSpPr/>
-          <p:nvPr/>
-        </p:nvSpPr>
-        <p:spPr>
-          <a:xfrm>
-            <a:off x="365760" y="3273552"/>
-            <a:ext cx="1371600" cy="658368"/>
+              <a:t>/zh/</a:t>
+            </a:r>
+            <a:endParaRPr lang="en-US" sz="750" dirty="0"/>
+          </a:p>
+        </p:txBody>
+      </p:sp>
+      <p:sp>
+        <p:nvSpPr>
+          <p:cNvPr id="49" name="Shape 47"/>
+          <p:cNvSpPr/>
+          <p:nvPr/>
+        </p:nvSpPr>
+        <p:spPr>
+          <a:xfrm>
+            <a:off x="6668262" y="4169664"/>
+            <a:ext cx="685800" cy="384048"/>
           </a:xfrm>
           <a:prstGeom prst="rect">
             <a:avLst>
-              <a:gd name="adj" fmla="val 8333"/>
+              <a:gd name="adj" fmla="val 9524"/>
             </a:avLst>
           </a:prstGeom>
           <a:solidFill>
-            <a:srgbClr val="E2E8F0"/>
-          </a:solidFill>
-          <a:ln w="12700">
-            <a:solidFill>
-              <a:srgbClr val="E2E8F0"/>
-            </a:solidFill>
-            <a:prstDash val="solid"/>
-          </a:ln>
-        </p:spPr>
-      </p:sp>
-      <p:sp>
-        <p:nvSpPr>
-          <p:cNvPr id="27" name="Text 25"/>
-          <p:cNvSpPr/>
-          <p:nvPr/>
-        </p:nvSpPr>
-        <p:spPr>
-          <a:xfrm>
-            <a:off x="365760" y="3273552"/>
-            <a:ext cx="1371600" cy="658368"/>
-          </a:xfrm>
-          <a:prstGeom prst="rect">
-            <a:avLst/>
-          </a:prstGeom>
-          <a:noFill/>
-          <a:ln/>
-        </p:spPr>
-        <p:txBody>
-          <a:bodyPr wrap="square" lIns="0" tIns="0" rIns="0" bIns="0" rtlCol="0" anchor="ctr"/>
-          <a:lstStyle/>
-          <a:p>
-            <a:pPr algn="ctr" indent="0" marL="0">
-              <a:buNone/>
-            </a:pPr>
-            <a:r>
-              <a:rPr lang="en-US" sz="1100" b="1" dirty="0">
-                <a:solidFill>
-                  <a:srgbClr val="475569"/>
+            <a:srgbClr val="FFFFFF"/>
+          </a:solidFill>
+          <a:ln w="12700">
+            <a:solidFill>
+              <a:srgbClr val="DB2777"/>
+            </a:solidFill>
+            <a:prstDash val="solid"/>
+          </a:ln>
+        </p:spPr>
+      </p:sp>
+      <p:sp>
+        <p:nvSpPr>
+          <p:cNvPr id="50" name="Text 48"/>
+          <p:cNvSpPr/>
+          <p:nvPr/>
+        </p:nvSpPr>
+        <p:spPr>
+          <a:xfrm>
+            <a:off x="6668262" y="4169664"/>
+            <a:ext cx="685800" cy="384048"/>
+          </a:xfrm>
+          <a:prstGeom prst="rect">
+            <a:avLst/>
+          </a:prstGeom>
+          <a:noFill/>
+          <a:ln/>
+        </p:spPr>
+        <p:txBody>
+          <a:bodyPr wrap="square" lIns="0" tIns="0" rIns="0" bIns="0" rtlCol="0" anchor="ctr"/>
+          <a:lstStyle/>
+          <a:p>
+            <a:pPr algn="ctr" indent="0" marL="0">
+              <a:buNone/>
+            </a:pPr>
+            <a:r>
+              <a:rPr lang="en-US" sz="900" b="1" dirty="0">
+                <a:solidFill>
+                  <a:srgbClr val="9D174D"/>
                 </a:solidFill>
                 <a:latin typeface="Trebuchet MS" pitchFamily="34" charset="0"/>
                 <a:ea typeface="Trebuchet MS" pitchFamily="34" charset="-122"/>
                 <a:cs typeface="Trebuchet MS" pitchFamily="34" charset="-120"/>
               </a:rPr>
-              <a:t>Syllables</a:t>
-            </a:r>
-            <a:endParaRPr lang="en-US" sz="1100" dirty="0"/>
-          </a:p>
-        </p:txBody>
-      </p:sp>
-      <p:sp>
-        <p:nvSpPr>
-          <p:cNvPr id="28" name="Shape 26"/>
-          <p:cNvSpPr/>
-          <p:nvPr/>
-        </p:nvSpPr>
-        <p:spPr>
-          <a:xfrm>
-            <a:off x="1874520" y="3273552"/>
-            <a:ext cx="6903720" cy="658368"/>
+              <a:t>io</a:t>
+            </a:r>
+            <a:endParaRPr lang="en-US" sz="900" dirty="0"/>
+          </a:p>
+        </p:txBody>
+      </p:sp>
+      <p:sp>
+        <p:nvSpPr>
+          <p:cNvPr id="51" name="Shape 49"/>
+          <p:cNvSpPr/>
+          <p:nvPr/>
+        </p:nvSpPr>
+        <p:spPr>
+          <a:xfrm>
+            <a:off x="7576947" y="4169664"/>
+            <a:ext cx="685800" cy="384048"/>
           </a:xfrm>
           <a:prstGeom prst="rect">
             <a:avLst>
-              <a:gd name="adj" fmla="val 8333"/>
+              <a:gd name="adj" fmla="val 9524"/>
             </a:avLst>
           </a:prstGeom>
           <a:solidFill>
-            <a:srgbClr val="CCFBF1"/>
-          </a:solidFill>
-          <a:ln w="12700">
-            <a:solidFill>
-              <a:srgbClr val="0D9488"/>
-            </a:solidFill>
-            <a:prstDash val="solid"/>
-          </a:ln>
-        </p:spPr>
-      </p:sp>
-      <p:sp>
-        <p:nvSpPr>
-          <p:cNvPr id="29" name="Shape 27"/>
-          <p:cNvSpPr/>
-          <p:nvPr/>
-        </p:nvSpPr>
-        <p:spPr>
-          <a:xfrm>
-            <a:off x="1975104" y="3364992"/>
-            <a:ext cx="1554480" cy="475488"/>
-          </a:xfrm>
-          <a:prstGeom prst="rect">
-            <a:avLst>
-              <a:gd name="adj" fmla="val 9615"/>
-            </a:avLst>
-          </a:prstGeom>
-          <a:solidFill>
             <a:srgbClr val="FFFFFF"/>
           </a:solidFill>
           <a:ln w="12700">
             <a:solidFill>
-              <a:srgbClr val="0D9488"/>
-            </a:solidFill>
-            <a:prstDash val="solid"/>
-          </a:ln>
-        </p:spPr>
-      </p:sp>
-      <p:sp>
-        <p:nvSpPr>
-          <p:cNvPr id="30" name="Text 28"/>
-          <p:cNvSpPr/>
-          <p:nvPr/>
-        </p:nvSpPr>
-        <p:spPr>
-          <a:xfrm>
-            <a:off x="1975104" y="3364992"/>
-            <a:ext cx="1554480" cy="475488"/>
-          </a:xfrm>
-          <a:prstGeom prst="rect">
-            <a:avLst/>
-          </a:prstGeom>
-          <a:noFill/>
-          <a:ln/>
-        </p:spPr>
-        <p:txBody>
-          <a:bodyPr wrap="square" lIns="0" tIns="0" rIns="0" bIns="0" rtlCol="0" anchor="ctr"/>
-          <a:lstStyle/>
-          <a:p>
-            <a:pPr algn="ctr" indent="0" marL="0">
-              <a:buNone/>
-            </a:pPr>
-            <a:r>
-              <a:rPr lang="en-US" sz="1400" b="1" dirty="0">
-                <a:solidFill>
-                  <a:srgbClr val="0D9488"/>
+              <a:srgbClr val="DB2777"/>
+            </a:solidFill>
+            <a:prstDash val="solid"/>
+          </a:ln>
+        </p:spPr>
+      </p:sp>
+      <p:sp>
+        <p:nvSpPr>
+          <p:cNvPr id="52" name="Text 50"/>
+          <p:cNvSpPr/>
+          <p:nvPr/>
+        </p:nvSpPr>
+        <p:spPr>
+          <a:xfrm>
+            <a:off x="7576947" y="4169664"/>
+            <a:ext cx="685800" cy="384048"/>
+          </a:xfrm>
+          <a:prstGeom prst="rect">
+            <a:avLst/>
+          </a:prstGeom>
+          <a:noFill/>
+          <a:ln/>
+        </p:spPr>
+        <p:txBody>
+          <a:bodyPr wrap="square" lIns="0" tIns="0" rIns="0" bIns="0" rtlCol="0" anchor="ctr"/>
+          <a:lstStyle/>
+          <a:p>
+            <a:pPr algn="ctr" indent="0" marL="0">
+              <a:buNone/>
+            </a:pPr>
+            <a:r>
+              <a:rPr lang="en-US" sz="900" b="1" dirty="0">
+                <a:solidFill>
+                  <a:srgbClr val="9D174D"/>
                 </a:solidFill>
                 <a:latin typeface="Trebuchet MS" pitchFamily="34" charset="0"/>
                 <a:ea typeface="Trebuchet MS" pitchFamily="34" charset="-122"/>
                 <a:cs typeface="Trebuchet MS" pitchFamily="34" charset="-120"/>
               </a:rPr>
-              <a:t>un</a:t>
-            </a:r>
-            <a:endParaRPr lang="en-US" sz="1400" dirty="0"/>
-          </a:p>
-        </p:txBody>
-      </p:sp>
-      <p:sp>
-        <p:nvSpPr>
-          <p:cNvPr id="31" name="Text 29"/>
-          <p:cNvSpPr/>
-          <p:nvPr/>
-        </p:nvSpPr>
-        <p:spPr>
-          <a:xfrm>
-            <a:off x="3529584" y="3364992"/>
-            <a:ext cx="73152" cy="475488"/>
-          </a:xfrm>
-          <a:prstGeom prst="rect">
-            <a:avLst/>
-          </a:prstGeom>
-          <a:noFill/>
-          <a:ln/>
-        </p:spPr>
-        <p:txBody>
-          <a:bodyPr wrap="square" lIns="0" tIns="0" rIns="0" bIns="0" rtlCol="0" anchor="ctr"/>
-          <a:lstStyle/>
-          <a:p>
-            <a:pPr algn="ctr" indent="0" marL="0">
-              <a:buNone/>
-            </a:pPr>
-            <a:r>
-              <a:rPr lang="en-US" sz="1600" b="1" dirty="0">
-                <a:solidFill>
-                  <a:srgbClr val="0D9488"/>
-                </a:solidFill>
-                <a:latin typeface="Trebuchet MS" pitchFamily="34" charset="0"/>
-                <a:ea typeface="Trebuchet MS" pitchFamily="34" charset="-122"/>
-                <a:cs typeface="Trebuchet MS" pitchFamily="34" charset="-120"/>
-              </a:rPr>
-              <a:t>·</a:t>
-            </a:r>
-            <a:endParaRPr lang="en-US" sz="1600" dirty="0"/>
-          </a:p>
-        </p:txBody>
-      </p:sp>
-      <p:sp>
-        <p:nvSpPr>
-          <p:cNvPr id="32" name="Shape 30"/>
-          <p:cNvSpPr/>
-          <p:nvPr/>
-        </p:nvSpPr>
-        <p:spPr>
-          <a:xfrm>
-            <a:off x="3602736" y="3364992"/>
-            <a:ext cx="1554480" cy="475488"/>
-          </a:xfrm>
-          <a:prstGeom prst="rect">
-            <a:avLst>
-              <a:gd name="adj" fmla="val 9615"/>
-            </a:avLst>
-          </a:prstGeom>
-          <a:solidFill>
-            <a:srgbClr val="FFFFFF"/>
-          </a:solidFill>
-          <a:ln w="12700">
-            <a:solidFill>
-              <a:srgbClr val="0D9488"/>
-            </a:solidFill>
-            <a:prstDash val="solid"/>
-          </a:ln>
-        </p:spPr>
-      </p:sp>
-      <p:sp>
-        <p:nvSpPr>
-          <p:cNvPr id="33" name="Text 31"/>
-          <p:cNvSpPr/>
-          <p:nvPr/>
-        </p:nvSpPr>
-        <p:spPr>
-          <a:xfrm>
-            <a:off x="3602736" y="3364992"/>
-            <a:ext cx="1554480" cy="475488"/>
-          </a:xfrm>
-          <a:prstGeom prst="rect">
-            <a:avLst/>
-          </a:prstGeom>
-          <a:noFill/>
-          <a:ln/>
-        </p:spPr>
-        <p:txBody>
-          <a:bodyPr wrap="square" lIns="0" tIns="0" rIns="0" bIns="0" rtlCol="0" anchor="ctr"/>
-          <a:lstStyle/>
-          <a:p>
-            <a:pPr algn="ctr" indent="0" marL="0">
-              <a:buNone/>
-            </a:pPr>
-            <a:r>
-              <a:rPr lang="en-US" sz="1400" b="1" dirty="0">
-                <a:solidFill>
-                  <a:srgbClr val="0D9488"/>
-                </a:solidFill>
-                <a:latin typeface="Trebuchet MS" pitchFamily="34" charset="0"/>
-                <a:ea typeface="Trebuchet MS" pitchFamily="34" charset="-122"/>
-                <a:cs typeface="Trebuchet MS" pitchFamily="34" charset="-120"/>
-              </a:rPr>
-              <a:t>per</a:t>
-            </a:r>
-            <a:endParaRPr lang="en-US" sz="1400" dirty="0"/>
-          </a:p>
-        </p:txBody>
-      </p:sp>
-      <p:sp>
-        <p:nvSpPr>
-          <p:cNvPr id="34" name="Text 32"/>
-          <p:cNvSpPr/>
-          <p:nvPr/>
-        </p:nvSpPr>
-        <p:spPr>
-          <a:xfrm>
-            <a:off x="5157216" y="3364992"/>
-            <a:ext cx="73152" cy="475488"/>
-          </a:xfrm>
-          <a:prstGeom prst="rect">
-            <a:avLst/>
-          </a:prstGeom>
-          <a:noFill/>
-          <a:ln/>
-        </p:spPr>
-        <p:txBody>
-          <a:bodyPr wrap="square" lIns="0" tIns="0" rIns="0" bIns="0" rtlCol="0" anchor="ctr"/>
-          <a:lstStyle/>
-          <a:p>
-            <a:pPr algn="ctr" indent="0" marL="0">
-              <a:buNone/>
-            </a:pPr>
-            <a:r>
-              <a:rPr lang="en-US" sz="1600" b="1" dirty="0">
-                <a:solidFill>
-                  <a:srgbClr val="0D9488"/>
-                </a:solidFill>
-                <a:latin typeface="Trebuchet MS" pitchFamily="34" charset="0"/>
-                <a:ea typeface="Trebuchet MS" pitchFamily="34" charset="-122"/>
-                <a:cs typeface="Trebuchet MS" pitchFamily="34" charset="-120"/>
-              </a:rPr>
-              <a:t>·</a:t>
-            </a:r>
-            <a:endParaRPr lang="en-US" sz="1600" dirty="0"/>
-          </a:p>
-        </p:txBody>
-      </p:sp>
-      <p:sp>
-        <p:nvSpPr>
-          <p:cNvPr id="35" name="Shape 33"/>
-          <p:cNvSpPr/>
-          <p:nvPr/>
-        </p:nvSpPr>
-        <p:spPr>
-          <a:xfrm>
-            <a:off x="5230368" y="3364992"/>
-            <a:ext cx="1554480" cy="475488"/>
-          </a:xfrm>
-          <a:prstGeom prst="rect">
-            <a:avLst>
-              <a:gd name="adj" fmla="val 9615"/>
-            </a:avLst>
-          </a:prstGeom>
-          <a:solidFill>
-            <a:srgbClr val="FFFFFF"/>
-          </a:solidFill>
-          <a:ln w="12700">
-            <a:solidFill>
-              <a:srgbClr val="0D9488"/>
-            </a:solidFill>
-            <a:prstDash val="solid"/>
-          </a:ln>
-        </p:spPr>
-      </p:sp>
-      <p:sp>
-        <p:nvSpPr>
-          <p:cNvPr id="36" name="Text 34"/>
-          <p:cNvSpPr/>
-          <p:nvPr/>
-        </p:nvSpPr>
-        <p:spPr>
-          <a:xfrm>
-            <a:off x="5230368" y="3364992"/>
-            <a:ext cx="1554480" cy="475488"/>
-          </a:xfrm>
-          <a:prstGeom prst="rect">
-            <a:avLst/>
-          </a:prstGeom>
-          <a:noFill/>
-          <a:ln/>
-        </p:spPr>
-        <p:txBody>
-          <a:bodyPr wrap="square" lIns="0" tIns="0" rIns="0" bIns="0" rtlCol="0" anchor="ctr"/>
-          <a:lstStyle/>
-          <a:p>
-            <a:pPr algn="ctr" indent="0" marL="0">
-              <a:buNone/>
-            </a:pPr>
-            <a:r>
-              <a:rPr lang="en-US" sz="1400" b="1" dirty="0">
-                <a:solidFill>
-                  <a:srgbClr val="0D9488"/>
-                </a:solidFill>
-                <a:latin typeface="Trebuchet MS" pitchFamily="34" charset="0"/>
-                <a:ea typeface="Trebuchet MS" pitchFamily="34" charset="-122"/>
-                <a:cs typeface="Trebuchet MS" pitchFamily="34" charset="-120"/>
-              </a:rPr>
-              <a:t>sua</a:t>
-            </a:r>
-            <a:endParaRPr lang="en-US" sz="1400" dirty="0"/>
-          </a:p>
-        </p:txBody>
-      </p:sp>
-      <p:sp>
-        <p:nvSpPr>
-          <p:cNvPr id="37" name="Text 35"/>
-          <p:cNvSpPr/>
-          <p:nvPr/>
-        </p:nvSpPr>
-        <p:spPr>
-          <a:xfrm>
-            <a:off x="6784848" y="3364992"/>
-            <a:ext cx="73152" cy="475488"/>
-          </a:xfrm>
-          <a:prstGeom prst="rect">
-            <a:avLst/>
-          </a:prstGeom>
-          <a:noFill/>
-          <a:ln/>
-        </p:spPr>
-        <p:txBody>
-          <a:bodyPr wrap="square" lIns="0" tIns="0" rIns="0" bIns="0" rtlCol="0" anchor="ctr"/>
-          <a:lstStyle/>
-          <a:p>
-            <a:pPr algn="ctr" indent="0" marL="0">
-              <a:buNone/>
-            </a:pPr>
-            <a:r>
-              <a:rPr lang="en-US" sz="1600" b="1" dirty="0">
-                <a:solidFill>
-                  <a:srgbClr val="0D9488"/>
-                </a:solidFill>
-                <a:latin typeface="Trebuchet MS" pitchFamily="34" charset="0"/>
-                <a:ea typeface="Trebuchet MS" pitchFamily="34" charset="-122"/>
-                <a:cs typeface="Trebuchet MS" pitchFamily="34" charset="-120"/>
-              </a:rPr>
-              <a:t>·</a:t>
-            </a:r>
-            <a:endParaRPr lang="en-US" sz="1600" dirty="0"/>
-          </a:p>
-        </p:txBody>
-      </p:sp>
-      <p:sp>
-        <p:nvSpPr>
-          <p:cNvPr id="38" name="Shape 36"/>
-          <p:cNvSpPr/>
-          <p:nvPr/>
-        </p:nvSpPr>
-        <p:spPr>
-          <a:xfrm>
-            <a:off x="6858000" y="3364992"/>
-            <a:ext cx="1554480" cy="475488"/>
-          </a:xfrm>
-          <a:prstGeom prst="rect">
-            <a:avLst>
-              <a:gd name="adj" fmla="val 9615"/>
-            </a:avLst>
-          </a:prstGeom>
-          <a:solidFill>
-            <a:srgbClr val="FFFFFF"/>
-          </a:solidFill>
-          <a:ln w="12700">
-            <a:solidFill>
-              <a:srgbClr val="0D9488"/>
-            </a:solidFill>
-            <a:prstDash val="solid"/>
-          </a:ln>
-        </p:spPr>
-      </p:sp>
-      <p:sp>
-        <p:nvSpPr>
-          <p:cNvPr id="39" name="Text 37"/>
-          <p:cNvSpPr/>
-          <p:nvPr/>
-        </p:nvSpPr>
-        <p:spPr>
-          <a:xfrm>
-            <a:off x="6858000" y="3364992"/>
-            <a:ext cx="1554480" cy="475488"/>
-          </a:xfrm>
-          <a:prstGeom prst="rect">
-            <a:avLst/>
-          </a:prstGeom>
-          <a:noFill/>
-          <a:ln/>
-        </p:spPr>
-        <p:txBody>
-          <a:bodyPr wrap="square" lIns="0" tIns="0" rIns="0" bIns="0" rtlCol="0" anchor="ctr"/>
-          <a:lstStyle/>
-          <a:p>
-            <a:pPr algn="ctr" indent="0" marL="0">
-              <a:buNone/>
-            </a:pPr>
-            <a:r>
-              <a:rPr lang="en-US" sz="1400" b="1" dirty="0">
-                <a:solidFill>
-                  <a:srgbClr val="0D9488"/>
-                </a:solidFill>
-                <a:latin typeface="Trebuchet MS" pitchFamily="34" charset="0"/>
-                <a:ea typeface="Trebuchet MS" pitchFamily="34" charset="-122"/>
-                <a:cs typeface="Trebuchet MS" pitchFamily="34" charset="-120"/>
-              </a:rPr>
-              <a:t>ded</a:t>
-            </a:r>
-            <a:endParaRPr lang="en-US" sz="1400" dirty="0"/>
-          </a:p>
-        </p:txBody>
-      </p:sp>
-      <p:sp>
-        <p:nvSpPr>
-          <p:cNvPr id="40" name="Shape 38"/>
-          <p:cNvSpPr/>
-          <p:nvPr/>
-        </p:nvSpPr>
-        <p:spPr>
-          <a:xfrm>
-            <a:off x="365760" y="4096512"/>
-            <a:ext cx="1371600" cy="804672"/>
-          </a:xfrm>
-          <a:prstGeom prst="rect">
-            <a:avLst>
-              <a:gd name="adj" fmla="val 6818"/>
-            </a:avLst>
-          </a:prstGeom>
-          <a:solidFill>
-            <a:srgbClr val="E2E8F0"/>
-          </a:solidFill>
-          <a:ln w="12700">
-            <a:solidFill>
-              <a:srgbClr val="E2E8F0"/>
-            </a:solidFill>
-            <a:prstDash val="solid"/>
-          </a:ln>
-        </p:spPr>
-      </p:sp>
-      <p:sp>
-        <p:nvSpPr>
-          <p:cNvPr id="41" name="Text 39"/>
-          <p:cNvSpPr/>
-          <p:nvPr/>
-        </p:nvSpPr>
-        <p:spPr>
-          <a:xfrm>
-            <a:off x="365760" y="4096512"/>
-            <a:ext cx="1371600" cy="804672"/>
-          </a:xfrm>
-          <a:prstGeom prst="rect">
-            <a:avLst/>
-          </a:prstGeom>
-          <a:noFill/>
-          <a:ln/>
-        </p:spPr>
-        <p:txBody>
-          <a:bodyPr wrap="square" lIns="0" tIns="0" rIns="0" bIns="0" rtlCol="0" anchor="ctr"/>
-          <a:lstStyle/>
-          <a:p>
-            <a:pPr algn="ctr" indent="0" marL="0">
-              <a:buNone/>
-            </a:pPr>
-            <a:r>
-              <a:rPr lang="en-US" sz="1100" b="1" dirty="0">
-                <a:solidFill>
-                  <a:srgbClr val="475569"/>
-                </a:solidFill>
-                <a:latin typeface="Trebuchet MS" pitchFamily="34" charset="0"/>
-                <a:ea typeface="Trebuchet MS" pitchFamily="34" charset="-122"/>
-                <a:cs typeface="Trebuchet MS" pitchFamily="34" charset="-120"/>
-              </a:rPr>
-              <a:t>Phonemes</a:t>
-            </a:r>
-            <a:endParaRPr lang="en-US" sz="1100" dirty="0"/>
-          </a:p>
-        </p:txBody>
-      </p:sp>
-      <p:sp>
-        <p:nvSpPr>
-          <p:cNvPr id="42" name="Shape 40"/>
-          <p:cNvSpPr/>
-          <p:nvPr/>
-        </p:nvSpPr>
-        <p:spPr>
-          <a:xfrm>
-            <a:off x="1874520" y="4096512"/>
-            <a:ext cx="6903720" cy="658368"/>
-          </a:xfrm>
-          <a:prstGeom prst="rect">
-            <a:avLst>
-              <a:gd name="adj" fmla="val 8333"/>
-            </a:avLst>
-          </a:prstGeom>
-          <a:solidFill>
-            <a:srgbClr val="FCE7F3"/>
-          </a:solidFill>
-          <a:ln w="12700">
-            <a:solidFill>
-              <a:srgbClr val="DB2777"/>
-            </a:solidFill>
-            <a:prstDash val="solid"/>
-          </a:ln>
-        </p:spPr>
-      </p:sp>
-      <p:sp>
-        <p:nvSpPr>
-          <p:cNvPr id="43" name="Shape 41"/>
-          <p:cNvSpPr/>
-          <p:nvPr/>
-        </p:nvSpPr>
-        <p:spPr>
-          <a:xfrm>
-            <a:off x="2023872" y="4169664"/>
-            <a:ext cx="685800" cy="475488"/>
-          </a:xfrm>
-          <a:prstGeom prst="rect">
-            <a:avLst>
-              <a:gd name="adj" fmla="val 7692"/>
-            </a:avLst>
-          </a:prstGeom>
-          <a:solidFill>
-            <a:srgbClr val="FFFFFF"/>
-          </a:solidFill>
-          <a:ln w="12700">
-            <a:solidFill>
-              <a:srgbClr val="DB2777"/>
-            </a:solidFill>
-            <a:prstDash val="solid"/>
-          </a:ln>
-        </p:spPr>
-      </p:sp>
-      <p:sp>
-        <p:nvSpPr>
-          <p:cNvPr id="44" name="Text 42"/>
-          <p:cNvSpPr/>
-          <p:nvPr/>
-        </p:nvSpPr>
-        <p:spPr>
-          <a:xfrm>
-            <a:off x="2023872" y="4169664"/>
-            <a:ext cx="685800" cy="475488"/>
-          </a:xfrm>
-          <a:prstGeom prst="rect">
-            <a:avLst/>
-          </a:prstGeom>
-          <a:noFill/>
-          <a:ln/>
-        </p:spPr>
-        <p:txBody>
-          <a:bodyPr wrap="square" lIns="0" tIns="0" rIns="0" bIns="0" rtlCol="0" anchor="ctr"/>
-          <a:lstStyle/>
-          <a:p>
-            <a:pPr algn="ctr" indent="0" marL="0">
-              <a:buNone/>
-            </a:pPr>
-            <a:r>
-              <a:rPr lang="en-US" sz="900" b="1" dirty="0">
-                <a:solidFill>
-                  <a:srgbClr val="9D174D"/>
-                </a:solidFill>
-                <a:latin typeface="Trebuchet MS" pitchFamily="34" charset="0"/>
-                <a:ea typeface="Trebuchet MS" pitchFamily="34" charset="-122"/>
-                <a:cs typeface="Trebuchet MS" pitchFamily="34" charset="-120"/>
-              </a:rPr>
-              <a:t>u</a:t>
-            </a:r>
-            <a:endParaRPr lang="en-US" sz="900" dirty="0"/>
-          </a:p>
-        </p:txBody>
-      </p:sp>
-      <p:sp>
-        <p:nvSpPr>
-          <p:cNvPr id="45" name="Shape 43"/>
-          <p:cNvSpPr/>
-          <p:nvPr/>
-        </p:nvSpPr>
-        <p:spPr>
-          <a:xfrm>
-            <a:off x="2831592" y="4169664"/>
-            <a:ext cx="685800" cy="475488"/>
-          </a:xfrm>
-          <a:prstGeom prst="rect">
-            <a:avLst>
-              <a:gd name="adj" fmla="val 7692"/>
-            </a:avLst>
-          </a:prstGeom>
-          <a:solidFill>
-            <a:srgbClr val="FFFFFF"/>
-          </a:solidFill>
-          <a:ln w="12700">
-            <a:solidFill>
-              <a:srgbClr val="DB2777"/>
-            </a:solidFill>
-            <a:prstDash val="solid"/>
-          </a:ln>
-        </p:spPr>
-      </p:sp>
-      <p:sp>
-        <p:nvSpPr>
-          <p:cNvPr id="46" name="Text 44"/>
-          <p:cNvSpPr/>
-          <p:nvPr/>
-        </p:nvSpPr>
-        <p:spPr>
-          <a:xfrm>
-            <a:off x="2831592" y="4169664"/>
-            <a:ext cx="685800" cy="475488"/>
-          </a:xfrm>
-          <a:prstGeom prst="rect">
-            <a:avLst/>
-          </a:prstGeom>
-          <a:noFill/>
-          <a:ln/>
-        </p:spPr>
-        <p:txBody>
-          <a:bodyPr wrap="square" lIns="0" tIns="0" rIns="0" bIns="0" rtlCol="0" anchor="ctr"/>
-          <a:lstStyle/>
-          <a:p>
-            <a:pPr algn="ctr" indent="0" marL="0">
-              <a:buNone/>
-            </a:pPr>
-            <a:r>
-              <a:rPr lang="en-US" sz="900" b="1" dirty="0">
-                <a:solidFill>
-                  <a:srgbClr val="9D174D"/>
-                </a:solidFill>
-                <a:latin typeface="Trebuchet MS" pitchFamily="34" charset="0"/>
-                <a:ea typeface="Trebuchet MS" pitchFamily="34" charset="-122"/>
-                <a:cs typeface="Trebuchet MS" pitchFamily="34" charset="-120"/>
-              </a:rPr>
               <a:t>n</a:t>
-            </a:r>
-            <a:endParaRPr lang="en-US" sz="900" dirty="0"/>
-          </a:p>
-        </p:txBody>
-      </p:sp>
-      <p:sp>
-        <p:nvSpPr>
-          <p:cNvPr id="47" name="Shape 45"/>
-          <p:cNvSpPr/>
-          <p:nvPr/>
-        </p:nvSpPr>
-        <p:spPr>
-          <a:xfrm>
-            <a:off x="3639312" y="4169664"/>
-            <a:ext cx="685800" cy="475488"/>
-          </a:xfrm>
-          <a:prstGeom prst="rect">
-            <a:avLst>
-              <a:gd name="adj" fmla="val 7692"/>
-            </a:avLst>
-          </a:prstGeom>
-          <a:solidFill>
-            <a:srgbClr val="FFFFFF"/>
-          </a:solidFill>
-          <a:ln w="12700">
-            <a:solidFill>
-              <a:srgbClr val="DB2777"/>
-            </a:solidFill>
-            <a:prstDash val="solid"/>
-          </a:ln>
-        </p:spPr>
-      </p:sp>
-      <p:sp>
-        <p:nvSpPr>
-          <p:cNvPr id="48" name="Text 46"/>
-          <p:cNvSpPr/>
-          <p:nvPr/>
-        </p:nvSpPr>
-        <p:spPr>
-          <a:xfrm>
-            <a:off x="3639312" y="4169664"/>
-            <a:ext cx="685800" cy="475488"/>
-          </a:xfrm>
-          <a:prstGeom prst="rect">
-            <a:avLst/>
-          </a:prstGeom>
-          <a:noFill/>
-          <a:ln/>
-        </p:spPr>
-        <p:txBody>
-          <a:bodyPr wrap="square" lIns="0" tIns="0" rIns="0" bIns="0" rtlCol="0" anchor="ctr"/>
-          <a:lstStyle/>
-          <a:p>
-            <a:pPr algn="ctr" indent="0" marL="0">
-              <a:buNone/>
-            </a:pPr>
-            <a:r>
-              <a:rPr lang="en-US" sz="900" b="1" dirty="0">
-                <a:solidFill>
-                  <a:srgbClr val="9D174D"/>
-                </a:solidFill>
-                <a:latin typeface="Trebuchet MS" pitchFamily="34" charset="0"/>
-                <a:ea typeface="Trebuchet MS" pitchFamily="34" charset="-122"/>
-                <a:cs typeface="Trebuchet MS" pitchFamily="34" charset="-120"/>
-              </a:rPr>
-              <a:t>p</a:t>
-            </a:r>
-            <a:endParaRPr lang="en-US" sz="900" dirty="0"/>
-          </a:p>
-        </p:txBody>
-      </p:sp>
-      <p:sp>
-        <p:nvSpPr>
-          <p:cNvPr id="49" name="Shape 47"/>
-          <p:cNvSpPr/>
-          <p:nvPr/>
-        </p:nvSpPr>
-        <p:spPr>
-          <a:xfrm>
-            <a:off x="4447032" y="4169664"/>
-            <a:ext cx="685800" cy="475488"/>
-          </a:xfrm>
-          <a:prstGeom prst="rect">
-            <a:avLst>
-              <a:gd name="adj" fmla="val 7692"/>
-            </a:avLst>
-          </a:prstGeom>
-          <a:solidFill>
-            <a:srgbClr val="FFFFFF"/>
-          </a:solidFill>
-          <a:ln w="12700">
-            <a:solidFill>
-              <a:srgbClr val="DB2777"/>
-            </a:solidFill>
-            <a:prstDash val="solid"/>
-          </a:ln>
-        </p:spPr>
-      </p:sp>
-      <p:sp>
-        <p:nvSpPr>
-          <p:cNvPr id="50" name="Text 48"/>
-          <p:cNvSpPr/>
-          <p:nvPr/>
-        </p:nvSpPr>
-        <p:spPr>
-          <a:xfrm>
-            <a:off x="4447032" y="4169664"/>
-            <a:ext cx="685800" cy="475488"/>
-          </a:xfrm>
-          <a:prstGeom prst="rect">
-            <a:avLst/>
-          </a:prstGeom>
-          <a:noFill/>
-          <a:ln/>
-        </p:spPr>
-        <p:txBody>
-          <a:bodyPr wrap="square" lIns="0" tIns="0" rIns="0" bIns="0" rtlCol="0" anchor="ctr"/>
-          <a:lstStyle/>
-          <a:p>
-            <a:pPr algn="ctr" indent="0" marL="0">
-              <a:buNone/>
-            </a:pPr>
-            <a:r>
-              <a:rPr lang="en-US" sz="900" b="1" dirty="0">
-                <a:solidFill>
-                  <a:srgbClr val="9D174D"/>
-                </a:solidFill>
-                <a:latin typeface="Trebuchet MS" pitchFamily="34" charset="0"/>
-                <a:ea typeface="Trebuchet MS" pitchFamily="34" charset="-122"/>
-                <a:cs typeface="Trebuchet MS" pitchFamily="34" charset="-120"/>
-              </a:rPr>
-              <a:t>er</a:t>
-            </a:r>
-            <a:endParaRPr lang="en-US" sz="900" dirty="0"/>
-          </a:p>
-        </p:txBody>
-      </p:sp>
-      <p:sp>
-        <p:nvSpPr>
-          <p:cNvPr id="51" name="Shape 49"/>
-          <p:cNvSpPr/>
-          <p:nvPr/>
-        </p:nvSpPr>
-        <p:spPr>
-          <a:xfrm>
-            <a:off x="5254752" y="4169664"/>
-            <a:ext cx="685800" cy="475488"/>
-          </a:xfrm>
-          <a:prstGeom prst="rect">
-            <a:avLst>
-              <a:gd name="adj" fmla="val 7692"/>
-            </a:avLst>
-          </a:prstGeom>
-          <a:solidFill>
-            <a:srgbClr val="FFFFFF"/>
-          </a:solidFill>
-          <a:ln w="12700">
-            <a:solidFill>
-              <a:srgbClr val="DB2777"/>
-            </a:solidFill>
-            <a:prstDash val="solid"/>
-          </a:ln>
-        </p:spPr>
-      </p:sp>
-      <p:sp>
-        <p:nvSpPr>
-          <p:cNvPr id="52" name="Text 50"/>
-          <p:cNvSpPr/>
-          <p:nvPr/>
-        </p:nvSpPr>
-        <p:spPr>
-          <a:xfrm>
-            <a:off x="5254752" y="4169664"/>
-            <a:ext cx="685800" cy="475488"/>
-          </a:xfrm>
-          <a:prstGeom prst="rect">
-            <a:avLst/>
-          </a:prstGeom>
-          <a:noFill/>
-          <a:ln/>
-        </p:spPr>
-        <p:txBody>
-          <a:bodyPr wrap="square" lIns="0" tIns="0" rIns="0" bIns="0" rtlCol="0" anchor="ctr"/>
-          <a:lstStyle/>
-          <a:p>
-            <a:pPr algn="ctr" indent="0" marL="0">
-              <a:buNone/>
-            </a:pPr>
-            <a:r>
-              <a:rPr lang="en-US" sz="900" b="1" dirty="0">
-                <a:solidFill>
-                  <a:srgbClr val="9D174D"/>
-                </a:solidFill>
-                <a:latin typeface="Trebuchet MS" pitchFamily="34" charset="0"/>
-                <a:ea typeface="Trebuchet MS" pitchFamily="34" charset="-122"/>
-                <a:cs typeface="Trebuchet MS" pitchFamily="34" charset="-120"/>
-              </a:rPr>
-              <a:t>s</a:t>
-            </a:r>
-            <a:endParaRPr lang="en-US" sz="900" dirty="0"/>
-          </a:p>
-        </p:txBody>
-      </p:sp>
-      <p:sp>
-        <p:nvSpPr>
-          <p:cNvPr id="53" name="Shape 51"/>
-          <p:cNvSpPr/>
-          <p:nvPr/>
-        </p:nvSpPr>
-        <p:spPr>
-          <a:xfrm>
-            <a:off x="6062472" y="4169664"/>
-            <a:ext cx="685800" cy="475488"/>
-          </a:xfrm>
-          <a:prstGeom prst="rect">
-            <a:avLst>
-              <a:gd name="adj" fmla="val 7692"/>
-            </a:avLst>
-          </a:prstGeom>
-          <a:solidFill>
-            <a:srgbClr val="FFFFFF"/>
-          </a:solidFill>
-          <a:ln w="12700">
-            <a:solidFill>
-              <a:srgbClr val="DB2777"/>
-            </a:solidFill>
-            <a:prstDash val="solid"/>
-          </a:ln>
-        </p:spPr>
-      </p:sp>
-      <p:sp>
-        <p:nvSpPr>
-          <p:cNvPr id="54" name="Text 52"/>
-          <p:cNvSpPr/>
-          <p:nvPr/>
-        </p:nvSpPr>
-        <p:spPr>
-          <a:xfrm>
-            <a:off x="6062472" y="4169664"/>
-            <a:ext cx="685800" cy="475488"/>
-          </a:xfrm>
-          <a:prstGeom prst="rect">
-            <a:avLst/>
-          </a:prstGeom>
-          <a:noFill/>
-          <a:ln/>
-        </p:spPr>
-        <p:txBody>
-          <a:bodyPr wrap="square" lIns="0" tIns="0" rIns="0" bIns="0" rtlCol="0" anchor="ctr"/>
-          <a:lstStyle/>
-          <a:p>
-            <a:pPr algn="ctr" indent="0" marL="0">
-              <a:buNone/>
-            </a:pPr>
-            <a:r>
-              <a:rPr lang="en-US" sz="900" b="1" dirty="0">
-                <a:solidFill>
-                  <a:srgbClr val="9D174D"/>
-                </a:solidFill>
-                <a:latin typeface="Trebuchet MS" pitchFamily="34" charset="0"/>
-                <a:ea typeface="Trebuchet MS" pitchFamily="34" charset="-122"/>
-                <a:cs typeface="Trebuchet MS" pitchFamily="34" charset="-120"/>
-              </a:rPr>
-              <a:t>ua</a:t>
-            </a:r>
-            <a:endParaRPr lang="en-US" sz="900" dirty="0"/>
-          </a:p>
-        </p:txBody>
-      </p:sp>
-      <p:sp>
-        <p:nvSpPr>
-          <p:cNvPr id="55" name="Shape 53"/>
-          <p:cNvSpPr/>
-          <p:nvPr/>
-        </p:nvSpPr>
-        <p:spPr>
-          <a:xfrm>
-            <a:off x="6870192" y="4169664"/>
-            <a:ext cx="685800" cy="475488"/>
-          </a:xfrm>
-          <a:prstGeom prst="rect">
-            <a:avLst>
-              <a:gd name="adj" fmla="val 7692"/>
-            </a:avLst>
-          </a:prstGeom>
-          <a:solidFill>
-            <a:srgbClr val="FFFFFF"/>
-          </a:solidFill>
-          <a:ln w="12700">
-            <a:solidFill>
-              <a:srgbClr val="DB2777"/>
-            </a:solidFill>
-            <a:prstDash val="solid"/>
-          </a:ln>
-        </p:spPr>
-      </p:sp>
-      <p:sp>
-        <p:nvSpPr>
-          <p:cNvPr id="56" name="Text 54"/>
-          <p:cNvSpPr/>
-          <p:nvPr/>
-        </p:nvSpPr>
-        <p:spPr>
-          <a:xfrm>
-            <a:off x="6870192" y="4169664"/>
-            <a:ext cx="685800" cy="475488"/>
-          </a:xfrm>
-          <a:prstGeom prst="rect">
-            <a:avLst/>
-          </a:prstGeom>
-          <a:noFill/>
-          <a:ln/>
-        </p:spPr>
-        <p:txBody>
-          <a:bodyPr wrap="square" lIns="0" tIns="0" rIns="0" bIns="0" rtlCol="0" anchor="ctr"/>
-          <a:lstStyle/>
-          <a:p>
-            <a:pPr algn="ctr" indent="0" marL="0">
-              <a:buNone/>
-            </a:pPr>
-            <a:r>
-              <a:rPr lang="en-US" sz="900" b="1" dirty="0">
-                <a:solidFill>
-                  <a:srgbClr val="9D174D"/>
-                </a:solidFill>
-                <a:latin typeface="Trebuchet MS" pitchFamily="34" charset="0"/>
-                <a:ea typeface="Trebuchet MS" pitchFamily="34" charset="-122"/>
-                <a:cs typeface="Trebuchet MS" pitchFamily="34" charset="-120"/>
-              </a:rPr>
-              <a:t>d</a:t>
-            </a:r>
-            <a:endParaRPr lang="en-US" sz="900" dirty="0"/>
-          </a:p>
-        </p:txBody>
-      </p:sp>
-      <p:sp>
-        <p:nvSpPr>
-          <p:cNvPr id="57" name="Shape 55"/>
-          <p:cNvSpPr/>
-          <p:nvPr/>
-        </p:nvSpPr>
-        <p:spPr>
-          <a:xfrm>
-            <a:off x="7677912" y="4169664"/>
-            <a:ext cx="685800" cy="475488"/>
-          </a:xfrm>
-          <a:prstGeom prst="rect">
-            <a:avLst>
-              <a:gd name="adj" fmla="val 7692"/>
-            </a:avLst>
-          </a:prstGeom>
-          <a:solidFill>
-            <a:srgbClr val="FFFFFF"/>
-          </a:solidFill>
-          <a:ln w="12700">
-            <a:solidFill>
-              <a:srgbClr val="DB2777"/>
-            </a:solidFill>
-            <a:prstDash val="solid"/>
-          </a:ln>
-        </p:spPr>
-      </p:sp>
-      <p:sp>
-        <p:nvSpPr>
-          <p:cNvPr id="58" name="Text 56"/>
-          <p:cNvSpPr/>
-          <p:nvPr/>
-        </p:nvSpPr>
-        <p:spPr>
-          <a:xfrm>
-            <a:off x="7677912" y="4169664"/>
-            <a:ext cx="685800" cy="475488"/>
-          </a:xfrm>
-          <a:prstGeom prst="rect">
-            <a:avLst/>
-          </a:prstGeom>
-          <a:noFill/>
-          <a:ln/>
-        </p:spPr>
-        <p:txBody>
-          <a:bodyPr wrap="square" lIns="0" tIns="0" rIns="0" bIns="0" rtlCol="0" anchor="ctr"/>
-          <a:lstStyle/>
-          <a:p>
-            <a:pPr algn="ctr" indent="0" marL="0">
-              <a:buNone/>
-            </a:pPr>
-            <a:r>
-              <a:rPr lang="en-US" sz="900" b="1" dirty="0">
-                <a:solidFill>
-                  <a:srgbClr val="9D174D"/>
-                </a:solidFill>
-                <a:latin typeface="Trebuchet MS" pitchFamily="34" charset="0"/>
-                <a:ea typeface="Trebuchet MS" pitchFamily="34" charset="-122"/>
-                <a:cs typeface="Trebuchet MS" pitchFamily="34" charset="-120"/>
-              </a:rPr>
-              <a:t>ed</a:t>
             </a:r>
             <a:endParaRPr lang="en-US" sz="900" dirty="0"/>
           </a:p>
@@ -34914,7 +34992,7 @@
                 <a:ea typeface="Calibri" pitchFamily="34" charset="-122"/>
                 <a:cs typeface="Calibri" pitchFamily="34" charset="-120"/>
               </a:rPr>
-              <a:t>Word Labs  •  wordlabs.app  •  Root: 'persuade' = to urge or convince someone</a:t>
+              <a:t>Word Labs  •  wordlabs.app  •  Root: 'persuade' = to convince or urge someone</a:t>
             </a:r>
             <a:endParaRPr lang="en-US" sz="800" dirty="0"/>
           </a:p>
@@ -36083,7 +36161,7 @@
                 <a:ea typeface="Calibri" pitchFamily="34" charset="-122"/>
                 <a:cs typeface="Calibri" pitchFamily="34" charset="-120"/>
               </a:rPr>
-              <a:t>Word Labs  •  wordlabs.app  •  Root: 'persuade' = to urge or convince someone</a:t>
+              <a:t>Word Labs  •  wordlabs.app  •  Root: 'persuade' = to convince or urge someone</a:t>
             </a:r>
             <a:endParaRPr lang="en-US" sz="800" dirty="0"/>
           </a:p>
@@ -36729,7 +36807,7 @@
                 <a:ea typeface="Trebuchet MS" pitchFamily="34" charset="-122"/>
                 <a:cs typeface="Trebuchet MS" pitchFamily="34" charset="-120"/>
               </a:rPr>
-              <a:t>pre-</a:t>
+              <a:t>dis-</a:t>
             </a:r>
             <a:endParaRPr lang="en-US" sz="1300" dirty="0"/>
           </a:p>
@@ -37035,7 +37113,7 @@
                 <a:ea typeface="Trebuchet MS" pitchFamily="34" charset="-122"/>
                 <a:cs typeface="Trebuchet MS" pitchFamily="34" charset="-120"/>
               </a:rPr>
-              <a:t>self-</a:t>
+              <a:t>pre-</a:t>
             </a:r>
             <a:endParaRPr lang="en-US" sz="1300" dirty="0"/>
           </a:p>
@@ -37124,7 +37202,7 @@
                 <a:ea typeface="Trebuchet MS" pitchFamily="34" charset="-122"/>
                 <a:cs typeface="Trebuchet MS" pitchFamily="34" charset="-120"/>
               </a:rPr>
-              <a:t>-sive</a:t>
+              <a:t>-ive</a:t>
             </a:r>
             <a:endParaRPr lang="en-US" sz="1300" dirty="0"/>
           </a:p>
@@ -37983,7 +38061,7 @@
                 <a:ea typeface="Calibri" pitchFamily="34" charset="-122"/>
                 <a:cs typeface="Calibri" pitchFamily="34" charset="-120"/>
               </a:rPr>
-              <a:t>Word Labs  •  wordlabs.app  •  Root: 'persuade' = to urge or convince someone</a:t>
+              <a:t>Word Labs  •  wordlabs.app  •  Root: 'persuade' = to convince or urge someone</a:t>
             </a:r>
             <a:endParaRPr lang="en-US" sz="800" dirty="0"/>
           </a:p>
@@ -38147,7 +38225,7 @@
                 <a:ea typeface="Calibri" pitchFamily="34" charset="-122"/>
                 <a:cs typeface="Calibri" pitchFamily="34" charset="-120"/>
               </a:rPr>
-              <a:t>The core part of a word carrying its basic meaning. For example, 'persuade' means 'to urge or convince someone'.</a:t>
+              <a:t>The core part of a word carrying its basic meaning. For example, 'persuade' means 'to convince or urge someone'.</a:t>
             </a:r>
             <a:endParaRPr lang="en-US" sz="1350" dirty="0"/>
           </a:p>
@@ -38767,7 +38845,7 @@
                 <a:ea typeface="Calibri" pitchFamily="34" charset="-122"/>
                 <a:cs typeface="Calibri" pitchFamily="34" charset="-120"/>
               </a:rPr>
-              <a:t>Word Labs  •  wordlabs.app  •  Root: 'persuade' = to urge or convince someone</a:t>
+              <a:t>Word Labs  •  wordlabs.app  •  Root: 'persuade' = to convince or urge someone</a:t>
             </a:r>
             <a:endParaRPr lang="en-US" sz="800" dirty="0"/>
           </a:p>
@@ -38879,7 +38957,7 @@
                 <a:ea typeface="Calibri" pitchFamily="34" charset="-122"/>
                 <a:cs typeface="Calibri" pitchFamily="34" charset="-120"/>
               </a:rPr>
-              <a:t>1.  The word 'persuade' comes from a Latin root meaning to urge or convince.</a:t>
+              <a:t>1.  The root 'persuade' comes from Latin.</a:t>
             </a:r>
             <a:endParaRPr lang="en-US" sz="1300" dirty="0"/>
           </a:p>
@@ -39018,7 +39096,7 @@
                 <a:ea typeface="Calibri" pitchFamily="34" charset="-122"/>
                 <a:cs typeface="Calibri" pitchFamily="34" charset="-120"/>
               </a:rPr>
-              <a:t>2.  The word 'persuasive' means that someone cannot be convinced at all.</a:t>
+              <a:t>2.  A persuader is someone who tries to convince other people.</a:t>
             </a:r>
             <a:endParaRPr lang="en-US" sz="1300" dirty="0"/>
           </a:p>
@@ -39041,11 +39119,11 @@
             </a:avLst>
           </a:prstGeom>
           <a:solidFill>
-            <a:srgbClr val="FEE2E2"/>
-          </a:solidFill>
-          <a:ln w="12700">
-            <a:solidFill>
-              <a:srgbClr val="DC2626"/>
+            <a:srgbClr val="DCFCE7"/>
+          </a:solidFill>
+          <a:ln w="12700">
+            <a:solidFill>
+              <a:srgbClr val="16A34A"/>
             </a:solidFill>
             <a:prstDash val="solid"/>
           </a:ln>
@@ -39078,13 +39156,13 @@
             <a:r>
               <a:rPr lang="en-US" sz="1100" b="1" dirty="0">
                 <a:solidFill>
-                  <a:srgbClr val="DC2626"/>
+                  <a:srgbClr val="16A34A"/>
                 </a:solidFill>
                 <a:latin typeface="Trebuchet MS" pitchFamily="34" charset="0"/>
                 <a:ea typeface="Trebuchet MS" pitchFamily="34" charset="-122"/>
                 <a:cs typeface="Trebuchet MS" pitchFamily="34" charset="-120"/>
               </a:rPr>
-              <a:t>FALSE</a:t>
+              <a:t>TRUE</a:t>
             </a:r>
             <a:endParaRPr lang="en-US" sz="1100" dirty="0"/>
           </a:p>
@@ -39157,7 +39235,7 @@
                 <a:ea typeface="Calibri" pitchFamily="34" charset="-122"/>
                 <a:cs typeface="Calibri" pitchFamily="34" charset="-120"/>
               </a:rPr>
-              <a:t>3.  Adding the suffix '-sion' to 'persuade' gives us the noun 'persuasion'.</a:t>
+              <a:t>3.  Persuasion and persuade have completely different root words.</a:t>
             </a:r>
             <a:endParaRPr lang="en-US" sz="1300" dirty="0"/>
           </a:p>
@@ -39180,11 +39258,11 @@
             </a:avLst>
           </a:prstGeom>
           <a:solidFill>
-            <a:srgbClr val="DCFCE7"/>
-          </a:solidFill>
-          <a:ln w="12700">
-            <a:solidFill>
-              <a:srgbClr val="16A34A"/>
+            <a:srgbClr val="FEE2E2"/>
+          </a:solidFill>
+          <a:ln w="12700">
+            <a:solidFill>
+              <a:srgbClr val="DC2626"/>
             </a:solidFill>
             <a:prstDash val="solid"/>
           </a:ln>
@@ -39217,13 +39295,13 @@
             <a:r>
               <a:rPr lang="en-US" sz="1100" b="1" dirty="0">
                 <a:solidFill>
-                  <a:srgbClr val="16A34A"/>
+                  <a:srgbClr val="DC2626"/>
                 </a:solidFill>
                 <a:latin typeface="Trebuchet MS" pitchFamily="34" charset="0"/>
                 <a:ea typeface="Trebuchet MS" pitchFamily="34" charset="-122"/>
                 <a:cs typeface="Trebuchet MS" pitchFamily="34" charset="-120"/>
               </a:rPr>
-              <a:t>TRUE</a:t>
+              <a:t>FALSE</a:t>
             </a:r>
             <a:endParaRPr lang="en-US" sz="1100" dirty="0"/>
           </a:p>
@@ -39296,7 +39374,7 @@
                 <a:ea typeface="Calibri" pitchFamily="34" charset="-122"/>
                 <a:cs typeface="Calibri" pitchFamily="34" charset="-120"/>
               </a:rPr>
-              <a:t>4.  A persuader is someone who tries to convince other people.</a:t>
+              <a:t>4.  The word 'persuasive' means to refuse to listen to others.</a:t>
             </a:r>
             <a:endParaRPr lang="en-US" sz="1300" dirty="0"/>
           </a:p>
@@ -39319,11 +39397,11 @@
             </a:avLst>
           </a:prstGeom>
           <a:solidFill>
-            <a:srgbClr val="DCFCE7"/>
-          </a:solidFill>
-          <a:ln w="12700">
-            <a:solidFill>
-              <a:srgbClr val="16A34A"/>
+            <a:srgbClr val="FEE2E2"/>
+          </a:solidFill>
+          <a:ln w="12700">
+            <a:solidFill>
+              <a:srgbClr val="DC2626"/>
             </a:solidFill>
             <a:prstDash val="solid"/>
           </a:ln>
@@ -39356,13 +39434,13 @@
             <a:r>
               <a:rPr lang="en-US" sz="1100" b="1" dirty="0">
                 <a:solidFill>
-                  <a:srgbClr val="16A34A"/>
+                  <a:srgbClr val="DC2626"/>
                 </a:solidFill>
                 <a:latin typeface="Trebuchet MS" pitchFamily="34" charset="0"/>
                 <a:ea typeface="Trebuchet MS" pitchFamily="34" charset="-122"/>
                 <a:cs typeface="Trebuchet MS" pitchFamily="34" charset="-120"/>
               </a:rPr>
-              <a:t>TRUE</a:t>
+              <a:t>FALSE</a:t>
             </a:r>
             <a:endParaRPr lang="en-US" sz="1100" dirty="0"/>
           </a:p>
@@ -39435,7 +39513,7 @@
                 <a:ea typeface="Calibri" pitchFamily="34" charset="-122"/>
                 <a:cs typeface="Calibri" pitchFamily="34" charset="-120"/>
               </a:rPr>
-              <a:t>5.  The prefix 'un-' in 'unpersuaded' means 'again'.</a:t>
+              <a:t>5.  Adding the prefix 'un' to 'persuaded' means not convinced.</a:t>
             </a:r>
             <a:endParaRPr lang="en-US" sz="1300" dirty="0"/>
           </a:p>
@@ -39458,11 +39536,11 @@
             </a:avLst>
           </a:prstGeom>
           <a:solidFill>
-            <a:srgbClr val="FEE2E2"/>
-          </a:solidFill>
-          <a:ln w="12700">
-            <a:solidFill>
-              <a:srgbClr val="DC2626"/>
+            <a:srgbClr val="DCFCE7"/>
+          </a:solidFill>
+          <a:ln w="12700">
+            <a:solidFill>
+              <a:srgbClr val="16A34A"/>
             </a:solidFill>
             <a:prstDash val="solid"/>
           </a:ln>
@@ -39495,13 +39573,13 @@
             <a:r>
               <a:rPr lang="en-US" sz="1100" b="1" dirty="0">
                 <a:solidFill>
-                  <a:srgbClr val="DC2626"/>
+                  <a:srgbClr val="16A34A"/>
                 </a:solidFill>
                 <a:latin typeface="Trebuchet MS" pitchFamily="34" charset="0"/>
                 <a:ea typeface="Trebuchet MS" pitchFamily="34" charset="-122"/>
                 <a:cs typeface="Trebuchet MS" pitchFamily="34" charset="-120"/>
               </a:rPr>
-              <a:t>FALSE</a:t>
+              <a:t>TRUE</a:t>
             </a:r>
             <a:endParaRPr lang="en-US" sz="1100" dirty="0"/>
           </a:p>
@@ -39793,7 +39871,7 @@
                 <a:ea typeface="Calibri" pitchFamily="34" charset="-122"/>
                 <a:cs typeface="Calibri" pitchFamily="34" charset="-120"/>
               </a:rPr>
-              <a:t>Word Labs  •  wordlabs.app  •  Root: 'persuade' = to urge or convince someone</a:t>
+              <a:t>Word Labs  •  wordlabs.app  •  Root: 'persuade' = to convince or urge someone</a:t>
             </a:r>
             <a:endParaRPr lang="en-US" sz="800" dirty="0"/>
           </a:p>
@@ -39930,7 +40008,7 @@
                 <a:ea typeface="Trebuchet MS" pitchFamily="34" charset="-122"/>
                 <a:cs typeface="Trebuchet MS" pitchFamily="34" charset="-120"/>
               </a:rPr>
-              <a:t>to urge or convince someone</a:t>
+              <a:t>to convince or urge someone</a:t>
             </a:r>
             <a:endParaRPr lang="en-US" sz="2000" dirty="0"/>
           </a:p>
@@ -40762,7 +40840,7 @@
                 <a:ea typeface="Calibri" pitchFamily="34" charset="-122"/>
                 <a:cs typeface="Calibri" pitchFamily="34" charset="-120"/>
               </a:rPr>
-              <a:t>Word Labs  •  wordlabs.app  •  Root: 'persuade' = to urge or convince someone</a:t>
+              <a:t>Word Labs  •  wordlabs.app  •  Root: 'persuade' = to convince or urge someone</a:t>
             </a:r>
             <a:endParaRPr lang="en-US" sz="800" dirty="0"/>
           </a:p>
@@ -41408,7 +41486,7 @@
                 <a:ea typeface="Trebuchet MS" pitchFamily="34" charset="-122"/>
                 <a:cs typeface="Trebuchet MS" pitchFamily="34" charset="-120"/>
               </a:rPr>
-              <a:t>pre-</a:t>
+              <a:t>dis-</a:t>
             </a:r>
             <a:endParaRPr lang="en-US" sz="1300" dirty="0"/>
           </a:p>
@@ -41714,7 +41792,7 @@
                 <a:ea typeface="Trebuchet MS" pitchFamily="34" charset="-122"/>
                 <a:cs typeface="Trebuchet MS" pitchFamily="34" charset="-120"/>
               </a:rPr>
-              <a:t>self-</a:t>
+              <a:t>pre-</a:t>
             </a:r>
             <a:endParaRPr lang="en-US" sz="1300" dirty="0"/>
           </a:p>
@@ -41803,7 +41881,7 @@
                 <a:ea typeface="Trebuchet MS" pitchFamily="34" charset="-122"/>
                 <a:cs typeface="Trebuchet MS" pitchFamily="34" charset="-120"/>
               </a:rPr>
-              <a:t>-sive</a:t>
+              <a:t>-ive</a:t>
             </a:r>
             <a:endParaRPr lang="en-US" sz="1300" dirty="0"/>
           </a:p>
@@ -42536,7 +42614,7 @@
                 <a:ea typeface="Calibri" pitchFamily="34" charset="-122"/>
                 <a:cs typeface="Calibri" pitchFamily="34" charset="-120"/>
               </a:rPr>
-              <a:t>Word Labs  •  wordlabs.app  •  Root: 'persuade' = to urge or convince someone</a:t>
+              <a:t>Word Labs  •  wordlabs.app  •  Root: 'persuade' = to convince or urge someone</a:t>
             </a:r>
             <a:endParaRPr lang="en-US" sz="800" dirty="0"/>
           </a:p>
@@ -42714,7 +42792,7 @@
                 <a:ea typeface="Calibri" pitchFamily="34" charset="-122"/>
                 <a:cs typeface="Calibri" pitchFamily="34" charset="-120"/>
               </a:rPr>
-              <a:t>In the process of trying to convince someone.</a:t>
+              <a:t>The act of trying to convince someone right now.</a:t>
             </a:r>
             <a:endParaRPr lang="en-US" sz="1200" dirty="0"/>
           </a:p>
@@ -42853,7 +42931,7 @@
                 <a:ea typeface="Calibri" pitchFamily="34" charset="-122"/>
                 <a:cs typeface="Calibri" pitchFamily="34" charset="-120"/>
               </a:rPr>
-              <a:t>The act of convincing someone to do or believe something.</a:t>
+              <a:t>The skill or act of convincing someone to agree with you.</a:t>
             </a:r>
             <a:endParaRPr lang="en-US" sz="1200" dirty="0"/>
           </a:p>
@@ -42992,7 +43070,7 @@
                 <a:ea typeface="Calibri" pitchFamily="34" charset="-122"/>
                 <a:cs typeface="Calibri" pitchFamily="34" charset="-120"/>
               </a:rPr>
-              <a:t>To convince someone to do or believe something.</a:t>
+              <a:t>To talk someone into doing or believing something.</a:t>
             </a:r>
             <a:endParaRPr lang="en-US" sz="1200" dirty="0"/>
           </a:p>
@@ -43131,7 +43209,7 @@
                 <a:ea typeface="Calibri" pitchFamily="34" charset="-122"/>
                 <a:cs typeface="Calibri" pitchFamily="34" charset="-120"/>
               </a:rPr>
-              <a:t>Good at convincing people to agree with you.</a:t>
+              <a:t>Describing something that is very good at convincing people.</a:t>
             </a:r>
             <a:endParaRPr lang="en-US" sz="1200" dirty="0"/>
           </a:p>
@@ -43270,7 +43348,7 @@
                 <a:ea typeface="Calibri" pitchFamily="34" charset="-122"/>
                 <a:cs typeface="Calibri" pitchFamily="34" charset="-120"/>
               </a:rPr>
-              <a:t>Not convinced or won over by an argument.</a:t>
+              <a:t>Not convinced or talked into believing something.</a:t>
             </a:r>
             <a:endParaRPr lang="en-US" sz="1200" dirty="0"/>
           </a:p>
@@ -43409,7 +43487,7 @@
                 <a:ea typeface="Calibri" pitchFamily="34" charset="-122"/>
                 <a:cs typeface="Calibri" pitchFamily="34" charset="-120"/>
               </a:rPr>
-              <a:t>A person who tries to convince others.</a:t>
+              <a:t>A person who is good at convincing others.</a:t>
             </a:r>
             <a:endParaRPr lang="en-US" sz="1200" dirty="0"/>
           </a:p>
@@ -43548,7 +43626,7 @@
                 <a:ea typeface="Calibri" pitchFamily="34" charset="-122"/>
                 <a:cs typeface="Calibri" pitchFamily="34" charset="-120"/>
               </a:rPr>
-              <a:t>Successfully convinced someone to do or think something.</a:t>
+              <a:t>When someone was successfully talked into doing something.</a:t>
             </a:r>
             <a:endParaRPr lang="en-US" sz="1200" dirty="0"/>
           </a:p>
@@ -43840,7 +43918,7 @@
                 <a:ea typeface="Calibri" pitchFamily="34" charset="-122"/>
                 <a:cs typeface="Calibri" pitchFamily="34" charset="-120"/>
               </a:rPr>
-              <a:t>Word Labs  •  wordlabs.app  •  Root: 'persuade' = to urge or convince someone</a:t>
+              <a:t>Word Labs  •  wordlabs.app  •  Root: 'persuade' = to convince or urge someone</a:t>
             </a:r>
             <a:endParaRPr lang="en-US" sz="800" dirty="0"/>
           </a:p>
@@ -44043,7 +44121,7 @@
                 <a:ea typeface="Calibri" pitchFamily="34" charset="-122"/>
                 <a:cs typeface="Calibri" pitchFamily="34" charset="-120"/>
               </a:rPr>
-              <a:t>Mia used a persuasive speech to convince her class to adopt a school veggie garden.</a:t>
+              <a:t>She tried to persuade her teacher to let the class have extra time on the project.</a:t>
             </a:r>
             <a:endParaRPr lang="en-US" sz="1500" dirty="0"/>
           </a:p>
@@ -44207,7 +44285,7 @@
                 <a:ea typeface="Calibri" pitchFamily="34" charset="-122"/>
                 <a:cs typeface="Calibri" pitchFamily="34" charset="-120"/>
               </a:rPr>
-              <a:t>The older student persuaded the teacher to allow extra time for the science project.</a:t>
+              <a:t>His persuasive speech about recycling convinced the whole school to take action.</a:t>
             </a:r>
             <a:endParaRPr lang="en-US" sz="1500" dirty="0"/>
           </a:p>
@@ -44371,7 +44449,7 @@
                 <a:ea typeface="Calibri" pitchFamily="34" charset="-122"/>
                 <a:cs typeface="Calibri" pitchFamily="34" charset="-120"/>
               </a:rPr>
-              <a:t>Writing a persuasion piece is a common task in Year 5 English.</a:t>
+              <a:t>After much persuasion, Dad finally agreed to let us get a puppy.</a:t>
             </a:r>
             <a:endParaRPr lang="en-US" sz="1500" dirty="0"/>
           </a:p>
